--- a/Planning docs/Slides/lesson-11-2-teacher-slides.pptx
+++ b/Planning docs/Slides/lesson-11-2-teacher-slides.pptx
@@ -21,9 +21,12 @@
     <p:sldId id="269" r:id="rId15"/>
     <p:sldId id="270" r:id="rId16"/>
     <p:sldId id="271" r:id="rId17"/>
+    <p:sldId id="272" r:id="rId18"/>
+    <p:sldId id="273" r:id="rId19"/>
+    <p:sldId id="274" r:id="rId20"/>
   </p:sldIdLst>
   <p:notesMasterIdLst>
-    <p:notesMasterId r:id="rId18"/>
+    <p:notesMasterId r:id="rId21"/>
   </p:notesMasterIdLst>
   <p:sldSz cx="9144000" cy="5143500"/>
   <p:notesSz cx="5143500" cy="9144000"/>
@@ -605,7 +608,7 @@
           <a:p>
             <a:r>
               <a:rPr lang="en-US" dirty="0"/>
-              <a:t>Each word appears in the chapters read this week, in the author’s own sentence.</a:t>
+              <a:t>Break the word into base + word part. Ask what the part adds to the meaning.</a:t>
             </a:r>
             <a:endParaRPr lang="en-US" dirty="0"/>
           </a:p>
@@ -693,7 +696,7 @@
           <a:p>
             <a:r>
               <a:rPr lang="en-US" dirty="0"/>
-              <a:t>Answers: were, was, live, keeps</a:t>
+              <a:t>Each word appears in the chapters read this week, in the author’s own sentence.</a:t>
             </a:r>
             <a:endParaRPr lang="en-US" dirty="0"/>
           </a:p>
@@ -781,7 +784,9 @@
           <a:p>
             <a:r>
               <a:rPr lang="en-US" dirty="0"/>
-              <a:t>Answers: were, was, live, keeps</a:t>
+              <a:t>Let students talk through the questions before revealing the pattern.
+A verb has to match its subject. One thing is, was, or runs. More than one thing are, were, or run. Find the subject first, then check the verb against it.
+One girl, so was. Two girls would need were.</a:t>
             </a:r>
             <a:endParaRPr lang="en-US" dirty="0"/>
           </a:p>
@@ -869,7 +874,9 @@
           <a:p>
             <a:r>
               <a:rPr lang="en-US" dirty="0"/>
-              <a:t>just -s: spoons, bowls, kettles | -es: dishes, boxes, wishes | y → -ies: stories, ponies</a:t>
+              <a:t>Let students talk through the questions before revealing the pattern.
+A verb has to match its subject. One thing is, was, or runs. More than one thing are, were, or run. Find the subject first, then check the verb against it.
+One girl, so was. Two girls would need were.</a:t>
             </a:r>
             <a:endParaRPr lang="en-US" dirty="0"/>
           </a:p>
@@ -957,7 +964,7 @@
           <a:p>
             <a:r>
               <a:rPr lang="en-US" dirty="0"/>
-              <a:t>just -s: spoons, bowls, kettles | -es: dishes, boxes, wishes | y → -ies: stories, ponies</a:t>
+              <a:t>Answers: mice, run, Despereaux, hears, brothers, are, Mig, stirs</a:t>
             </a:r>
             <a:endParaRPr lang="en-US" dirty="0"/>
           </a:p>
@@ -1045,7 +1052,7 @@
           <a:p>
             <a:r>
               <a:rPr lang="en-US" dirty="0"/>
-              <a:t>Read the chapters, then return to the pause questions.</a:t>
+              <a:t>Answers: mice, run, Despereaux, hears, brothers, are, Mig, stirs</a:t>
             </a:r>
             <a:endParaRPr lang="en-US" dirty="0"/>
           </a:p>
@@ -1133,7 +1140,8 @@
           <a:p>
             <a:r>
               <a:rPr lang="en-US" dirty="0"/>
-              <a:t>Writer’s Workshop stage for the week.</a:t>
+              <a:t>Rule: Plain -s means more than one: three kings. An apostrophe + s means something belongs to: the king’s crown. If a plural already ends in s, add the apostrophe only: the girls’ room.
+Answers: Stanley’s, mouse’s, king’s, princess’s</a:t>
             </a:r>
             <a:endParaRPr lang="en-US" dirty="0"/>
           </a:p>
@@ -1157,6 +1165,271 @@
             <a:fld id="{F7021451-1387-4CA6-816F-3879F97B5CBC}" type="slidenum">
               <a:rPr lang="en-US"/>
               <a:t>16</a:t>
+            </a:fld>
+            <a:endParaRPr lang="en-US"/>
+          </a:p>
+        </p:txBody>
+      </p:sp>
+    </p:spTree>
+    <p:extLst>
+      <p:ext uri="{BB962C8B-B14F-4D97-AF65-F5344CB8AC3E}">
+        <p14:creationId xmlns:p14="http://schemas.microsoft.com/office/powerpoint/2010/main" val="1024086991"/>
+      </p:ext>
+    </p:extLst>
+  </p:cSld>
+  <p:clrMapOvr>
+    <a:masterClrMapping/>
+  </p:clrMapOvr>
+</p:notes>
+</file>
+
+<file path=ppt/notesSlides/notesSlide17.xml><?xml version="1.0" encoding="utf-8"?>
+<p:notes xmlns:a="http://schemas.openxmlformats.org/drawingml/2006/main" xmlns:r="http://schemas.openxmlformats.org/officeDocument/2006/relationships" xmlns:p="http://schemas.openxmlformats.org/presentationml/2006/main">
+  <p:cSld>
+    <p:spTree>
+      <p:nvGrpSpPr>
+        <p:cNvPr id="1" name=""/>
+        <p:cNvGrpSpPr/>
+        <p:nvPr/>
+      </p:nvGrpSpPr>
+      <p:grpSpPr>
+        <a:xfrm>
+          <a:off x="0" y="0"/>
+          <a:ext cx="0" cy="0"/>
+          <a:chOff x="0" y="0"/>
+          <a:chExt cx="0" cy="0"/>
+        </a:xfrm>
+      </p:grpSpPr>
+      <p:sp>
+        <p:nvSpPr>
+          <p:cNvPr id="2" name="Slide Image Placeholder 1"/>
+          <p:cNvSpPr>
+            <a:spLocks noGrp="1" noRot="1" noChangeAspect="1"/>
+          </p:cNvSpPr>
+          <p:nvPr>
+            <p:ph type="sldImg"/>
+          </p:nvPr>
+        </p:nvSpPr>
+        <p:spPr/>
+      </p:sp>
+      <p:sp>
+        <p:nvSpPr>
+          <p:cNvPr id="3" name="Notes Placeholder 2"/>
+          <p:cNvSpPr>
+            <a:spLocks noGrp="1"/>
+          </p:cNvSpPr>
+          <p:nvPr>
+            <p:ph type="body" idx="1"/>
+          </p:nvPr>
+        </p:nvSpPr>
+        <p:spPr/>
+        <p:txBody>
+          <a:bodyPr/>
+          <a:lstStyle/>
+          <a:p>
+            <a:r>
+              <a:rPr lang="en-US" dirty="0"/>
+              <a:t>Rule: Plain -s means more than one: three kings. An apostrophe + s means something belongs to: the king’s crown. If a plural already ends in s, add the apostrophe only: the girls’ room.
+Answers: Stanley’s, mouse’s, king’s, princess’s</a:t>
+            </a:r>
+            <a:endParaRPr lang="en-US" dirty="0"/>
+          </a:p>
+        </p:txBody>
+      </p:sp>
+      <p:sp>
+        <p:nvSpPr>
+          <p:cNvPr id="4" name="Slide Number Placeholder 3"/>
+          <p:cNvSpPr>
+            <a:spLocks noGrp="1"/>
+          </p:cNvSpPr>
+          <p:nvPr>
+            <p:ph type="sldNum" sz="quarter" idx="10"/>
+          </p:nvPr>
+        </p:nvSpPr>
+        <p:spPr/>
+        <p:txBody>
+          <a:bodyPr/>
+          <a:lstStyle/>
+          <a:p>
+            <a:fld id="{F7021451-1387-4CA6-816F-3879F97B5CBC}" type="slidenum">
+              <a:rPr lang="en-US"/>
+              <a:t>17</a:t>
+            </a:fld>
+            <a:endParaRPr lang="en-US"/>
+          </a:p>
+        </p:txBody>
+      </p:sp>
+    </p:spTree>
+    <p:extLst>
+      <p:ext uri="{BB962C8B-B14F-4D97-AF65-F5344CB8AC3E}">
+        <p14:creationId xmlns:p14="http://schemas.microsoft.com/office/powerpoint/2010/main" val="1024086991"/>
+      </p:ext>
+    </p:extLst>
+  </p:cSld>
+  <p:clrMapOvr>
+    <a:masterClrMapping/>
+  </p:clrMapOvr>
+</p:notes>
+</file>
+
+<file path=ppt/notesSlides/notesSlide18.xml><?xml version="1.0" encoding="utf-8"?>
+<p:notes xmlns:a="http://schemas.openxmlformats.org/drawingml/2006/main" xmlns:r="http://schemas.openxmlformats.org/officeDocument/2006/relationships" xmlns:p="http://schemas.openxmlformats.org/presentationml/2006/main">
+  <p:cSld>
+    <p:spTree>
+      <p:nvGrpSpPr>
+        <p:cNvPr id="1" name=""/>
+        <p:cNvGrpSpPr/>
+        <p:nvPr/>
+      </p:nvGrpSpPr>
+      <p:grpSpPr>
+        <a:xfrm>
+          <a:off x="0" y="0"/>
+          <a:ext cx="0" cy="0"/>
+          <a:chOff x="0" y="0"/>
+          <a:chExt cx="0" cy="0"/>
+        </a:xfrm>
+      </p:grpSpPr>
+      <p:sp>
+        <p:nvSpPr>
+          <p:cNvPr id="2" name="Slide Image Placeholder 1"/>
+          <p:cNvSpPr>
+            <a:spLocks noGrp="1" noRot="1" noChangeAspect="1"/>
+          </p:cNvSpPr>
+          <p:nvPr>
+            <p:ph type="sldImg"/>
+          </p:nvPr>
+        </p:nvSpPr>
+        <p:spPr/>
+      </p:sp>
+      <p:sp>
+        <p:nvSpPr>
+          <p:cNvPr id="3" name="Notes Placeholder 2"/>
+          <p:cNvSpPr>
+            <a:spLocks noGrp="1"/>
+          </p:cNvSpPr>
+          <p:nvPr>
+            <p:ph type="body" idx="1"/>
+          </p:nvPr>
+        </p:nvSpPr>
+        <p:spPr/>
+        <p:txBody>
+          <a:bodyPr/>
+          <a:lstStyle/>
+          <a:p>
+            <a:r>
+              <a:rPr lang="en-US" dirty="0"/>
+              <a:t>Read the chapters, then return to the pause questions.</a:t>
+            </a:r>
+            <a:endParaRPr lang="en-US" dirty="0"/>
+          </a:p>
+        </p:txBody>
+      </p:sp>
+      <p:sp>
+        <p:nvSpPr>
+          <p:cNvPr id="4" name="Slide Number Placeholder 3"/>
+          <p:cNvSpPr>
+            <a:spLocks noGrp="1"/>
+          </p:cNvSpPr>
+          <p:nvPr>
+            <p:ph type="sldNum" sz="quarter" idx="10"/>
+          </p:nvPr>
+        </p:nvSpPr>
+        <p:spPr/>
+        <p:txBody>
+          <a:bodyPr/>
+          <a:lstStyle/>
+          <a:p>
+            <a:fld id="{F7021451-1387-4CA6-816F-3879F97B5CBC}" type="slidenum">
+              <a:rPr lang="en-US"/>
+              <a:t>18</a:t>
+            </a:fld>
+            <a:endParaRPr lang="en-US"/>
+          </a:p>
+        </p:txBody>
+      </p:sp>
+    </p:spTree>
+    <p:extLst>
+      <p:ext uri="{BB962C8B-B14F-4D97-AF65-F5344CB8AC3E}">
+        <p14:creationId xmlns:p14="http://schemas.microsoft.com/office/powerpoint/2010/main" val="1024086991"/>
+      </p:ext>
+    </p:extLst>
+  </p:cSld>
+  <p:clrMapOvr>
+    <a:masterClrMapping/>
+  </p:clrMapOvr>
+</p:notes>
+</file>
+
+<file path=ppt/notesSlides/notesSlide19.xml><?xml version="1.0" encoding="utf-8"?>
+<p:notes xmlns:a="http://schemas.openxmlformats.org/drawingml/2006/main" xmlns:r="http://schemas.openxmlformats.org/officeDocument/2006/relationships" xmlns:p="http://schemas.openxmlformats.org/presentationml/2006/main">
+  <p:cSld>
+    <p:spTree>
+      <p:nvGrpSpPr>
+        <p:cNvPr id="1" name=""/>
+        <p:cNvGrpSpPr/>
+        <p:nvPr/>
+      </p:nvGrpSpPr>
+      <p:grpSpPr>
+        <a:xfrm>
+          <a:off x="0" y="0"/>
+          <a:ext cx="0" cy="0"/>
+          <a:chOff x="0" y="0"/>
+          <a:chExt cx="0" cy="0"/>
+        </a:xfrm>
+      </p:grpSpPr>
+      <p:sp>
+        <p:nvSpPr>
+          <p:cNvPr id="2" name="Slide Image Placeholder 1"/>
+          <p:cNvSpPr>
+            <a:spLocks noGrp="1" noRot="1" noChangeAspect="1"/>
+          </p:cNvSpPr>
+          <p:nvPr>
+            <p:ph type="sldImg"/>
+          </p:nvPr>
+        </p:nvSpPr>
+        <p:spPr/>
+      </p:sp>
+      <p:sp>
+        <p:nvSpPr>
+          <p:cNvPr id="3" name="Notes Placeholder 2"/>
+          <p:cNvSpPr>
+            <a:spLocks noGrp="1"/>
+          </p:cNvSpPr>
+          <p:nvPr>
+            <p:ph type="body" idx="1"/>
+          </p:nvPr>
+        </p:nvSpPr>
+        <p:spPr/>
+        <p:txBody>
+          <a:bodyPr/>
+          <a:lstStyle/>
+          <a:p>
+            <a:r>
+              <a:rPr lang="en-US" dirty="0"/>
+              <a:t>Writer’s Workshop stage for the week.</a:t>
+            </a:r>
+            <a:endParaRPr lang="en-US" dirty="0"/>
+          </a:p>
+        </p:txBody>
+      </p:sp>
+      <p:sp>
+        <p:nvSpPr>
+          <p:cNvPr id="4" name="Slide Number Placeholder 3"/>
+          <p:cNvSpPr>
+            <a:spLocks noGrp="1"/>
+          </p:cNvSpPr>
+          <p:nvPr>
+            <p:ph type="sldNum" sz="quarter" idx="10"/>
+          </p:nvPr>
+        </p:nvSpPr>
+        <p:spPr/>
+        <p:txBody>
+          <a:bodyPr/>
+          <a:lstStyle/>
+          <a:p>
+            <a:fld id="{F7021451-1387-4CA6-816F-3879F97B5CBC}" type="slidenum">
+              <a:rPr lang="en-US"/>
+              <a:t>19</a:t>
             </a:fld>
             <a:endParaRPr lang="en-US"/>
           </a:p>
@@ -1661,8 +1934,7 @@
           <a:p>
             <a:r>
               <a:rPr lang="en-US" dirty="0"/>
-              <a:t>Corrected:  1. Despereaux moved through the dungeon with a needle and a thread of light to guide him forward.
-Look for: Did you catch the proper noun (Despereaux), the comma before "but," and capital letters?</a:t>
+              <a:t>Tap through each highlighted word in the lesson and name what it does right before moving to the fix-it.</a:t>
             </a:r>
             <a:endParaRPr lang="en-US" dirty="0"/>
           </a:p>
@@ -1750,8 +2022,8 @@
           <a:p>
             <a:r>
               <a:rPr lang="en-US" dirty="0"/>
-              <a:t>Corrected:  1. Despereaux moved through the dungeon with a needle and a thread of light to guide him forward.
-Look for: Did you catch the proper noun (Despereaux), the comma before "but," and capital letters?</a:t>
+              <a:t>Corrected: Despereaux moved through the dungeon with a needle and a thread of light to guide him forward. 
+Look for: </a:t>
             </a:r>
             <a:endParaRPr lang="en-US" dirty="0"/>
           </a:p>
@@ -1839,7 +2111,8 @@
           <a:p>
             <a:r>
               <a:rPr lang="en-US" dirty="0"/>
-              <a:t>Break the word into base + word part. Ask what the part adds to the meaning.</a:t>
+              <a:t>Corrected: Despereaux moved through the dungeon with a needle and a thread of light to guide him forward. 
+Look for: </a:t>
             </a:r>
             <a:endParaRPr lang="en-US" dirty="0"/>
           </a:p>
@@ -2412,7 +2685,7 @@
             <a:avLst/>
           </a:prstGeom>
           <a:solidFill>
-            <a:srgbClr val="55C8E8"/>
+            <a:srgbClr val="8B6FC0"/>
           </a:solidFill>
           <a:ln/>
         </p:spPr>
@@ -2450,7 +2723,7 @@
                 <a:ea typeface="Calibri" pitchFamily="34" charset="-122"/>
                 <a:cs typeface="Calibri" pitchFamily="34" charset="-120"/>
               </a:rPr>
-              <a:t>🔤  Vocabulary</a:t>
+              <a:t>🌱  Morphology</a:t>
             </a:r>
             <a:endParaRPr lang="en-US" sz="2200" dirty="0"/>
           </a:p>
@@ -2483,13 +2756,13 @@
             <a:r>
               <a:rPr lang="en-US" sz="1100" b="1" spc="100" kern="0" dirty="0">
                 <a:solidFill>
-                  <a:srgbClr val="55C8E8"/>
-                </a:solidFill>
-                <a:latin typeface="Calibri" pitchFamily="34" charset="0"/>
-                <a:ea typeface="Calibri" pitchFamily="34" charset="-122"/>
-                <a:cs typeface="Calibri" pitchFamily="34" charset="-120"/>
-              </a:rPr>
-              <a:t>VOCABULARY</a:t>
+                  <a:srgbClr val="8B6FC0"/>
+                </a:solidFill>
+                <a:latin typeface="Calibri" pitchFamily="34" charset="0"/>
+                <a:ea typeface="Calibri" pitchFamily="34" charset="-122"/>
+                <a:cs typeface="Calibri" pitchFamily="34" charset="-120"/>
+              </a:rPr>
+              <a:t>-NESS</a:t>
             </a:r>
             <a:endParaRPr lang="en-US" sz="1100" dirty="0"/>
           </a:p>
@@ -2504,15 +2777,15 @@
         <p:spPr>
           <a:xfrm>
             <a:off x="365760" y="1097280"/>
-            <a:ext cx="8412480" cy="658368"/>
+            <a:ext cx="8412480" cy="621792"/>
           </a:xfrm>
           <a:prstGeom prst="roundRect">
             <a:avLst>
-              <a:gd name="adj" fmla="val 13889"/>
+              <a:gd name="adj" fmla="val 14706"/>
             </a:avLst>
           </a:prstGeom>
           <a:solidFill>
-            <a:srgbClr val="E5F7FC"/>
+            <a:srgbClr val="F0E8FF"/>
           </a:solidFill>
           <a:ln/>
           <a:effectLst>
@@ -2532,48 +2805,34 @@
         </p:nvSpPr>
         <p:spPr>
           <a:xfrm>
-            <a:off x="594360" y="1225296"/>
-            <a:ext cx="7863840" cy="420624"/>
-          </a:xfrm>
-          <a:prstGeom prst="rect">
-            <a:avLst/>
-          </a:prstGeom>
-          <a:noFill/>
-          <a:ln/>
-        </p:spPr>
-        <p:txBody>
-          <a:bodyPr wrap="square" lIns="0" tIns="0" rIns="0" bIns="0" rtlCol="0" anchor="ctr"/>
-          <a:lstStyle/>
-          <a:p>
-            <a:pPr indent="0" marL="0">
-              <a:buNone/>
-            </a:pPr>
-            <a:r>
-              <a:rPr lang="en-US" sz="1700" b="1" dirty="0">
-                <a:solidFill>
-                  <a:srgbClr val="0E1C42"/>
-                </a:solidFill>
-                <a:latin typeface="Calibri" pitchFamily="34" charset="0"/>
-                <a:ea typeface="Calibri" pitchFamily="34" charset="-122"/>
-                <a:cs typeface="Calibri" pitchFamily="34" charset="-120"/>
-              </a:rPr>
-              <a:t>clout  </a:t>
-            </a:r>
-            <a:pPr indent="0" marL="0">
-              <a:buNone/>
-            </a:pPr>
-            <a:r>
-              <a:rPr lang="en-US" sz="1400" dirty="0">
-                <a:solidFill>
-                  <a:srgbClr val="1E293B"/>
-                </a:solidFill>
-                <a:latin typeface="Calibri" pitchFamily="34" charset="0"/>
-                <a:ea typeface="Calibri" pitchFamily="34" charset="-122"/>
-                <a:cs typeface="Calibri" pitchFamily="34" charset="-120"/>
-              </a:rPr>
-              <a:t>A hard hit or blow, usually with an open hand.</a:t>
-            </a:r>
-            <a:endParaRPr lang="en-US" sz="1700" dirty="0"/>
+            <a:off x="594360" y="1216152"/>
+            <a:ext cx="7863840" cy="384048"/>
+          </a:xfrm>
+          <a:prstGeom prst="rect">
+            <a:avLst/>
+          </a:prstGeom>
+          <a:noFill/>
+          <a:ln/>
+        </p:spPr>
+        <p:txBody>
+          <a:bodyPr wrap="square" lIns="0" tIns="0" rIns="0" bIns="0" rtlCol="0" anchor="ctr"/>
+          <a:lstStyle/>
+          <a:p>
+            <a:pPr indent="0" marL="0">
+              <a:buNone/>
+            </a:pPr>
+            <a:r>
+              <a:rPr lang="en-US" sz="1500" dirty="0">
+                <a:solidFill>
+                  <a:srgbClr val="1E293B"/>
+                </a:solidFill>
+                <a:latin typeface="Calibri" pitchFamily="34" charset="0"/>
+                <a:ea typeface="Calibri" pitchFamily="34" charset="-122"/>
+                <a:cs typeface="Calibri" pitchFamily="34" charset="-120"/>
+              </a:rPr>
+              <a:t>🌱  -ness means names a quality as a thing.</a:t>
+            </a:r>
+            <a:endParaRPr lang="en-US" sz="1500" dirty="0"/>
           </a:p>
         </p:txBody>
       </p:sp>
@@ -2585,16 +2844,16 @@
         </p:nvSpPr>
         <p:spPr>
           <a:xfrm>
-            <a:off x="365760" y="1828800"/>
-            <a:ext cx="8412480" cy="658368"/>
+            <a:off x="365760" y="1792224"/>
+            <a:ext cx="8412480" cy="621792"/>
           </a:xfrm>
           <a:prstGeom prst="roundRect">
             <a:avLst>
-              <a:gd name="adj" fmla="val 13889"/>
+              <a:gd name="adj" fmla="val 14706"/>
             </a:avLst>
           </a:prstGeom>
           <a:solidFill>
-            <a:srgbClr val="FFFFFF"/>
+            <a:srgbClr val="F8F4FF"/>
           </a:solidFill>
           <a:ln/>
           <a:effectLst>
@@ -2614,48 +2873,34 @@
         </p:nvSpPr>
         <p:spPr>
           <a:xfrm>
-            <a:off x="594360" y="1956816"/>
-            <a:ext cx="7863840" cy="420624"/>
-          </a:xfrm>
-          <a:prstGeom prst="rect">
-            <a:avLst/>
-          </a:prstGeom>
-          <a:noFill/>
-          <a:ln/>
-        </p:spPr>
-        <p:txBody>
-          <a:bodyPr wrap="square" lIns="0" tIns="0" rIns="0" bIns="0" rtlCol="0" anchor="ctr"/>
-          <a:lstStyle/>
-          <a:p>
-            <a:pPr indent="0" marL="0">
-              <a:buNone/>
-            </a:pPr>
-            <a:r>
-              <a:rPr lang="en-US" sz="1700" b="1" dirty="0">
-                <a:solidFill>
-                  <a:srgbClr val="0E1C42"/>
-                </a:solidFill>
-                <a:latin typeface="Calibri" pitchFamily="34" charset="0"/>
-                <a:ea typeface="Calibri" pitchFamily="34" charset="-122"/>
-                <a:cs typeface="Calibri" pitchFamily="34" charset="-120"/>
-              </a:rPr>
-              <a:t>deaf  </a:t>
-            </a:r>
-            <a:pPr indent="0" marL="0">
-              <a:buNone/>
-            </a:pPr>
-            <a:r>
-              <a:rPr lang="en-US" sz="1400" dirty="0">
-                <a:solidFill>
-                  <a:srgbClr val="1E293B"/>
-                </a:solidFill>
-                <a:latin typeface="Calibri" pitchFamily="34" charset="0"/>
-                <a:ea typeface="Calibri" pitchFamily="34" charset="-122"/>
-                <a:cs typeface="Calibri" pitchFamily="34" charset="-120"/>
-              </a:rPr>
-              <a:t>Unable to hear, or unable to hear well.</a:t>
-            </a:r>
-            <a:endParaRPr lang="en-US" sz="1700" dirty="0"/>
+            <a:off x="594360" y="1911096"/>
+            <a:ext cx="7863840" cy="384048"/>
+          </a:xfrm>
+          <a:prstGeom prst="rect">
+            <a:avLst/>
+          </a:prstGeom>
+          <a:noFill/>
+          <a:ln/>
+        </p:spPr>
+        <p:txBody>
+          <a:bodyPr wrap="square" lIns="0" tIns="0" rIns="0" bIns="0" rtlCol="0" anchor="ctr"/>
+          <a:lstStyle/>
+          <a:p>
+            <a:pPr indent="0" marL="0">
+              <a:buNone/>
+            </a:pPr>
+            <a:r>
+              <a:rPr lang="en-US" sz="1500" dirty="0">
+                <a:solidFill>
+                  <a:srgbClr val="1E293B"/>
+                </a:solidFill>
+                <a:latin typeface="Calibri" pitchFamily="34" charset="0"/>
+                <a:ea typeface="Calibri" pitchFamily="34" charset="-122"/>
+                <a:cs typeface="Calibri" pitchFamily="34" charset="-120"/>
+              </a:rPr>
+              <a:t>🌱  darkness = the quality of being dark · kindness = the quality of being kind · sadness = the quality of being sad</a:t>
+            </a:r>
+            <a:endParaRPr lang="en-US" sz="1500" dirty="0"/>
           </a:p>
         </p:txBody>
       </p:sp>
@@ -2667,16 +2912,16 @@
         </p:nvSpPr>
         <p:spPr>
           <a:xfrm>
-            <a:off x="365760" y="2560320"/>
-            <a:ext cx="8412480" cy="658368"/>
+            <a:off x="365760" y="2487168"/>
+            <a:ext cx="8412480" cy="621792"/>
           </a:xfrm>
           <a:prstGeom prst="roundRect">
             <a:avLst>
-              <a:gd name="adj" fmla="val 13889"/>
+              <a:gd name="adj" fmla="val 14706"/>
             </a:avLst>
           </a:prstGeom>
           <a:solidFill>
-            <a:srgbClr val="E5F7FC"/>
+            <a:srgbClr val="F0E8FF"/>
           </a:solidFill>
           <a:ln/>
           <a:effectLst>
@@ -2696,130 +2941,34 @@
         </p:nvSpPr>
         <p:spPr>
           <a:xfrm>
-            <a:off x="594360" y="2688336"/>
-            <a:ext cx="7863840" cy="420624"/>
-          </a:xfrm>
-          <a:prstGeom prst="rect">
-            <a:avLst/>
-          </a:prstGeom>
-          <a:noFill/>
-          <a:ln/>
-        </p:spPr>
-        <p:txBody>
-          <a:bodyPr wrap="square" lIns="0" tIns="0" rIns="0" bIns="0" rtlCol="0" anchor="ctr"/>
-          <a:lstStyle/>
-          <a:p>
-            <a:pPr indent="0" marL="0">
-              <a:buNone/>
-            </a:pPr>
-            <a:r>
-              <a:rPr lang="en-US" sz="1700" b="1" dirty="0">
-                <a:solidFill>
-                  <a:srgbClr val="0E1C42"/>
-                </a:solidFill>
-                <a:latin typeface="Calibri" pitchFamily="34" charset="0"/>
-                <a:ea typeface="Calibri" pitchFamily="34" charset="-122"/>
-                <a:cs typeface="Calibri" pitchFamily="34" charset="-120"/>
-              </a:rPr>
-              <a:t>servant  </a:t>
-            </a:r>
-            <a:pPr indent="0" marL="0">
-              <a:buNone/>
-            </a:pPr>
-            <a:r>
-              <a:rPr lang="en-US" sz="1400" dirty="0">
-                <a:solidFill>
-                  <a:srgbClr val="1E293B"/>
-                </a:solidFill>
-                <a:latin typeface="Calibri" pitchFamily="34" charset="0"/>
-                <a:ea typeface="Calibri" pitchFamily="34" charset="-122"/>
-                <a:cs typeface="Calibri" pitchFamily="34" charset="-120"/>
-              </a:rPr>
-              <a:t>Someone whose job is to work in another person's household.</a:t>
-            </a:r>
-            <a:endParaRPr lang="en-US" sz="1700" dirty="0"/>
-          </a:p>
-        </p:txBody>
-      </p:sp>
-      <p:sp>
-        <p:nvSpPr>
-          <p:cNvPr id="11" name="Shape 9"/>
-          <p:cNvSpPr/>
-          <p:nvPr/>
-        </p:nvSpPr>
-        <p:spPr>
-          <a:xfrm>
-            <a:off x="365760" y="3291840"/>
-            <a:ext cx="8412480" cy="658368"/>
-          </a:xfrm>
-          <a:prstGeom prst="roundRect">
-            <a:avLst>
-              <a:gd name="adj" fmla="val 13889"/>
-            </a:avLst>
-          </a:prstGeom>
-          <a:solidFill>
-            <a:srgbClr val="FFFFFF"/>
-          </a:solidFill>
-          <a:ln/>
-          <a:effectLst>
-            <a:outerShdw sx="100000" sy="100000" kx="0" ky="0" algn="bl" rotWithShape="0" blurRad="101600" dist="38100" dir="2700000">
-              <a:srgbClr val="000000">
-                <a:alpha val="12000"/>
-              </a:srgbClr>
-            </a:outerShdw>
-          </a:effectLst>
-        </p:spPr>
-      </p:sp>
-      <p:sp>
-        <p:nvSpPr>
-          <p:cNvPr id="12" name="Text 10"/>
-          <p:cNvSpPr/>
-          <p:nvPr/>
-        </p:nvSpPr>
-        <p:spPr>
-          <a:xfrm>
-            <a:off x="594360" y="3419856"/>
-            <a:ext cx="7863840" cy="420624"/>
-          </a:xfrm>
-          <a:prstGeom prst="rect">
-            <a:avLst/>
-          </a:prstGeom>
-          <a:noFill/>
-          <a:ln/>
-        </p:spPr>
-        <p:txBody>
-          <a:bodyPr wrap="square" lIns="0" tIns="0" rIns="0" bIns="0" rtlCol="0" anchor="ctr"/>
-          <a:lstStyle/>
-          <a:p>
-            <a:pPr indent="0" marL="0">
-              <a:buNone/>
-            </a:pPr>
-            <a:r>
-              <a:rPr lang="en-US" sz="1700" b="1" dirty="0">
-                <a:solidFill>
-                  <a:srgbClr val="0E1C42"/>
-                </a:solidFill>
-                <a:latin typeface="Calibri" pitchFamily="34" charset="0"/>
-                <a:ea typeface="Calibri" pitchFamily="34" charset="-122"/>
-                <a:cs typeface="Calibri" pitchFamily="34" charset="-120"/>
-              </a:rPr>
-              <a:t>tablecloth  </a:t>
-            </a:r>
-            <a:pPr indent="0" marL="0">
-              <a:buNone/>
-            </a:pPr>
-            <a:r>
-              <a:rPr lang="en-US" sz="1400" dirty="0">
-                <a:solidFill>
-                  <a:srgbClr val="1E293B"/>
-                </a:solidFill>
-                <a:latin typeface="Calibri" pitchFamily="34" charset="0"/>
-                <a:ea typeface="Calibri" pitchFamily="34" charset="-122"/>
-                <a:cs typeface="Calibri" pitchFamily="34" charset="-120"/>
-              </a:rPr>
-              <a:t>A cloth spread over a table; here, what Mig was traded for.</a:t>
-            </a:r>
-            <a:endParaRPr lang="en-US" sz="1700" dirty="0"/>
+            <a:off x="594360" y="2606040"/>
+            <a:ext cx="7863840" cy="384048"/>
+          </a:xfrm>
+          <a:prstGeom prst="rect">
+            <a:avLst/>
+          </a:prstGeom>
+          <a:noFill/>
+          <a:ln/>
+        </p:spPr>
+        <p:txBody>
+          <a:bodyPr wrap="square" lIns="0" tIns="0" rIns="0" bIns="0" rtlCol="0" anchor="ctr"/>
+          <a:lstStyle/>
+          <a:p>
+            <a:pPr indent="0" marL="0">
+              <a:buNone/>
+            </a:pPr>
+            <a:r>
+              <a:rPr lang="en-US" sz="1500" dirty="0">
+                <a:solidFill>
+                  <a:srgbClr val="1E293B"/>
+                </a:solidFill>
+                <a:latin typeface="Calibri" pitchFamily="34" charset="0"/>
+                <a:ea typeface="Calibri" pitchFamily="34" charset="-122"/>
+                <a:cs typeface="Calibri" pitchFamily="34" charset="-120"/>
+              </a:rPr>
+              <a:t>🌱  Practice: Match the Word to Its Meaning! Tap a word, then tap what it means.</a:t>
+            </a:r>
+            <a:endParaRPr lang="en-US" sz="1500" dirty="0"/>
           </a:p>
         </p:txBody>
       </p:sp>
@@ -2837,7 +2986,7 @@
     <p:bg>
       <p:bgPr>
         <a:solidFill>
-          <a:srgbClr val="F8FAFC"/>
+          <a:srgbClr val="FFFFFF"/>
         </a:solidFill>
       </p:bgPr>
     </p:bg>
@@ -2870,7 +3019,7 @@
             <a:avLst/>
           </a:prstGeom>
           <a:solidFill>
-            <a:srgbClr val="C7922C"/>
+            <a:srgbClr val="55C8E8"/>
           </a:solidFill>
           <a:ln/>
         </p:spPr>
@@ -2908,7 +3057,7 @@
                 <a:ea typeface="Calibri" pitchFamily="34" charset="-122"/>
                 <a:cs typeface="Calibri" pitchFamily="34" charset="-120"/>
               </a:rPr>
-              <a:t>✏️  Grammar</a:t>
+              <a:t>🔤  Vocabulary</a:t>
             </a:r>
             <a:endParaRPr lang="en-US" sz="2200" dirty="0"/>
           </a:p>
@@ -2922,7 +3071,7 @@
         </p:nvSpPr>
         <p:spPr>
           <a:xfrm>
-            <a:off x="365760" y="777240"/>
+            <a:off x="365760" y="804672"/>
             <a:ext cx="8229600" cy="237744"/>
           </a:xfrm>
           <a:prstGeom prst="rect">
@@ -2941,13 +3090,13 @@
             <a:r>
               <a:rPr lang="en-US" sz="1100" b="1" spc="100" kern="0" dirty="0">
                 <a:solidFill>
-                  <a:srgbClr val="C7922C"/>
-                </a:solidFill>
-                <a:latin typeface="Calibri" pitchFamily="34" charset="0"/>
-                <a:ea typeface="Calibri" pitchFamily="34" charset="-122"/>
-                <a:cs typeface="Calibri" pitchFamily="34" charset="-120"/>
-              </a:rPr>
-              <a:t>SUBJECT-VERB AGREEMENT</a:t>
+                  <a:srgbClr val="55C8E8"/>
+                </a:solidFill>
+                <a:latin typeface="Calibri" pitchFamily="34" charset="0"/>
+                <a:ea typeface="Calibri" pitchFamily="34" charset="-122"/>
+                <a:cs typeface="Calibri" pitchFamily="34" charset="-120"/>
+              </a:rPr>
+              <a:t>VOCABULARY</a:t>
             </a:r>
             <a:endParaRPr lang="en-US" sz="1100" dirty="0"/>
           </a:p>
@@ -2961,7 +3110,7 @@
         </p:nvSpPr>
         <p:spPr>
           <a:xfrm>
-            <a:off x="365760" y="1078992"/>
+            <a:off x="365760" y="1097280"/>
             <a:ext cx="8412480" cy="658368"/>
           </a:xfrm>
           <a:prstGeom prst="roundRect">
@@ -2970,7 +3119,7 @@
             </a:avLst>
           </a:prstGeom>
           <a:solidFill>
-            <a:srgbClr val="FEF6E8"/>
+            <a:srgbClr val="E5F7FC"/>
           </a:solidFill>
           <a:ln/>
           <a:effectLst>
@@ -2991,33 +3140,47 @@
         <p:spPr>
           <a:xfrm>
             <a:off x="594360" y="1225296"/>
-            <a:ext cx="7863840" cy="402336"/>
-          </a:xfrm>
-          <a:prstGeom prst="rect">
-            <a:avLst/>
-          </a:prstGeom>
-          <a:noFill/>
-          <a:ln/>
-        </p:spPr>
-        <p:txBody>
-          <a:bodyPr wrap="square" lIns="0" tIns="0" rIns="0" bIns="0" rtlCol="0" anchor="ctr"/>
-          <a:lstStyle/>
-          <a:p>
-            <a:pPr indent="0" marL="0">
-              <a:buNone/>
-            </a:pPr>
-            <a:r>
-              <a:rPr lang="en-US" sz="1600" dirty="0">
-                <a:solidFill>
-                  <a:srgbClr val="1E293B"/>
-                </a:solidFill>
-                <a:latin typeface="Calibri" pitchFamily="34" charset="0"/>
-                <a:ea typeface="Calibri" pitchFamily="34" charset="-122"/>
-                <a:cs typeface="Calibri" pitchFamily="34" charset="-120"/>
-              </a:rPr>
-              <a:t>The mice were afraid of the dungeon.</a:t>
-            </a:r>
-            <a:endParaRPr lang="en-US" sz="1600" dirty="0"/>
+            <a:ext cx="7863840" cy="420624"/>
+          </a:xfrm>
+          <a:prstGeom prst="rect">
+            <a:avLst/>
+          </a:prstGeom>
+          <a:noFill/>
+          <a:ln/>
+        </p:spPr>
+        <p:txBody>
+          <a:bodyPr wrap="square" lIns="0" tIns="0" rIns="0" bIns="0" rtlCol="0" anchor="ctr"/>
+          <a:lstStyle/>
+          <a:p>
+            <a:pPr indent="0" marL="0">
+              <a:buNone/>
+            </a:pPr>
+            <a:r>
+              <a:rPr lang="en-US" sz="1700" b="1" dirty="0">
+                <a:solidFill>
+                  <a:srgbClr val="0E1C42"/>
+                </a:solidFill>
+                <a:latin typeface="Calibri" pitchFamily="34" charset="0"/>
+                <a:ea typeface="Calibri" pitchFamily="34" charset="-122"/>
+                <a:cs typeface="Calibri" pitchFamily="34" charset="-120"/>
+              </a:rPr>
+              <a:t>clout  </a:t>
+            </a:r>
+            <a:pPr indent="0" marL="0">
+              <a:buNone/>
+            </a:pPr>
+            <a:r>
+              <a:rPr lang="en-US" sz="1400" dirty="0">
+                <a:solidFill>
+                  <a:srgbClr val="1E293B"/>
+                </a:solidFill>
+                <a:latin typeface="Calibri" pitchFamily="34" charset="0"/>
+                <a:ea typeface="Calibri" pitchFamily="34" charset="-122"/>
+                <a:cs typeface="Calibri" pitchFamily="34" charset="-120"/>
+              </a:rPr>
+              <a:t>A hard hit or blow, usually with an open hand.</a:t>
+            </a:r>
+            <a:endParaRPr lang="en-US" sz="1700" dirty="0"/>
           </a:p>
         </p:txBody>
       </p:sp>
@@ -3029,7 +3192,7 @@
         </p:nvSpPr>
         <p:spPr>
           <a:xfrm>
-            <a:off x="365760" y="1810512"/>
+            <a:off x="365760" y="1828800"/>
             <a:ext cx="8412480" cy="658368"/>
           </a:xfrm>
           <a:prstGeom prst="roundRect">
@@ -3059,33 +3222,47 @@
         <p:spPr>
           <a:xfrm>
             <a:off x="594360" y="1956816"/>
-            <a:ext cx="7863840" cy="402336"/>
-          </a:xfrm>
-          <a:prstGeom prst="rect">
-            <a:avLst/>
-          </a:prstGeom>
-          <a:noFill/>
-          <a:ln/>
-        </p:spPr>
-        <p:txBody>
-          <a:bodyPr wrap="square" lIns="0" tIns="0" rIns="0" bIns="0" rtlCol="0" anchor="ctr"/>
-          <a:lstStyle/>
-          <a:p>
-            <a:pPr indent="0" marL="0">
-              <a:buNone/>
-            </a:pPr>
-            <a:r>
-              <a:rPr lang="en-US" sz="1600" dirty="0">
-                <a:solidFill>
-                  <a:srgbClr val="1E293B"/>
-                </a:solidFill>
-                <a:latin typeface="Calibri" pitchFamily="34" charset="0"/>
-                <a:ea typeface="Calibri" pitchFamily="34" charset="-122"/>
-                <a:cs typeface="Calibri" pitchFamily="34" charset="-120"/>
-              </a:rPr>
-              <a:t>Mig was almost deaf from the clouts.</a:t>
-            </a:r>
-            <a:endParaRPr lang="en-US" sz="1600" dirty="0"/>
+            <a:ext cx="7863840" cy="420624"/>
+          </a:xfrm>
+          <a:prstGeom prst="rect">
+            <a:avLst/>
+          </a:prstGeom>
+          <a:noFill/>
+          <a:ln/>
+        </p:spPr>
+        <p:txBody>
+          <a:bodyPr wrap="square" lIns="0" tIns="0" rIns="0" bIns="0" rtlCol="0" anchor="ctr"/>
+          <a:lstStyle/>
+          <a:p>
+            <a:pPr indent="0" marL="0">
+              <a:buNone/>
+            </a:pPr>
+            <a:r>
+              <a:rPr lang="en-US" sz="1700" b="1" dirty="0">
+                <a:solidFill>
+                  <a:srgbClr val="0E1C42"/>
+                </a:solidFill>
+                <a:latin typeface="Calibri" pitchFamily="34" charset="0"/>
+                <a:ea typeface="Calibri" pitchFamily="34" charset="-122"/>
+                <a:cs typeface="Calibri" pitchFamily="34" charset="-120"/>
+              </a:rPr>
+              <a:t>deaf  </a:t>
+            </a:r>
+            <a:pPr indent="0" marL="0">
+              <a:buNone/>
+            </a:pPr>
+            <a:r>
+              <a:rPr lang="en-US" sz="1400" dirty="0">
+                <a:solidFill>
+                  <a:srgbClr val="1E293B"/>
+                </a:solidFill>
+                <a:latin typeface="Calibri" pitchFamily="34" charset="0"/>
+                <a:ea typeface="Calibri" pitchFamily="34" charset="-122"/>
+                <a:cs typeface="Calibri" pitchFamily="34" charset="-120"/>
+              </a:rPr>
+              <a:t>Unable to hear, or unable to hear well.</a:t>
+            </a:r>
+            <a:endParaRPr lang="en-US" sz="1700" dirty="0"/>
           </a:p>
         </p:txBody>
       </p:sp>
@@ -3097,7 +3274,7 @@
         </p:nvSpPr>
         <p:spPr>
           <a:xfrm>
-            <a:off x="365760" y="2542032"/>
+            <a:off x="365760" y="2560320"/>
             <a:ext cx="8412480" cy="658368"/>
           </a:xfrm>
           <a:prstGeom prst="roundRect">
@@ -3106,7 +3283,7 @@
             </a:avLst>
           </a:prstGeom>
           <a:solidFill>
-            <a:srgbClr val="FEF6E8"/>
+            <a:srgbClr val="E5F7FC"/>
           </a:solidFill>
           <a:ln/>
           <a:effectLst>
@@ -3127,33 +3304,47 @@
         <p:spPr>
           <a:xfrm>
             <a:off x="594360" y="2688336"/>
-            <a:ext cx="7863840" cy="402336"/>
-          </a:xfrm>
-          <a:prstGeom prst="rect">
-            <a:avLst/>
-          </a:prstGeom>
-          <a:noFill/>
-          <a:ln/>
-        </p:spPr>
-        <p:txBody>
-          <a:bodyPr wrap="square" lIns="0" tIns="0" rIns="0" bIns="0" rtlCol="0" anchor="ctr"/>
-          <a:lstStyle/>
-          <a:p>
-            <a:pPr indent="0" marL="0">
-              <a:buNone/>
-            </a:pPr>
-            <a:r>
-              <a:rPr lang="en-US" sz="1600" dirty="0">
-                <a:solidFill>
-                  <a:srgbClr val="1E293B"/>
-                </a:solidFill>
-                <a:latin typeface="Calibri" pitchFamily="34" charset="0"/>
-                <a:ea typeface="Calibri" pitchFamily="34" charset="-122"/>
-                <a:cs typeface="Calibri" pitchFamily="34" charset="-120"/>
-              </a:rPr>
-              <a:t>The rats live below the castle.</a:t>
-            </a:r>
-            <a:endParaRPr lang="en-US" sz="1600" dirty="0"/>
+            <a:ext cx="7863840" cy="420624"/>
+          </a:xfrm>
+          <a:prstGeom prst="rect">
+            <a:avLst/>
+          </a:prstGeom>
+          <a:noFill/>
+          <a:ln/>
+        </p:spPr>
+        <p:txBody>
+          <a:bodyPr wrap="square" lIns="0" tIns="0" rIns="0" bIns="0" rtlCol="0" anchor="ctr"/>
+          <a:lstStyle/>
+          <a:p>
+            <a:pPr indent="0" marL="0">
+              <a:buNone/>
+            </a:pPr>
+            <a:r>
+              <a:rPr lang="en-US" sz="1700" b="1" dirty="0">
+                <a:solidFill>
+                  <a:srgbClr val="0E1C42"/>
+                </a:solidFill>
+                <a:latin typeface="Calibri" pitchFamily="34" charset="0"/>
+                <a:ea typeface="Calibri" pitchFamily="34" charset="-122"/>
+                <a:cs typeface="Calibri" pitchFamily="34" charset="-120"/>
+              </a:rPr>
+              <a:t>servant  </a:t>
+            </a:r>
+            <a:pPr indent="0" marL="0">
+              <a:buNone/>
+            </a:pPr>
+            <a:r>
+              <a:rPr lang="en-US" sz="1400" dirty="0">
+                <a:solidFill>
+                  <a:srgbClr val="1E293B"/>
+                </a:solidFill>
+                <a:latin typeface="Calibri" pitchFamily="34" charset="0"/>
+                <a:ea typeface="Calibri" pitchFamily="34" charset="-122"/>
+                <a:cs typeface="Calibri" pitchFamily="34" charset="-120"/>
+              </a:rPr>
+              <a:t>Someone whose job is to work in another person's household.</a:t>
+            </a:r>
+            <a:endParaRPr lang="en-US" sz="1700" dirty="0"/>
           </a:p>
         </p:txBody>
       </p:sp>
@@ -3165,7 +3356,7 @@
         </p:nvSpPr>
         <p:spPr>
           <a:xfrm>
-            <a:off x="365760" y="3273552"/>
+            <a:off x="365760" y="3291840"/>
             <a:ext cx="8412480" cy="658368"/>
           </a:xfrm>
           <a:prstGeom prst="roundRect">
@@ -3195,72 +3386,47 @@
         <p:spPr>
           <a:xfrm>
             <a:off x="594360" y="3419856"/>
-            <a:ext cx="7863840" cy="402336"/>
-          </a:xfrm>
-          <a:prstGeom prst="rect">
-            <a:avLst/>
-          </a:prstGeom>
-          <a:noFill/>
-          <a:ln/>
-        </p:spPr>
-        <p:txBody>
-          <a:bodyPr wrap="square" lIns="0" tIns="0" rIns="0" bIns="0" rtlCol="0" anchor="ctr"/>
-          <a:lstStyle/>
-          <a:p>
-            <a:pPr indent="0" marL="0">
-              <a:buNone/>
-            </a:pPr>
-            <a:r>
-              <a:rPr lang="en-US" sz="1600" dirty="0">
-                <a:solidFill>
-                  <a:srgbClr val="1E293B"/>
-                </a:solidFill>
-                <a:latin typeface="Calibri" pitchFamily="34" charset="0"/>
-                <a:ea typeface="Calibri" pitchFamily="34" charset="-122"/>
-                <a:cs typeface="Calibri" pitchFamily="34" charset="-120"/>
-              </a:rPr>
-              <a:t>Uncle keeps the kettle by the fire.</a:t>
-            </a:r>
-            <a:endParaRPr lang="en-US" sz="1600" dirty="0"/>
-          </a:p>
-        </p:txBody>
-      </p:sp>
-      <p:sp>
-        <p:nvSpPr>
-          <p:cNvPr id="13" name="Text 11"/>
-          <p:cNvSpPr/>
-          <p:nvPr/>
-        </p:nvSpPr>
-        <p:spPr>
-          <a:xfrm>
-            <a:off x="365760" y="4050792"/>
-            <a:ext cx="8412480" cy="365760"/>
-          </a:xfrm>
-          <a:prstGeom prst="rect">
-            <a:avLst/>
-          </a:prstGeom>
-          <a:noFill/>
-          <a:ln/>
-        </p:spPr>
-        <p:txBody>
-          <a:bodyPr wrap="square" lIns="0" tIns="0" rIns="0" bIns="0" rtlCol="0" anchor="ctr"/>
-          <a:lstStyle/>
-          <a:p>
-            <a:pPr indent="0" marL="0">
-              <a:buNone/>
-            </a:pPr>
-            <a:r>
-              <a:rPr lang="en-US" sz="1500" i="1" dirty="0">
-                <a:solidFill>
-                  <a:srgbClr val="64748B"/>
-                </a:solidFill>
-                <a:latin typeface="Calibri" pitchFamily="34" charset="0"/>
-                <a:ea typeface="Calibri" pitchFamily="34" charset="-122"/>
-                <a:cs typeface="Calibri" pitchFamily="34" charset="-120"/>
-              </a:rPr>
-              <a:t>Your turn. Find the verb, then check that it matches its subject. Tap a word to check — green means you got it.</a:t>
-            </a:r>
-            <a:endParaRPr lang="en-US" sz="1500" dirty="0"/>
+            <a:ext cx="7863840" cy="420624"/>
+          </a:xfrm>
+          <a:prstGeom prst="rect">
+            <a:avLst/>
+          </a:prstGeom>
+          <a:noFill/>
+          <a:ln/>
+        </p:spPr>
+        <p:txBody>
+          <a:bodyPr wrap="square" lIns="0" tIns="0" rIns="0" bIns="0" rtlCol="0" anchor="ctr"/>
+          <a:lstStyle/>
+          <a:p>
+            <a:pPr indent="0" marL="0">
+              <a:buNone/>
+            </a:pPr>
+            <a:r>
+              <a:rPr lang="en-US" sz="1700" b="1" dirty="0">
+                <a:solidFill>
+                  <a:srgbClr val="0E1C42"/>
+                </a:solidFill>
+                <a:latin typeface="Calibri" pitchFamily="34" charset="0"/>
+                <a:ea typeface="Calibri" pitchFamily="34" charset="-122"/>
+                <a:cs typeface="Calibri" pitchFamily="34" charset="-120"/>
+              </a:rPr>
+              <a:t>tablecloth  </a:t>
+            </a:r>
+            <a:pPr indent="0" marL="0">
+              <a:buNone/>
+            </a:pPr>
+            <a:r>
+              <a:rPr lang="en-US" sz="1400" dirty="0">
+                <a:solidFill>
+                  <a:srgbClr val="1E293B"/>
+                </a:solidFill>
+                <a:latin typeface="Calibri" pitchFamily="34" charset="0"/>
+                <a:ea typeface="Calibri" pitchFamily="34" charset="-122"/>
+                <a:cs typeface="Calibri" pitchFamily="34" charset="-120"/>
+              </a:rPr>
+              <a:t>A cloth spread over a table; here, what Mig was traded for.</a:t>
+            </a:r>
+            <a:endParaRPr lang="en-US" sz="1700" dirty="0"/>
           </a:p>
         </p:txBody>
       </p:sp>
@@ -3349,7 +3515,7 @@
                 <a:ea typeface="Calibri" pitchFamily="34" charset="-122"/>
                 <a:cs typeface="Calibri" pitchFamily="34" charset="-120"/>
               </a:rPr>
-              <a:t>✏️  Grammar</a:t>
+              <a:t>✏️  Grammar — What do you notice?</a:t>
             </a:r>
             <a:endParaRPr lang="en-US" sz="2200" dirty="0"/>
           </a:p>
@@ -3363,7 +3529,7 @@
         </p:nvSpPr>
         <p:spPr>
           <a:xfrm>
-            <a:off x="365760" y="777240"/>
+            <a:off x="365760" y="749808"/>
             <a:ext cx="8229600" cy="237744"/>
           </a:xfrm>
           <a:prstGeom prst="rect">
@@ -3396,13 +3562,52 @@
       </p:sp>
       <p:sp>
         <p:nvSpPr>
-          <p:cNvPr id="5" name="Shape 3"/>
-          <p:cNvSpPr/>
-          <p:nvPr/>
-        </p:nvSpPr>
-        <p:spPr>
-          <a:xfrm>
-            <a:off x="365760" y="1078992"/>
+          <p:cNvPr id="5" name="Text 3"/>
+          <p:cNvSpPr/>
+          <p:nvPr/>
+        </p:nvSpPr>
+        <p:spPr>
+          <a:xfrm>
+            <a:off x="365760" y="987552"/>
+            <a:ext cx="8412480" cy="411480"/>
+          </a:xfrm>
+          <a:prstGeom prst="rect">
+            <a:avLst/>
+          </a:prstGeom>
+          <a:noFill/>
+          <a:ln/>
+        </p:spPr>
+        <p:txBody>
+          <a:bodyPr wrap="square" lIns="0" tIns="0" rIns="0" bIns="0" rtlCol="0" anchor="ctr"/>
+          <a:lstStyle/>
+          <a:p>
+            <a:pPr indent="0" marL="0">
+              <a:buNone/>
+            </a:pPr>
+            <a:r>
+              <a:rPr lang="en-US" sz="1500" i="1" dirty="0">
+                <a:solidFill>
+                  <a:srgbClr val="64748B"/>
+                </a:solidFill>
+                <a:latin typeface="Calibri" pitchFamily="34" charset="0"/>
+                <a:ea typeface="Calibri" pitchFamily="34" charset="-122"/>
+                <a:cs typeface="Calibri" pitchFamily="34" charset="-120"/>
+              </a:rPr>
+              <a:t>Look at the subject of each sentence and then at its verb.</a:t>
+            </a:r>
+            <a:endParaRPr lang="en-US" sz="1500" dirty="0"/>
+          </a:p>
+        </p:txBody>
+      </p:sp>
+      <p:sp>
+        <p:nvSpPr>
+          <p:cNvPr id="6" name="Shape 4"/>
+          <p:cNvSpPr/>
+          <p:nvPr/>
+        </p:nvSpPr>
+        <p:spPr>
+          <a:xfrm>
+            <a:off x="365760" y="1463040"/>
             <a:ext cx="8412480" cy="658368"/>
           </a:xfrm>
           <a:prstGeom prst="roundRect">
@@ -3413,7 +3618,12 @@
           <a:solidFill>
             <a:srgbClr val="FEF6E8"/>
           </a:solidFill>
-          <a:ln/>
+          <a:ln w="19050">
+            <a:solidFill>
+              <a:srgbClr val="C7922C"/>
+            </a:solidFill>
+            <a:prstDash val="solid"/>
+          </a:ln>
           <a:effectLst>
             <a:outerShdw sx="100000" sy="100000" kx="0" ky="0" algn="bl" rotWithShape="0" blurRad="101600" dist="38100" dir="2700000">
               <a:srgbClr val="000000">
@@ -3425,80 +3635,332 @@
       </p:sp>
       <p:sp>
         <p:nvSpPr>
-          <p:cNvPr id="6" name="Text 4"/>
-          <p:cNvSpPr/>
-          <p:nvPr/>
-        </p:nvSpPr>
-        <p:spPr>
-          <a:xfrm>
-            <a:off x="594360" y="1225296"/>
-            <a:ext cx="7863840" cy="402336"/>
-          </a:xfrm>
-          <a:prstGeom prst="rect">
-            <a:avLst/>
-          </a:prstGeom>
-          <a:noFill/>
-          <a:ln/>
-        </p:spPr>
-        <p:txBody>
-          <a:bodyPr wrap="square" lIns="0" tIns="0" rIns="0" bIns="0" rtlCol="0" anchor="ctr"/>
-          <a:lstStyle/>
-          <a:p>
-            <a:pPr indent="0" marL="0">
-              <a:buNone/>
-            </a:pPr>
-            <a:r>
-              <a:rPr lang="en-US" sz="1600" dirty="0">
-                <a:solidFill>
-                  <a:srgbClr val="1E293B"/>
-                </a:solidFill>
-                <a:latin typeface="Calibri" pitchFamily="34" charset="0"/>
-                <a:ea typeface="Calibri" pitchFamily="34" charset="-122"/>
-                <a:cs typeface="Calibri" pitchFamily="34" charset="-120"/>
-              </a:rPr>
-              <a:t>The mice </a:t>
-            </a:r>
-            <a:pPr indent="0" marL="0">
-              <a:buNone/>
-            </a:pPr>
-            <a:r>
-              <a:rPr lang="en-US" sz="1600" b="1" dirty="0">
-                <a:solidFill>
-                  <a:srgbClr val="34B76F"/>
-                </a:solidFill>
-                <a:latin typeface="Calibri" pitchFamily="34" charset="0"/>
-                <a:ea typeface="Calibri" pitchFamily="34" charset="-122"/>
-                <a:cs typeface="Calibri" pitchFamily="34" charset="-120"/>
-              </a:rPr>
-              <a:t>were</a:t>
-            </a:r>
-            <a:pPr indent="0" marL="0">
-              <a:buNone/>
-            </a:pPr>
-            <a:r>
-              <a:rPr lang="en-US" sz="1600" dirty="0">
-                <a:solidFill>
-                  <a:srgbClr val="1E293B"/>
-                </a:solidFill>
-                <a:latin typeface="Calibri" pitchFamily="34" charset="0"/>
-                <a:ea typeface="Calibri" pitchFamily="34" charset="-122"/>
-                <a:cs typeface="Calibri" pitchFamily="34" charset="-120"/>
-              </a:rPr>
-              <a:t> afraid of the dungeon.</a:t>
-            </a:r>
-            <a:endParaRPr lang="en-US" sz="1600" dirty="0"/>
-          </a:p>
-        </p:txBody>
-      </p:sp>
-      <p:sp>
-        <p:nvSpPr>
-          <p:cNvPr id="7" name="Shape 5"/>
-          <p:cNvSpPr/>
-          <p:nvPr/>
-        </p:nvSpPr>
-        <p:spPr>
-          <a:xfrm>
-            <a:off x="365760" y="1810512"/>
+          <p:cNvPr id="7" name="Text 5"/>
+          <p:cNvSpPr/>
+          <p:nvPr/>
+        </p:nvSpPr>
+        <p:spPr>
+          <a:xfrm>
+            <a:off x="594360" y="1591056"/>
+            <a:ext cx="7955280" cy="402336"/>
+          </a:xfrm>
+          <a:prstGeom prst="rect">
+            <a:avLst/>
+          </a:prstGeom>
+          <a:noFill/>
+          <a:ln/>
+        </p:spPr>
+        <p:txBody>
+          <a:bodyPr wrap="square" lIns="0" tIns="0" rIns="0" bIns="0" rtlCol="0" anchor="ctr"/>
+          <a:lstStyle/>
+          <a:p>
+            <a:pPr indent="0" marL="0">
+              <a:buNone/>
+            </a:pPr>
+            <a:endParaRPr lang="en-US" sz="1700" dirty="0"/>
+          </a:p>
+        </p:txBody>
+      </p:sp>
+      <p:sp>
+        <p:nvSpPr>
+          <p:cNvPr id="8" name="Text 6"/>
+          <p:cNvSpPr/>
+          <p:nvPr/>
+        </p:nvSpPr>
+        <p:spPr>
+          <a:xfrm>
+            <a:off x="594360" y="1591056"/>
+            <a:ext cx="7955280" cy="402336"/>
+          </a:xfrm>
+          <a:prstGeom prst="rect">
+            <a:avLst/>
+          </a:prstGeom>
+          <a:noFill/>
+          <a:ln/>
+        </p:spPr>
+        <p:txBody>
+          <a:bodyPr wrap="square" lIns="0" tIns="0" rIns="0" bIns="0" rtlCol="0" anchor="ctr"/>
+          <a:lstStyle/>
+          <a:p>
+            <a:pPr indent="0" marL="0">
+              <a:buNone/>
+            </a:pPr>
+            <a:r>
+              <a:rPr lang="en-US" sz="1700" dirty="0">
+                <a:solidFill>
+                  <a:srgbClr val="1E293B"/>
+                </a:solidFill>
+                <a:latin typeface="Calibri" pitchFamily="34" charset="0"/>
+                <a:ea typeface="Calibri" pitchFamily="34" charset="-122"/>
+                <a:cs typeface="Calibri" pitchFamily="34" charset="-120"/>
+              </a:rPr>
+              <a:t>And</a:t>
+            </a:r>
+            <a:pPr indent="0" marL="0">
+              <a:buNone/>
+            </a:pPr>
+            <a:r>
+              <a:rPr lang="en-US" sz="1700" dirty="0">
+                <a:solidFill>
+                  <a:srgbClr val="1E293B"/>
+                </a:solidFill>
+                <a:latin typeface="Calibri" pitchFamily="34" charset="0"/>
+                <a:ea typeface="Calibri" pitchFamily="34" charset="-122"/>
+                <a:cs typeface="Calibri" pitchFamily="34" charset="-120"/>
+              </a:rPr>
+              <a:t> </a:t>
+            </a:r>
+            <a:pPr indent="0" marL="0">
+              <a:buNone/>
+            </a:pPr>
+            <a:r>
+              <a:rPr lang="en-US" sz="1700" dirty="0">
+                <a:solidFill>
+                  <a:srgbClr val="1E293B"/>
+                </a:solidFill>
+                <a:latin typeface="Calibri" pitchFamily="34" charset="0"/>
+                <a:ea typeface="Calibri" pitchFamily="34" charset="-122"/>
+                <a:cs typeface="Calibri" pitchFamily="34" charset="-120"/>
+              </a:rPr>
+              <a:t>Miggery</a:t>
+            </a:r>
+            <a:pPr indent="0" marL="0">
+              <a:buNone/>
+            </a:pPr>
+            <a:r>
+              <a:rPr lang="en-US" sz="1700" dirty="0">
+                <a:solidFill>
+                  <a:srgbClr val="1E293B"/>
+                </a:solidFill>
+                <a:latin typeface="Calibri" pitchFamily="34" charset="0"/>
+                <a:ea typeface="Calibri" pitchFamily="34" charset="-122"/>
+                <a:cs typeface="Calibri" pitchFamily="34" charset="-120"/>
+              </a:rPr>
+              <a:t> </a:t>
+            </a:r>
+            <a:pPr indent="0" marL="0">
+              <a:buNone/>
+            </a:pPr>
+            <a:r>
+              <a:rPr lang="en-US" sz="1700" dirty="0">
+                <a:solidFill>
+                  <a:srgbClr val="1E293B"/>
+                </a:solidFill>
+                <a:latin typeface="Calibri" pitchFamily="34" charset="0"/>
+                <a:ea typeface="Calibri" pitchFamily="34" charset="-122"/>
+                <a:cs typeface="Calibri" pitchFamily="34" charset="-120"/>
+              </a:rPr>
+              <a:t>Sow</a:t>
+            </a:r>
+            <a:pPr indent="0" marL="0">
+              <a:buNone/>
+            </a:pPr>
+            <a:r>
+              <a:rPr lang="en-US" sz="1700" dirty="0">
+                <a:solidFill>
+                  <a:srgbClr val="1E293B"/>
+                </a:solidFill>
+                <a:latin typeface="Calibri" pitchFamily="34" charset="0"/>
+                <a:ea typeface="Calibri" pitchFamily="34" charset="-122"/>
+                <a:cs typeface="Calibri" pitchFamily="34" charset="-120"/>
+              </a:rPr>
+              <a:t> </a:t>
+            </a:r>
+            <a:pPr indent="0" marL="0">
+              <a:buNone/>
+            </a:pPr>
+            <a:r>
+              <a:rPr lang="en-US" sz="1700" dirty="0">
+                <a:solidFill>
+                  <a:srgbClr val="1E293B"/>
+                </a:solidFill>
+                <a:latin typeface="Calibri" pitchFamily="34" charset="0"/>
+                <a:ea typeface="Calibri" pitchFamily="34" charset="-122"/>
+                <a:cs typeface="Calibri" pitchFamily="34" charset="-120"/>
+              </a:rPr>
+              <a:t>was</a:t>
+            </a:r>
+            <a:pPr indent="0" marL="0">
+              <a:buNone/>
+            </a:pPr>
+            <a:r>
+              <a:rPr lang="en-US" sz="1700" dirty="0">
+                <a:solidFill>
+                  <a:srgbClr val="1E293B"/>
+                </a:solidFill>
+                <a:latin typeface="Calibri" pitchFamily="34" charset="0"/>
+                <a:ea typeface="Calibri" pitchFamily="34" charset="-122"/>
+                <a:cs typeface="Calibri" pitchFamily="34" charset="-120"/>
+              </a:rPr>
+              <a:t> </a:t>
+            </a:r>
+            <a:pPr indent="0" marL="0">
+              <a:buNone/>
+            </a:pPr>
+            <a:r>
+              <a:rPr lang="en-US" sz="1700" dirty="0">
+                <a:solidFill>
+                  <a:srgbClr val="1E293B"/>
+                </a:solidFill>
+                <a:latin typeface="Calibri" pitchFamily="34" charset="0"/>
+                <a:ea typeface="Calibri" pitchFamily="34" charset="-122"/>
+                <a:cs typeface="Calibri" pitchFamily="34" charset="-120"/>
+              </a:rPr>
+              <a:t>right</a:t>
+            </a:r>
+            <a:pPr indent="0" marL="0">
+              <a:buNone/>
+            </a:pPr>
+            <a:r>
+              <a:rPr lang="en-US" sz="1700" dirty="0">
+                <a:solidFill>
+                  <a:srgbClr val="1E293B"/>
+                </a:solidFill>
+                <a:latin typeface="Calibri" pitchFamily="34" charset="0"/>
+                <a:ea typeface="Calibri" pitchFamily="34" charset="-122"/>
+                <a:cs typeface="Calibri" pitchFamily="34" charset="-120"/>
+              </a:rPr>
+              <a:t> </a:t>
+            </a:r>
+            <a:pPr indent="0" marL="0">
+              <a:buNone/>
+            </a:pPr>
+            <a:r>
+              <a:rPr lang="en-US" sz="1700" dirty="0">
+                <a:solidFill>
+                  <a:srgbClr val="1E293B"/>
+                </a:solidFill>
+                <a:latin typeface="Calibri" pitchFamily="34" charset="0"/>
+                <a:ea typeface="Calibri" pitchFamily="34" charset="-122"/>
+                <a:cs typeface="Calibri" pitchFamily="34" charset="-120"/>
+              </a:rPr>
+              <a:t>in</a:t>
+            </a:r>
+            <a:pPr indent="0" marL="0">
+              <a:buNone/>
+            </a:pPr>
+            <a:r>
+              <a:rPr lang="en-US" sz="1700" dirty="0">
+                <a:solidFill>
+                  <a:srgbClr val="1E293B"/>
+                </a:solidFill>
+                <a:latin typeface="Calibri" pitchFamily="34" charset="0"/>
+                <a:ea typeface="Calibri" pitchFamily="34" charset="-122"/>
+                <a:cs typeface="Calibri" pitchFamily="34" charset="-120"/>
+              </a:rPr>
+              <a:t> </a:t>
+            </a:r>
+            <a:pPr indent="0" marL="0">
+              <a:buNone/>
+            </a:pPr>
+            <a:r>
+              <a:rPr lang="en-US" sz="1700" dirty="0">
+                <a:solidFill>
+                  <a:srgbClr val="1E293B"/>
+                </a:solidFill>
+                <a:latin typeface="Calibri" pitchFamily="34" charset="0"/>
+                <a:ea typeface="Calibri" pitchFamily="34" charset="-122"/>
+                <a:cs typeface="Calibri" pitchFamily="34" charset="-120"/>
+              </a:rPr>
+              <a:t>the</a:t>
+            </a:r>
+            <a:pPr indent="0" marL="0">
+              <a:buNone/>
+            </a:pPr>
+            <a:r>
+              <a:rPr lang="en-US" sz="1700" dirty="0">
+                <a:solidFill>
+                  <a:srgbClr val="1E293B"/>
+                </a:solidFill>
+                <a:latin typeface="Calibri" pitchFamily="34" charset="0"/>
+                <a:ea typeface="Calibri" pitchFamily="34" charset="-122"/>
+                <a:cs typeface="Calibri" pitchFamily="34" charset="-120"/>
+              </a:rPr>
+              <a:t> </a:t>
+            </a:r>
+            <a:pPr indent="0" marL="0">
+              <a:buNone/>
+            </a:pPr>
+            <a:r>
+              <a:rPr lang="en-US" sz="1700" dirty="0">
+                <a:solidFill>
+                  <a:srgbClr val="1E293B"/>
+                </a:solidFill>
+                <a:latin typeface="Calibri" pitchFamily="34" charset="0"/>
+                <a:ea typeface="Calibri" pitchFamily="34" charset="-122"/>
+                <a:cs typeface="Calibri" pitchFamily="34" charset="-120"/>
+              </a:rPr>
+              <a:t>center</a:t>
+            </a:r>
+            <a:pPr indent="0" marL="0">
+              <a:buNone/>
+            </a:pPr>
+            <a:r>
+              <a:rPr lang="en-US" sz="1700" dirty="0">
+                <a:solidFill>
+                  <a:srgbClr val="1E293B"/>
+                </a:solidFill>
+                <a:latin typeface="Calibri" pitchFamily="34" charset="0"/>
+                <a:ea typeface="Calibri" pitchFamily="34" charset="-122"/>
+                <a:cs typeface="Calibri" pitchFamily="34" charset="-120"/>
+              </a:rPr>
+              <a:t> </a:t>
+            </a:r>
+            <a:pPr indent="0" marL="0">
+              <a:buNone/>
+            </a:pPr>
+            <a:r>
+              <a:rPr lang="en-US" sz="1700" dirty="0">
+                <a:solidFill>
+                  <a:srgbClr val="1E293B"/>
+                </a:solidFill>
+                <a:latin typeface="Calibri" pitchFamily="34" charset="0"/>
+                <a:ea typeface="Calibri" pitchFamily="34" charset="-122"/>
+                <a:cs typeface="Calibri" pitchFamily="34" charset="-120"/>
+              </a:rPr>
+              <a:t>of</a:t>
+            </a:r>
+            <a:pPr indent="0" marL="0">
+              <a:buNone/>
+            </a:pPr>
+            <a:r>
+              <a:rPr lang="en-US" sz="1700" dirty="0">
+                <a:solidFill>
+                  <a:srgbClr val="1E293B"/>
+                </a:solidFill>
+                <a:latin typeface="Calibri" pitchFamily="34" charset="0"/>
+                <a:ea typeface="Calibri" pitchFamily="34" charset="-122"/>
+                <a:cs typeface="Calibri" pitchFamily="34" charset="-120"/>
+              </a:rPr>
+              <a:t> </a:t>
+            </a:r>
+            <a:pPr indent="0" marL="0">
+              <a:buNone/>
+            </a:pPr>
+            <a:r>
+              <a:rPr lang="en-US" sz="1700" dirty="0">
+                <a:solidFill>
+                  <a:srgbClr val="1E293B"/>
+                </a:solidFill>
+                <a:latin typeface="Calibri" pitchFamily="34" charset="0"/>
+                <a:ea typeface="Calibri" pitchFamily="34" charset="-122"/>
+                <a:cs typeface="Calibri" pitchFamily="34" charset="-120"/>
+              </a:rPr>
+              <a:t>it.</a:t>
+            </a:r>
+            <a:endParaRPr lang="en-US" sz="1700" dirty="0"/>
+          </a:p>
+        </p:txBody>
+      </p:sp>
+      <p:sp>
+        <p:nvSpPr>
+          <p:cNvPr id="9" name="Shape 7"/>
+          <p:cNvSpPr/>
+          <p:nvPr/>
+        </p:nvSpPr>
+        <p:spPr>
+          <a:xfrm>
+            <a:off x="365760" y="2212848"/>
             <a:ext cx="8412480" cy="658368"/>
           </a:xfrm>
           <a:prstGeom prst="roundRect">
@@ -3509,7 +3971,12 @@
           <a:solidFill>
             <a:srgbClr val="FFFFFF"/>
           </a:solidFill>
-          <a:ln/>
+          <a:ln w="19050">
+            <a:solidFill>
+              <a:srgbClr val="C7922C"/>
+            </a:solidFill>
+            <a:prstDash val="solid"/>
+          </a:ln>
           <a:effectLst>
             <a:outerShdw sx="100000" sy="100000" kx="0" ky="0" algn="bl" rotWithShape="0" blurRad="101600" dist="38100" dir="2700000">
               <a:srgbClr val="000000">
@@ -3521,195 +3988,182 @@
       </p:sp>
       <p:sp>
         <p:nvSpPr>
-          <p:cNvPr id="8" name="Text 6"/>
-          <p:cNvSpPr/>
-          <p:nvPr/>
-        </p:nvSpPr>
-        <p:spPr>
-          <a:xfrm>
-            <a:off x="594360" y="1956816"/>
-            <a:ext cx="7863840" cy="402336"/>
-          </a:xfrm>
-          <a:prstGeom prst="rect">
-            <a:avLst/>
-          </a:prstGeom>
-          <a:noFill/>
-          <a:ln/>
-        </p:spPr>
-        <p:txBody>
-          <a:bodyPr wrap="square" lIns="0" tIns="0" rIns="0" bIns="0" rtlCol="0" anchor="ctr"/>
-          <a:lstStyle/>
-          <a:p>
-            <a:pPr indent="0" marL="0">
-              <a:buNone/>
-            </a:pPr>
-            <a:r>
-              <a:rPr lang="en-US" sz="1600" dirty="0">
-                <a:solidFill>
-                  <a:srgbClr val="1E293B"/>
-                </a:solidFill>
-                <a:latin typeface="Calibri" pitchFamily="34" charset="0"/>
-                <a:ea typeface="Calibri" pitchFamily="34" charset="-122"/>
-                <a:cs typeface="Calibri" pitchFamily="34" charset="-120"/>
-              </a:rPr>
-              <a:t>Mig </a:t>
-            </a:r>
-            <a:pPr indent="0" marL="0">
-              <a:buNone/>
-            </a:pPr>
-            <a:r>
-              <a:rPr lang="en-US" sz="1600" b="1" dirty="0">
-                <a:solidFill>
-                  <a:srgbClr val="34B76F"/>
-                </a:solidFill>
-                <a:latin typeface="Calibri" pitchFamily="34" charset="0"/>
-                <a:ea typeface="Calibri" pitchFamily="34" charset="-122"/>
-                <a:cs typeface="Calibri" pitchFamily="34" charset="-120"/>
-              </a:rPr>
-              <a:t>was</a:t>
-            </a:r>
-            <a:pPr indent="0" marL="0">
-              <a:buNone/>
-            </a:pPr>
-            <a:r>
-              <a:rPr lang="en-US" sz="1600" dirty="0">
-                <a:solidFill>
-                  <a:srgbClr val="1E293B"/>
-                </a:solidFill>
-                <a:latin typeface="Calibri" pitchFamily="34" charset="0"/>
-                <a:ea typeface="Calibri" pitchFamily="34" charset="-122"/>
-                <a:cs typeface="Calibri" pitchFamily="34" charset="-120"/>
-              </a:rPr>
-              <a:t> almost deaf from the clouts.</a:t>
-            </a:r>
-            <a:endParaRPr lang="en-US" sz="1600" dirty="0"/>
-          </a:p>
-        </p:txBody>
-      </p:sp>
-      <p:sp>
-        <p:nvSpPr>
-          <p:cNvPr id="9" name="Shape 7"/>
-          <p:cNvSpPr/>
-          <p:nvPr/>
-        </p:nvSpPr>
-        <p:spPr>
-          <a:xfrm>
-            <a:off x="365760" y="2542032"/>
-            <a:ext cx="8412480" cy="658368"/>
-          </a:xfrm>
-          <a:prstGeom prst="roundRect">
-            <a:avLst>
-              <a:gd name="adj" fmla="val 13889"/>
-            </a:avLst>
-          </a:prstGeom>
-          <a:solidFill>
-            <a:srgbClr val="FEF6E8"/>
-          </a:solidFill>
-          <a:ln/>
-          <a:effectLst>
-            <a:outerShdw sx="100000" sy="100000" kx="0" ky="0" algn="bl" rotWithShape="0" blurRad="101600" dist="38100" dir="2700000">
-              <a:srgbClr val="000000">
-                <a:alpha val="12000"/>
-              </a:srgbClr>
-            </a:outerShdw>
-          </a:effectLst>
-        </p:spPr>
-      </p:sp>
-      <p:sp>
-        <p:nvSpPr>
           <p:cNvPr id="10" name="Text 8"/>
           <p:cNvSpPr/>
           <p:nvPr/>
         </p:nvSpPr>
         <p:spPr>
           <a:xfrm>
-            <a:off x="594360" y="2688336"/>
-            <a:ext cx="7863840" cy="402336"/>
-          </a:xfrm>
-          <a:prstGeom prst="rect">
-            <a:avLst/>
-          </a:prstGeom>
-          <a:noFill/>
-          <a:ln/>
-        </p:spPr>
-        <p:txBody>
-          <a:bodyPr wrap="square" lIns="0" tIns="0" rIns="0" bIns="0" rtlCol="0" anchor="ctr"/>
-          <a:lstStyle/>
-          <a:p>
-            <a:pPr indent="0" marL="0">
-              <a:buNone/>
-            </a:pPr>
-            <a:r>
-              <a:rPr lang="en-US" sz="1600" dirty="0">
-                <a:solidFill>
-                  <a:srgbClr val="1E293B"/>
-                </a:solidFill>
-                <a:latin typeface="Calibri" pitchFamily="34" charset="0"/>
-                <a:ea typeface="Calibri" pitchFamily="34" charset="-122"/>
-                <a:cs typeface="Calibri" pitchFamily="34" charset="-120"/>
-              </a:rPr>
-              <a:t>The rats </a:t>
-            </a:r>
-            <a:pPr indent="0" marL="0">
-              <a:buNone/>
-            </a:pPr>
-            <a:r>
-              <a:rPr lang="en-US" sz="1600" b="1" dirty="0">
-                <a:solidFill>
-                  <a:srgbClr val="34B76F"/>
-                </a:solidFill>
-                <a:latin typeface="Calibri" pitchFamily="34" charset="0"/>
-                <a:ea typeface="Calibri" pitchFamily="34" charset="-122"/>
-                <a:cs typeface="Calibri" pitchFamily="34" charset="-120"/>
-              </a:rPr>
-              <a:t>live</a:t>
-            </a:r>
-            <a:pPr indent="0" marL="0">
-              <a:buNone/>
-            </a:pPr>
-            <a:r>
-              <a:rPr lang="en-US" sz="1600" dirty="0">
-                <a:solidFill>
-                  <a:srgbClr val="1E293B"/>
-                </a:solidFill>
-                <a:latin typeface="Calibri" pitchFamily="34" charset="0"/>
-                <a:ea typeface="Calibri" pitchFamily="34" charset="-122"/>
-                <a:cs typeface="Calibri" pitchFamily="34" charset="-120"/>
-              </a:rPr>
-              <a:t> below the castle.</a:t>
-            </a:r>
-            <a:endParaRPr lang="en-US" sz="1600" dirty="0"/>
-          </a:p>
-        </p:txBody>
-      </p:sp>
-      <p:sp>
-        <p:nvSpPr>
-          <p:cNvPr id="11" name="Shape 9"/>
-          <p:cNvSpPr/>
-          <p:nvPr/>
-        </p:nvSpPr>
-        <p:spPr>
-          <a:xfrm>
-            <a:off x="365760" y="3273552"/>
-            <a:ext cx="8412480" cy="658368"/>
-          </a:xfrm>
-          <a:prstGeom prst="roundRect">
-            <a:avLst>
-              <a:gd name="adj" fmla="val 13889"/>
-            </a:avLst>
-          </a:prstGeom>
-          <a:solidFill>
-            <a:srgbClr val="FFFFFF"/>
-          </a:solidFill>
-          <a:ln/>
-          <a:effectLst>
-            <a:outerShdw sx="100000" sy="100000" kx="0" ky="0" algn="bl" rotWithShape="0" blurRad="101600" dist="38100" dir="2700000">
-              <a:srgbClr val="000000">
-                <a:alpha val="12000"/>
-              </a:srgbClr>
-            </a:outerShdw>
-          </a:effectLst>
-        </p:spPr>
+            <a:off x="594360" y="2340864"/>
+            <a:ext cx="7955280" cy="402336"/>
+          </a:xfrm>
+          <a:prstGeom prst="rect">
+            <a:avLst/>
+          </a:prstGeom>
+          <a:noFill/>
+          <a:ln/>
+        </p:spPr>
+        <p:txBody>
+          <a:bodyPr wrap="square" lIns="0" tIns="0" rIns="0" bIns="0" rtlCol="0" anchor="ctr"/>
+          <a:lstStyle/>
+          <a:p>
+            <a:pPr indent="0" marL="0">
+              <a:buNone/>
+            </a:pPr>
+            <a:endParaRPr lang="en-US" sz="1700" dirty="0"/>
+          </a:p>
+        </p:txBody>
+      </p:sp>
+      <p:sp>
+        <p:nvSpPr>
+          <p:cNvPr id="11" name="Text 9"/>
+          <p:cNvSpPr/>
+          <p:nvPr/>
+        </p:nvSpPr>
+        <p:spPr>
+          <a:xfrm>
+            <a:off x="594360" y="2340864"/>
+            <a:ext cx="7955280" cy="402336"/>
+          </a:xfrm>
+          <a:prstGeom prst="rect">
+            <a:avLst/>
+          </a:prstGeom>
+          <a:noFill/>
+          <a:ln/>
+        </p:spPr>
+        <p:txBody>
+          <a:bodyPr wrap="square" lIns="0" tIns="0" rIns="0" bIns="0" rtlCol="0" anchor="ctr"/>
+          <a:lstStyle/>
+          <a:p>
+            <a:pPr indent="0" marL="0">
+              <a:buNone/>
+            </a:pPr>
+            <a:r>
+              <a:rPr lang="en-US" sz="1700" dirty="0">
+                <a:solidFill>
+                  <a:srgbClr val="1E293B"/>
+                </a:solidFill>
+                <a:latin typeface="Calibri" pitchFamily="34" charset="0"/>
+                <a:ea typeface="Calibri" pitchFamily="34" charset="-122"/>
+                <a:cs typeface="Calibri" pitchFamily="34" charset="-120"/>
+              </a:rPr>
+              <a:t>These</a:t>
+            </a:r>
+            <a:pPr indent="0" marL="0">
+              <a:buNone/>
+            </a:pPr>
+            <a:r>
+              <a:rPr lang="en-US" sz="1700" dirty="0">
+                <a:solidFill>
+                  <a:srgbClr val="1E293B"/>
+                </a:solidFill>
+                <a:latin typeface="Calibri" pitchFamily="34" charset="0"/>
+                <a:ea typeface="Calibri" pitchFamily="34" charset="-122"/>
+                <a:cs typeface="Calibri" pitchFamily="34" charset="-120"/>
+              </a:rPr>
+              <a:t> </a:t>
+            </a:r>
+            <a:pPr indent="0" marL="0">
+              <a:buNone/>
+            </a:pPr>
+            <a:r>
+              <a:rPr lang="en-US" sz="1700" dirty="0">
+                <a:solidFill>
+                  <a:srgbClr val="1E293B"/>
+                </a:solidFill>
+                <a:latin typeface="Calibri" pitchFamily="34" charset="0"/>
+                <a:ea typeface="Calibri" pitchFamily="34" charset="-122"/>
+                <a:cs typeface="Calibri" pitchFamily="34" charset="-120"/>
+              </a:rPr>
+              <a:t>clouts</a:t>
+            </a:r>
+            <a:pPr indent="0" marL="0">
+              <a:buNone/>
+            </a:pPr>
+            <a:r>
+              <a:rPr lang="en-US" sz="1700" dirty="0">
+                <a:solidFill>
+                  <a:srgbClr val="1E293B"/>
+                </a:solidFill>
+                <a:latin typeface="Calibri" pitchFamily="34" charset="0"/>
+                <a:ea typeface="Calibri" pitchFamily="34" charset="-122"/>
+                <a:cs typeface="Calibri" pitchFamily="34" charset="-120"/>
+              </a:rPr>
+              <a:t> </a:t>
+            </a:r>
+            <a:pPr indent="0" marL="0">
+              <a:buNone/>
+            </a:pPr>
+            <a:r>
+              <a:rPr lang="en-US" sz="1700" dirty="0">
+                <a:solidFill>
+                  <a:srgbClr val="1E293B"/>
+                </a:solidFill>
+                <a:latin typeface="Calibri" pitchFamily="34" charset="0"/>
+                <a:ea typeface="Calibri" pitchFamily="34" charset="-122"/>
+                <a:cs typeface="Calibri" pitchFamily="34" charset="-120"/>
+              </a:rPr>
+              <a:t>were</a:t>
+            </a:r>
+            <a:pPr indent="0" marL="0">
+              <a:buNone/>
+            </a:pPr>
+            <a:r>
+              <a:rPr lang="en-US" sz="1700" dirty="0">
+                <a:solidFill>
+                  <a:srgbClr val="1E293B"/>
+                </a:solidFill>
+                <a:latin typeface="Calibri" pitchFamily="34" charset="0"/>
+                <a:ea typeface="Calibri" pitchFamily="34" charset="-122"/>
+                <a:cs typeface="Calibri" pitchFamily="34" charset="-120"/>
+              </a:rPr>
+              <a:t> </a:t>
+            </a:r>
+            <a:pPr indent="0" marL="0">
+              <a:buNone/>
+            </a:pPr>
+            <a:r>
+              <a:rPr lang="en-US" sz="1700" dirty="0">
+                <a:solidFill>
+                  <a:srgbClr val="1E293B"/>
+                </a:solidFill>
+                <a:latin typeface="Calibri" pitchFamily="34" charset="0"/>
+                <a:ea typeface="Calibri" pitchFamily="34" charset="-122"/>
+                <a:cs typeface="Calibri" pitchFamily="34" charset="-120"/>
+              </a:rPr>
+              <a:t>alarmingly</a:t>
+            </a:r>
+            <a:pPr indent="0" marL="0">
+              <a:buNone/>
+            </a:pPr>
+            <a:r>
+              <a:rPr lang="en-US" sz="1700" dirty="0">
+                <a:solidFill>
+                  <a:srgbClr val="1E293B"/>
+                </a:solidFill>
+                <a:latin typeface="Calibri" pitchFamily="34" charset="0"/>
+                <a:ea typeface="Calibri" pitchFamily="34" charset="-122"/>
+                <a:cs typeface="Calibri" pitchFamily="34" charset="-120"/>
+              </a:rPr>
+              <a:t> </a:t>
+            </a:r>
+            <a:pPr indent="0" marL="0">
+              <a:buNone/>
+            </a:pPr>
+            <a:r>
+              <a:rPr lang="en-US" sz="1700" dirty="0">
+                <a:solidFill>
+                  <a:srgbClr val="1E293B"/>
+                </a:solidFill>
+                <a:latin typeface="Calibri" pitchFamily="34" charset="0"/>
+                <a:ea typeface="Calibri" pitchFamily="34" charset="-122"/>
+                <a:cs typeface="Calibri" pitchFamily="34" charset="-120"/>
+              </a:rPr>
+              <a:t>frequent.</a:t>
+            </a:r>
+            <a:endParaRPr lang="en-US" sz="1700" dirty="0"/>
+          </a:p>
+        </p:txBody>
       </p:sp>
       <p:sp>
         <p:nvSpPr>
@@ -3719,62 +4173,34 @@
         </p:nvSpPr>
         <p:spPr>
           <a:xfrm>
-            <a:off x="594360" y="3419856"/>
-            <a:ext cx="7863840" cy="402336"/>
-          </a:xfrm>
-          <a:prstGeom prst="rect">
-            <a:avLst/>
-          </a:prstGeom>
-          <a:noFill/>
-          <a:ln/>
-        </p:spPr>
-        <p:txBody>
-          <a:bodyPr wrap="square" lIns="0" tIns="0" rIns="0" bIns="0" rtlCol="0" anchor="ctr"/>
-          <a:lstStyle/>
-          <a:p>
-            <a:pPr indent="0" marL="0">
-              <a:buNone/>
-            </a:pPr>
-            <a:r>
-              <a:rPr lang="en-US" sz="1600" dirty="0">
-                <a:solidFill>
-                  <a:srgbClr val="1E293B"/>
-                </a:solidFill>
-                <a:latin typeface="Calibri" pitchFamily="34" charset="0"/>
-                <a:ea typeface="Calibri" pitchFamily="34" charset="-122"/>
-                <a:cs typeface="Calibri" pitchFamily="34" charset="-120"/>
-              </a:rPr>
-              <a:t>Uncle </a:t>
-            </a:r>
-            <a:pPr indent="0" marL="0">
-              <a:buNone/>
-            </a:pPr>
-            <a:r>
-              <a:rPr lang="en-US" sz="1600" b="1" dirty="0">
-                <a:solidFill>
-                  <a:srgbClr val="34B76F"/>
-                </a:solidFill>
-                <a:latin typeface="Calibri" pitchFamily="34" charset="0"/>
-                <a:ea typeface="Calibri" pitchFamily="34" charset="-122"/>
-                <a:cs typeface="Calibri" pitchFamily="34" charset="-120"/>
-              </a:rPr>
-              <a:t>keeps</a:t>
-            </a:r>
-            <a:pPr indent="0" marL="0">
-              <a:buNone/>
-            </a:pPr>
-            <a:r>
-              <a:rPr lang="en-US" sz="1600" dirty="0">
-                <a:solidFill>
-                  <a:srgbClr val="1E293B"/>
-                </a:solidFill>
-                <a:latin typeface="Calibri" pitchFamily="34" charset="0"/>
-                <a:ea typeface="Calibri" pitchFamily="34" charset="-122"/>
-                <a:cs typeface="Calibri" pitchFamily="34" charset="-120"/>
-              </a:rPr>
-              <a:t> the kettle by the fire.</a:t>
-            </a:r>
-            <a:endParaRPr lang="en-US" sz="1600" dirty="0"/>
+            <a:off x="365760" y="3008376"/>
+            <a:ext cx="8229600" cy="237744"/>
+          </a:xfrm>
+          <a:prstGeom prst="rect">
+            <a:avLst/>
+          </a:prstGeom>
+          <a:noFill/>
+          <a:ln/>
+        </p:spPr>
+        <p:txBody>
+          <a:bodyPr wrap="square" lIns="0" tIns="0" rIns="0" bIns="0" rtlCol="0" anchor="ctr"/>
+          <a:lstStyle/>
+          <a:p>
+            <a:pPr indent="0" marL="0">
+              <a:buNone/>
+            </a:pPr>
+            <a:r>
+              <a:rPr lang="en-US" sz="1100" b="1" spc="100" kern="0" dirty="0">
+                <a:solidFill>
+                  <a:srgbClr val="C7922C"/>
+                </a:solidFill>
+                <a:latin typeface="Calibri" pitchFamily="34" charset="0"/>
+                <a:ea typeface="Calibri" pitchFamily="34" charset="-122"/>
+                <a:cs typeface="Calibri" pitchFamily="34" charset="-120"/>
+              </a:rPr>
+              <a:t>THINK IT THROUGH</a:t>
+            </a:r>
+            <a:endParaRPr lang="en-US" sz="1100" dirty="0"/>
           </a:p>
         </p:txBody>
       </p:sp>
@@ -3786,34 +4212,68 @@
         </p:nvSpPr>
         <p:spPr>
           <a:xfrm>
-            <a:off x="365760" y="4050792"/>
-            <a:ext cx="8412480" cy="365760"/>
-          </a:xfrm>
-          <a:prstGeom prst="rect">
-            <a:avLst/>
-          </a:prstGeom>
-          <a:noFill/>
-          <a:ln/>
-        </p:spPr>
-        <p:txBody>
-          <a:bodyPr wrap="square" lIns="0" tIns="0" rIns="0" bIns="0" rtlCol="0" anchor="ctr"/>
-          <a:lstStyle/>
-          <a:p>
-            <a:pPr indent="0" marL="0">
-              <a:buNone/>
-            </a:pPr>
-            <a:r>
-              <a:rPr lang="en-US" sz="1500" b="1" dirty="0">
-                <a:solidFill>
-                  <a:srgbClr val="34B76F"/>
-                </a:solidFill>
-                <a:latin typeface="Calibri" pitchFamily="34" charset="0"/>
-                <a:ea typeface="Calibri" pitchFamily="34" charset="-122"/>
-                <a:cs typeface="Calibri" pitchFamily="34" charset="-120"/>
-              </a:rPr>
-              <a:t>✅  Answers revealed</a:t>
-            </a:r>
-            <a:endParaRPr lang="en-US" sz="1500" dirty="0"/>
+            <a:off x="365760" y="3255264"/>
+            <a:ext cx="8412480" cy="1563624"/>
+          </a:xfrm>
+          <a:prstGeom prst="rect">
+            <a:avLst/>
+          </a:prstGeom>
+          <a:noFill/>
+          <a:ln/>
+        </p:spPr>
+        <p:txBody>
+          <a:bodyPr wrap="square" lIns="0" tIns="0" rIns="0" bIns="0" rtlCol="0" anchor="t"/>
+          <a:lstStyle/>
+          <a:p>
+            <a:pPr indent="0" marL="0">
+              <a:buNone/>
+            </a:pPr>
+            <a:r>
+              <a:rPr lang="en-US" sz="1400" dirty="0">
+                <a:solidFill>
+                  <a:srgbClr val="1E293B"/>
+                </a:solidFill>
+                <a:latin typeface="Calibri" pitchFamily="34" charset="0"/>
+                <a:ea typeface="Calibri" pitchFamily="34" charset="-122"/>
+                <a:cs typeface="Calibri" pitchFamily="34" charset="-120"/>
+              </a:rPr>
+              <a:t>1.  Is the subject one thing or more than one?</a:t>
+            </a:r>
+            <a:endParaRPr lang="en-US" sz="1400" dirty="0"/>
+          </a:p>
+          <a:p>
+            <a:pPr indent="0" marL="0">
+              <a:buNone/>
+            </a:pPr>
+            <a:r>
+              <a:rPr lang="en-US" sz="1400" dirty="0">
+                <a:solidFill>
+                  <a:srgbClr val="1E293B"/>
+                </a:solidFill>
+                <a:latin typeface="Calibri" pitchFamily="34" charset="0"/>
+                <a:ea typeface="Calibri" pitchFamily="34" charset="-122"/>
+                <a:cs typeface="Calibri" pitchFamily="34" charset="-120"/>
+              </a:rPr>
+              <a:t>2.  What does the verb look like in each case — does it end in s or not?</a:t>
+            </a:r>
+            <a:endParaRPr lang="en-US" sz="1400" dirty="0"/>
+          </a:p>
+          <a:p>
+            <a:pPr indent="0" marL="0">
+              <a:buNone/>
+            </a:pPr>
+            <a:r>
+              <a:rPr lang="en-US" sz="1400" dirty="0">
+                <a:solidFill>
+                  <a:srgbClr val="1E293B"/>
+                </a:solidFill>
+                <a:latin typeface="Calibri" pitchFamily="34" charset="0"/>
+                <a:ea typeface="Calibri" pitchFamily="34" charset="-122"/>
+                <a:cs typeface="Calibri" pitchFamily="34" charset="-120"/>
+              </a:rPr>
+              <a:t>3.  It is backwards from nouns. Can you say how?</a:t>
+            </a:r>
+            <a:endParaRPr lang="en-US" sz="1400" dirty="0"/>
           </a:p>
         </p:txBody>
       </p:sp>
@@ -3864,7 +4324,7 @@
             <a:avLst/>
           </a:prstGeom>
           <a:solidFill>
-            <a:srgbClr val="0E1C42"/>
+            <a:srgbClr val="C7922C"/>
           </a:solidFill>
           <a:ln/>
         </p:spPr>
@@ -3902,7 +4362,7 @@
                 <a:ea typeface="Calibri" pitchFamily="34" charset="-122"/>
                 <a:cs typeface="Calibri" pitchFamily="34" charset="-120"/>
               </a:rPr>
-              <a:t>🔠  Spelling</a:t>
+              <a:t>✏️  Grammar — What do you notice?</a:t>
             </a:r>
             <a:endParaRPr lang="en-US" sz="2200" dirty="0"/>
           </a:p>
@@ -3916,7 +4376,7 @@
         </p:nvSpPr>
         <p:spPr>
           <a:xfrm>
-            <a:off x="365760" y="777240"/>
+            <a:off x="365760" y="749808"/>
             <a:ext cx="8229600" cy="237744"/>
           </a:xfrm>
           <a:prstGeom prst="rect">
@@ -3935,13 +4395,13 @@
             <a:r>
               <a:rPr lang="en-US" sz="1100" b="1" spc="100" kern="0" dirty="0">
                 <a:solidFill>
-                  <a:srgbClr val="0E1C42"/>
-                </a:solidFill>
-                <a:latin typeface="Calibri" pitchFamily="34" charset="0"/>
-                <a:ea typeface="Calibri" pitchFamily="34" charset="-122"/>
-                <a:cs typeface="Calibri" pitchFamily="34" charset="-120"/>
-              </a:rPr>
-              <a:t>PLURALS: -S, -ES, AND -IES</a:t>
+                  <a:srgbClr val="C7922C"/>
+                </a:solidFill>
+                <a:latin typeface="Calibri" pitchFamily="34" charset="0"/>
+                <a:ea typeface="Calibri" pitchFamily="34" charset="-122"/>
+                <a:cs typeface="Calibri" pitchFamily="34" charset="-120"/>
+              </a:rPr>
+              <a:t>SUBJECT-VERB AGREEMENT</a:t>
             </a:r>
             <a:endParaRPr lang="en-US" sz="1100" dirty="0"/>
           </a:p>
@@ -3955,24 +4415,24 @@
         </p:nvSpPr>
         <p:spPr>
           <a:xfrm>
-            <a:off x="365760" y="1078992"/>
-            <a:ext cx="8229600" cy="237744"/>
-          </a:xfrm>
-          <a:prstGeom prst="rect">
-            <a:avLst/>
-          </a:prstGeom>
-          <a:noFill/>
-          <a:ln/>
-        </p:spPr>
-        <p:txBody>
-          <a:bodyPr wrap="square" lIns="0" tIns="0" rIns="0" bIns="0" rtlCol="0" anchor="ctr"/>
-          <a:lstStyle/>
-          <a:p>
-            <a:pPr indent="0" marL="0">
-              <a:buNone/>
-            </a:pPr>
-            <a:r>
-              <a:rPr lang="en-US" sz="1100" b="1" spc="100" kern="0" dirty="0">
+            <a:off x="365760" y="987552"/>
+            <a:ext cx="8412480" cy="411480"/>
+          </a:xfrm>
+          <a:prstGeom prst="rect">
+            <a:avLst/>
+          </a:prstGeom>
+          <a:noFill/>
+          <a:ln/>
+        </p:spPr>
+        <p:txBody>
+          <a:bodyPr wrap="square" lIns="0" tIns="0" rIns="0" bIns="0" rtlCol="0" anchor="ctr"/>
+          <a:lstStyle/>
+          <a:p>
+            <a:pPr indent="0" marL="0">
+              <a:buNone/>
+            </a:pPr>
+            <a:r>
+              <a:rPr lang="en-US" sz="1500" i="1" dirty="0">
                 <a:solidFill>
                   <a:srgbClr val="64748B"/>
                 </a:solidFill>
@@ -3980,9 +4440,9 @@
                 <a:ea typeface="Calibri" pitchFamily="34" charset="-122"/>
                 <a:cs typeface="Calibri" pitchFamily="34" charset="-120"/>
               </a:rPr>
-              <a:t>WORD BANK</a:t>
-            </a:r>
-            <a:endParaRPr lang="en-US" sz="1100" dirty="0"/>
+              <a:t>Look at the subject of each sentence and then at its verb.</a:t>
+            </a:r>
+            <a:endParaRPr lang="en-US" sz="1500" dirty="0"/>
           </a:p>
         </p:txBody>
       </p:sp>
@@ -3994,20 +4454,20 @@
         </p:nvSpPr>
         <p:spPr>
           <a:xfrm>
-            <a:off x="365760" y="1353312"/>
-            <a:ext cx="8412480" cy="1005840"/>
+            <a:off x="365760" y="1463040"/>
+            <a:ext cx="8412480" cy="658368"/>
           </a:xfrm>
           <a:prstGeom prst="roundRect">
             <a:avLst>
-              <a:gd name="adj" fmla="val 9091"/>
+              <a:gd name="adj" fmla="val 13889"/>
             </a:avLst>
           </a:prstGeom>
           <a:solidFill>
-            <a:srgbClr val="FFFFFF"/>
+            <a:srgbClr val="FEF6E8"/>
           </a:solidFill>
           <a:ln w="19050">
             <a:solidFill>
-              <a:srgbClr val="0E1C42"/>
+              <a:srgbClr val="C7922C"/>
             </a:solidFill>
             <a:prstDash val="solid"/>
           </a:ln>
@@ -4028,8 +4488,36 @@
         </p:nvSpPr>
         <p:spPr>
           <a:xfrm>
-            <a:off x="594360" y="1481328"/>
-            <a:ext cx="7955280" cy="749808"/>
+            <a:off x="594360" y="1591056"/>
+            <a:ext cx="7955280" cy="402336"/>
+          </a:xfrm>
+          <a:prstGeom prst="rect">
+            <a:avLst/>
+          </a:prstGeom>
+          <a:noFill/>
+          <a:ln/>
+        </p:spPr>
+        <p:txBody>
+          <a:bodyPr wrap="square" lIns="0" tIns="0" rIns="0" bIns="0" rtlCol="0" anchor="ctr"/>
+          <a:lstStyle/>
+          <a:p>
+            <a:pPr indent="0" marL="0">
+              <a:buNone/>
+            </a:pPr>
+            <a:endParaRPr lang="en-US" sz="1700" dirty="0"/>
+          </a:p>
+        </p:txBody>
+      </p:sp>
+      <p:sp>
+        <p:nvSpPr>
+          <p:cNvPr id="8" name="Text 6"/>
+          <p:cNvSpPr/>
+          <p:nvPr/>
+        </p:nvSpPr>
+        <p:spPr>
+          <a:xfrm>
+            <a:off x="594360" y="1591056"/>
+            <a:ext cx="7955280" cy="402336"/>
           </a:xfrm>
           <a:prstGeom prst="rect">
             <a:avLst/>
@@ -4047,13 +4535,265 @@
             <a:r>
               <a:rPr lang="en-US" sz="1700" dirty="0">
                 <a:solidFill>
-                  <a:srgbClr val="0E1C42"/>
-                </a:solidFill>
-                <a:latin typeface="Calibri" pitchFamily="34" charset="0"/>
-                <a:ea typeface="Calibri" pitchFamily="34" charset="-122"/>
-                <a:cs typeface="Calibri" pitchFamily="34" charset="-120"/>
-              </a:rPr>
-              <a:t>spoons   ·   bowls   ·   kettles   ·   dishes   ·   boxes   ·   wishes   ·   stories   ·   ponies</a:t>
+                  <a:srgbClr val="1E293B"/>
+                </a:solidFill>
+                <a:latin typeface="Calibri" pitchFamily="34" charset="0"/>
+                <a:ea typeface="Calibri" pitchFamily="34" charset="-122"/>
+                <a:cs typeface="Calibri" pitchFamily="34" charset="-120"/>
+              </a:rPr>
+              <a:t>And</a:t>
+            </a:r>
+            <a:pPr indent="0" marL="0">
+              <a:buNone/>
+            </a:pPr>
+            <a:r>
+              <a:rPr lang="en-US" sz="1700" dirty="0">
+                <a:solidFill>
+                  <a:srgbClr val="1E293B"/>
+                </a:solidFill>
+                <a:latin typeface="Calibri" pitchFamily="34" charset="0"/>
+                <a:ea typeface="Calibri" pitchFamily="34" charset="-122"/>
+                <a:cs typeface="Calibri" pitchFamily="34" charset="-120"/>
+              </a:rPr>
+              <a:t> </a:t>
+            </a:r>
+            <a:pPr indent="0" marL="0">
+              <a:buNone/>
+            </a:pPr>
+            <a:r>
+              <a:rPr lang="en-US" sz="1700" dirty="0">
+                <a:solidFill>
+                  <a:srgbClr val="1E293B"/>
+                </a:solidFill>
+                <a:latin typeface="Calibri" pitchFamily="34" charset="0"/>
+                <a:ea typeface="Calibri" pitchFamily="34" charset="-122"/>
+                <a:cs typeface="Calibri" pitchFamily="34" charset="-120"/>
+              </a:rPr>
+              <a:t>Miggery</a:t>
+            </a:r>
+            <a:pPr indent="0" marL="0">
+              <a:buNone/>
+            </a:pPr>
+            <a:r>
+              <a:rPr lang="en-US" sz="1700" dirty="0">
+                <a:solidFill>
+                  <a:srgbClr val="1E293B"/>
+                </a:solidFill>
+                <a:latin typeface="Calibri" pitchFamily="34" charset="0"/>
+                <a:ea typeface="Calibri" pitchFamily="34" charset="-122"/>
+                <a:cs typeface="Calibri" pitchFamily="34" charset="-120"/>
+              </a:rPr>
+              <a:t> </a:t>
+            </a:r>
+            <a:pPr indent="0" marL="0">
+              <a:buNone/>
+            </a:pPr>
+            <a:r>
+              <a:rPr lang="en-US" sz="1700" dirty="0">
+                <a:solidFill>
+                  <a:srgbClr val="1E293B"/>
+                </a:solidFill>
+                <a:latin typeface="Calibri" pitchFamily="34" charset="0"/>
+                <a:ea typeface="Calibri" pitchFamily="34" charset="-122"/>
+                <a:cs typeface="Calibri" pitchFamily="34" charset="-120"/>
+              </a:rPr>
+              <a:t>Sow</a:t>
+            </a:r>
+            <a:pPr indent="0" marL="0">
+              <a:buNone/>
+            </a:pPr>
+            <a:r>
+              <a:rPr lang="en-US" sz="1700" dirty="0">
+                <a:solidFill>
+                  <a:srgbClr val="1E293B"/>
+                </a:solidFill>
+                <a:latin typeface="Calibri" pitchFamily="34" charset="0"/>
+                <a:ea typeface="Calibri" pitchFamily="34" charset="-122"/>
+                <a:cs typeface="Calibri" pitchFamily="34" charset="-120"/>
+              </a:rPr>
+              <a:t> </a:t>
+            </a:r>
+            <a:pPr indent="0" marL="0">
+              <a:buNone/>
+            </a:pPr>
+            <a:r>
+              <a:rPr lang="en-US" sz="1700" dirty="0">
+                <a:solidFill>
+                  <a:srgbClr val="1E293B"/>
+                </a:solidFill>
+                <a:latin typeface="Calibri" pitchFamily="34" charset="0"/>
+                <a:ea typeface="Calibri" pitchFamily="34" charset="-122"/>
+                <a:cs typeface="Calibri" pitchFamily="34" charset="-120"/>
+              </a:rPr>
+              <a:t>was</a:t>
+            </a:r>
+            <a:pPr indent="0" marL="0">
+              <a:buNone/>
+            </a:pPr>
+            <a:r>
+              <a:rPr lang="en-US" sz="1700" dirty="0">
+                <a:solidFill>
+                  <a:srgbClr val="1E293B"/>
+                </a:solidFill>
+                <a:latin typeface="Calibri" pitchFamily="34" charset="0"/>
+                <a:ea typeface="Calibri" pitchFamily="34" charset="-122"/>
+                <a:cs typeface="Calibri" pitchFamily="34" charset="-120"/>
+              </a:rPr>
+              <a:t> </a:t>
+            </a:r>
+            <a:pPr indent="0" marL="0">
+              <a:buNone/>
+            </a:pPr>
+            <a:r>
+              <a:rPr lang="en-US" sz="1700" dirty="0">
+                <a:solidFill>
+                  <a:srgbClr val="1E293B"/>
+                </a:solidFill>
+                <a:latin typeface="Calibri" pitchFamily="34" charset="0"/>
+                <a:ea typeface="Calibri" pitchFamily="34" charset="-122"/>
+                <a:cs typeface="Calibri" pitchFamily="34" charset="-120"/>
+              </a:rPr>
+              <a:t>right</a:t>
+            </a:r>
+            <a:pPr indent="0" marL="0">
+              <a:buNone/>
+            </a:pPr>
+            <a:r>
+              <a:rPr lang="en-US" sz="1700" dirty="0">
+                <a:solidFill>
+                  <a:srgbClr val="1E293B"/>
+                </a:solidFill>
+                <a:latin typeface="Calibri" pitchFamily="34" charset="0"/>
+                <a:ea typeface="Calibri" pitchFamily="34" charset="-122"/>
+                <a:cs typeface="Calibri" pitchFamily="34" charset="-120"/>
+              </a:rPr>
+              <a:t> </a:t>
+            </a:r>
+            <a:pPr indent="0" marL="0">
+              <a:buNone/>
+            </a:pPr>
+            <a:r>
+              <a:rPr lang="en-US" sz="1700" dirty="0">
+                <a:solidFill>
+                  <a:srgbClr val="1E293B"/>
+                </a:solidFill>
+                <a:latin typeface="Calibri" pitchFamily="34" charset="0"/>
+                <a:ea typeface="Calibri" pitchFamily="34" charset="-122"/>
+                <a:cs typeface="Calibri" pitchFamily="34" charset="-120"/>
+              </a:rPr>
+              <a:t>in</a:t>
+            </a:r>
+            <a:pPr indent="0" marL="0">
+              <a:buNone/>
+            </a:pPr>
+            <a:r>
+              <a:rPr lang="en-US" sz="1700" dirty="0">
+                <a:solidFill>
+                  <a:srgbClr val="1E293B"/>
+                </a:solidFill>
+                <a:latin typeface="Calibri" pitchFamily="34" charset="0"/>
+                <a:ea typeface="Calibri" pitchFamily="34" charset="-122"/>
+                <a:cs typeface="Calibri" pitchFamily="34" charset="-120"/>
+              </a:rPr>
+              <a:t> </a:t>
+            </a:r>
+            <a:pPr indent="0" marL="0">
+              <a:buNone/>
+            </a:pPr>
+            <a:r>
+              <a:rPr lang="en-US" sz="1700" dirty="0">
+                <a:solidFill>
+                  <a:srgbClr val="1E293B"/>
+                </a:solidFill>
+                <a:latin typeface="Calibri" pitchFamily="34" charset="0"/>
+                <a:ea typeface="Calibri" pitchFamily="34" charset="-122"/>
+                <a:cs typeface="Calibri" pitchFamily="34" charset="-120"/>
+              </a:rPr>
+              <a:t>the</a:t>
+            </a:r>
+            <a:pPr indent="0" marL="0">
+              <a:buNone/>
+            </a:pPr>
+            <a:r>
+              <a:rPr lang="en-US" sz="1700" dirty="0">
+                <a:solidFill>
+                  <a:srgbClr val="1E293B"/>
+                </a:solidFill>
+                <a:latin typeface="Calibri" pitchFamily="34" charset="0"/>
+                <a:ea typeface="Calibri" pitchFamily="34" charset="-122"/>
+                <a:cs typeface="Calibri" pitchFamily="34" charset="-120"/>
+              </a:rPr>
+              <a:t> </a:t>
+            </a:r>
+            <a:pPr indent="0" marL="0">
+              <a:buNone/>
+            </a:pPr>
+            <a:r>
+              <a:rPr lang="en-US" sz="1700" dirty="0">
+                <a:solidFill>
+                  <a:srgbClr val="1E293B"/>
+                </a:solidFill>
+                <a:latin typeface="Calibri" pitchFamily="34" charset="0"/>
+                <a:ea typeface="Calibri" pitchFamily="34" charset="-122"/>
+                <a:cs typeface="Calibri" pitchFamily="34" charset="-120"/>
+              </a:rPr>
+              <a:t>center</a:t>
+            </a:r>
+            <a:pPr indent="0" marL="0">
+              <a:buNone/>
+            </a:pPr>
+            <a:r>
+              <a:rPr lang="en-US" sz="1700" dirty="0">
+                <a:solidFill>
+                  <a:srgbClr val="1E293B"/>
+                </a:solidFill>
+                <a:latin typeface="Calibri" pitchFamily="34" charset="0"/>
+                <a:ea typeface="Calibri" pitchFamily="34" charset="-122"/>
+                <a:cs typeface="Calibri" pitchFamily="34" charset="-120"/>
+              </a:rPr>
+              <a:t> </a:t>
+            </a:r>
+            <a:pPr indent="0" marL="0">
+              <a:buNone/>
+            </a:pPr>
+            <a:r>
+              <a:rPr lang="en-US" sz="1700" dirty="0">
+                <a:solidFill>
+                  <a:srgbClr val="1E293B"/>
+                </a:solidFill>
+                <a:latin typeface="Calibri" pitchFamily="34" charset="0"/>
+                <a:ea typeface="Calibri" pitchFamily="34" charset="-122"/>
+                <a:cs typeface="Calibri" pitchFamily="34" charset="-120"/>
+              </a:rPr>
+              <a:t>of</a:t>
+            </a:r>
+            <a:pPr indent="0" marL="0">
+              <a:buNone/>
+            </a:pPr>
+            <a:r>
+              <a:rPr lang="en-US" sz="1700" dirty="0">
+                <a:solidFill>
+                  <a:srgbClr val="1E293B"/>
+                </a:solidFill>
+                <a:latin typeface="Calibri" pitchFamily="34" charset="0"/>
+                <a:ea typeface="Calibri" pitchFamily="34" charset="-122"/>
+                <a:cs typeface="Calibri" pitchFamily="34" charset="-120"/>
+              </a:rPr>
+              <a:t> </a:t>
+            </a:r>
+            <a:pPr indent="0" marL="0">
+              <a:buNone/>
+            </a:pPr>
+            <a:r>
+              <a:rPr lang="en-US" sz="1700" dirty="0">
+                <a:solidFill>
+                  <a:srgbClr val="1E293B"/>
+                </a:solidFill>
+                <a:latin typeface="Calibri" pitchFamily="34" charset="0"/>
+                <a:ea typeface="Calibri" pitchFamily="34" charset="-122"/>
+                <a:cs typeface="Calibri" pitchFamily="34" charset="-120"/>
+              </a:rPr>
+              <a:t>it.</a:t>
             </a:r>
             <a:endParaRPr lang="en-US" sz="1700" dirty="0"/>
           </a:p>
@@ -4061,40 +4801,340 @@
       </p:sp>
       <p:sp>
         <p:nvSpPr>
-          <p:cNvPr id="8" name="Text 6"/>
-          <p:cNvSpPr/>
-          <p:nvPr/>
-        </p:nvSpPr>
-        <p:spPr>
-          <a:xfrm>
-            <a:off x="365760" y="2514600"/>
-            <a:ext cx="8412480" cy="457200"/>
-          </a:xfrm>
-          <a:prstGeom prst="rect">
-            <a:avLst/>
-          </a:prstGeom>
-          <a:noFill/>
-          <a:ln/>
-        </p:spPr>
-        <p:txBody>
-          <a:bodyPr wrap="square" lIns="0" tIns="0" rIns="0" bIns="0" rtlCol="0" anchor="ctr"/>
-          <a:lstStyle/>
-          <a:p>
-            <a:pPr indent="0" marL="0">
-              <a:buNone/>
-            </a:pPr>
-            <a:r>
-              <a:rPr lang="en-US" sz="1500" i="1" dirty="0">
-                <a:solidFill>
-                  <a:srgbClr val="64748B"/>
-                </a:solidFill>
-                <a:latin typeface="Calibri" pitchFamily="34" charset="0"/>
-                <a:ea typeface="Calibri" pitchFamily="34" charset="-122"/>
-                <a:cs typeface="Calibri" pitchFamily="34" charset="-120"/>
-              </a:rPr>
-              <a:t>Which column does each word belong in?  Columns: just -s  |  -es  |  y → -ies</a:t>
-            </a:r>
-            <a:endParaRPr lang="en-US" sz="1500" dirty="0"/>
+          <p:cNvPr id="9" name="Shape 7"/>
+          <p:cNvSpPr/>
+          <p:nvPr/>
+        </p:nvSpPr>
+        <p:spPr>
+          <a:xfrm>
+            <a:off x="365760" y="2212848"/>
+            <a:ext cx="8412480" cy="658368"/>
+          </a:xfrm>
+          <a:prstGeom prst="roundRect">
+            <a:avLst>
+              <a:gd name="adj" fmla="val 13889"/>
+            </a:avLst>
+          </a:prstGeom>
+          <a:solidFill>
+            <a:srgbClr val="FFFFFF"/>
+          </a:solidFill>
+          <a:ln w="19050">
+            <a:solidFill>
+              <a:srgbClr val="C7922C"/>
+            </a:solidFill>
+            <a:prstDash val="solid"/>
+          </a:ln>
+          <a:effectLst>
+            <a:outerShdw sx="100000" sy="100000" kx="0" ky="0" algn="bl" rotWithShape="0" blurRad="101600" dist="38100" dir="2700000">
+              <a:srgbClr val="000000">
+                <a:alpha val="12000"/>
+              </a:srgbClr>
+            </a:outerShdw>
+          </a:effectLst>
+        </p:spPr>
+      </p:sp>
+      <p:sp>
+        <p:nvSpPr>
+          <p:cNvPr id="10" name="Text 8"/>
+          <p:cNvSpPr/>
+          <p:nvPr/>
+        </p:nvSpPr>
+        <p:spPr>
+          <a:xfrm>
+            <a:off x="594360" y="2340864"/>
+            <a:ext cx="7955280" cy="402336"/>
+          </a:xfrm>
+          <a:prstGeom prst="rect">
+            <a:avLst/>
+          </a:prstGeom>
+          <a:noFill/>
+          <a:ln/>
+        </p:spPr>
+        <p:txBody>
+          <a:bodyPr wrap="square" lIns="0" tIns="0" rIns="0" bIns="0" rtlCol="0" anchor="ctr"/>
+          <a:lstStyle/>
+          <a:p>
+            <a:pPr indent="0" marL="0">
+              <a:buNone/>
+            </a:pPr>
+            <a:endParaRPr lang="en-US" sz="1700" dirty="0"/>
+          </a:p>
+        </p:txBody>
+      </p:sp>
+      <p:sp>
+        <p:nvSpPr>
+          <p:cNvPr id="11" name="Text 9"/>
+          <p:cNvSpPr/>
+          <p:nvPr/>
+        </p:nvSpPr>
+        <p:spPr>
+          <a:xfrm>
+            <a:off x="594360" y="2340864"/>
+            <a:ext cx="7955280" cy="402336"/>
+          </a:xfrm>
+          <a:prstGeom prst="rect">
+            <a:avLst/>
+          </a:prstGeom>
+          <a:noFill/>
+          <a:ln/>
+        </p:spPr>
+        <p:txBody>
+          <a:bodyPr wrap="square" lIns="0" tIns="0" rIns="0" bIns="0" rtlCol="0" anchor="ctr"/>
+          <a:lstStyle/>
+          <a:p>
+            <a:pPr indent="0" marL="0">
+              <a:buNone/>
+            </a:pPr>
+            <a:r>
+              <a:rPr lang="en-US" sz="1700" dirty="0">
+                <a:solidFill>
+                  <a:srgbClr val="1E293B"/>
+                </a:solidFill>
+                <a:latin typeface="Calibri" pitchFamily="34" charset="0"/>
+                <a:ea typeface="Calibri" pitchFamily="34" charset="-122"/>
+                <a:cs typeface="Calibri" pitchFamily="34" charset="-120"/>
+              </a:rPr>
+              <a:t>These</a:t>
+            </a:r>
+            <a:pPr indent="0" marL="0">
+              <a:buNone/>
+            </a:pPr>
+            <a:r>
+              <a:rPr lang="en-US" sz="1700" dirty="0">
+                <a:solidFill>
+                  <a:srgbClr val="1E293B"/>
+                </a:solidFill>
+                <a:latin typeface="Calibri" pitchFamily="34" charset="0"/>
+                <a:ea typeface="Calibri" pitchFamily="34" charset="-122"/>
+                <a:cs typeface="Calibri" pitchFamily="34" charset="-120"/>
+              </a:rPr>
+              <a:t> </a:t>
+            </a:r>
+            <a:pPr indent="0" marL="0">
+              <a:buNone/>
+            </a:pPr>
+            <a:r>
+              <a:rPr lang="en-US" sz="1700" dirty="0">
+                <a:solidFill>
+                  <a:srgbClr val="1E293B"/>
+                </a:solidFill>
+                <a:latin typeface="Calibri" pitchFamily="34" charset="0"/>
+                <a:ea typeface="Calibri" pitchFamily="34" charset="-122"/>
+                <a:cs typeface="Calibri" pitchFamily="34" charset="-120"/>
+              </a:rPr>
+              <a:t>clouts</a:t>
+            </a:r>
+            <a:pPr indent="0" marL="0">
+              <a:buNone/>
+            </a:pPr>
+            <a:r>
+              <a:rPr lang="en-US" sz="1700" dirty="0">
+                <a:solidFill>
+                  <a:srgbClr val="1E293B"/>
+                </a:solidFill>
+                <a:latin typeface="Calibri" pitchFamily="34" charset="0"/>
+                <a:ea typeface="Calibri" pitchFamily="34" charset="-122"/>
+                <a:cs typeface="Calibri" pitchFamily="34" charset="-120"/>
+              </a:rPr>
+              <a:t> </a:t>
+            </a:r>
+            <a:pPr indent="0" marL="0">
+              <a:buNone/>
+            </a:pPr>
+            <a:r>
+              <a:rPr lang="en-US" sz="1700" dirty="0">
+                <a:solidFill>
+                  <a:srgbClr val="1E293B"/>
+                </a:solidFill>
+                <a:latin typeface="Calibri" pitchFamily="34" charset="0"/>
+                <a:ea typeface="Calibri" pitchFamily="34" charset="-122"/>
+                <a:cs typeface="Calibri" pitchFamily="34" charset="-120"/>
+              </a:rPr>
+              <a:t>were</a:t>
+            </a:r>
+            <a:pPr indent="0" marL="0">
+              <a:buNone/>
+            </a:pPr>
+            <a:r>
+              <a:rPr lang="en-US" sz="1700" dirty="0">
+                <a:solidFill>
+                  <a:srgbClr val="1E293B"/>
+                </a:solidFill>
+                <a:latin typeface="Calibri" pitchFamily="34" charset="0"/>
+                <a:ea typeface="Calibri" pitchFamily="34" charset="-122"/>
+                <a:cs typeface="Calibri" pitchFamily="34" charset="-120"/>
+              </a:rPr>
+              <a:t> </a:t>
+            </a:r>
+            <a:pPr indent="0" marL="0">
+              <a:buNone/>
+            </a:pPr>
+            <a:r>
+              <a:rPr lang="en-US" sz="1700" dirty="0">
+                <a:solidFill>
+                  <a:srgbClr val="1E293B"/>
+                </a:solidFill>
+                <a:latin typeface="Calibri" pitchFamily="34" charset="0"/>
+                <a:ea typeface="Calibri" pitchFamily="34" charset="-122"/>
+                <a:cs typeface="Calibri" pitchFamily="34" charset="-120"/>
+              </a:rPr>
+              <a:t>alarmingly</a:t>
+            </a:r>
+            <a:pPr indent="0" marL="0">
+              <a:buNone/>
+            </a:pPr>
+            <a:r>
+              <a:rPr lang="en-US" sz="1700" dirty="0">
+                <a:solidFill>
+                  <a:srgbClr val="1E293B"/>
+                </a:solidFill>
+                <a:latin typeface="Calibri" pitchFamily="34" charset="0"/>
+                <a:ea typeface="Calibri" pitchFamily="34" charset="-122"/>
+                <a:cs typeface="Calibri" pitchFamily="34" charset="-120"/>
+              </a:rPr>
+              <a:t> </a:t>
+            </a:r>
+            <a:pPr indent="0" marL="0">
+              <a:buNone/>
+            </a:pPr>
+            <a:r>
+              <a:rPr lang="en-US" sz="1700" dirty="0">
+                <a:solidFill>
+                  <a:srgbClr val="1E293B"/>
+                </a:solidFill>
+                <a:latin typeface="Calibri" pitchFamily="34" charset="0"/>
+                <a:ea typeface="Calibri" pitchFamily="34" charset="-122"/>
+                <a:cs typeface="Calibri" pitchFamily="34" charset="-120"/>
+              </a:rPr>
+              <a:t>frequent.</a:t>
+            </a:r>
+            <a:endParaRPr lang="en-US" sz="1700" dirty="0"/>
+          </a:p>
+        </p:txBody>
+      </p:sp>
+      <p:sp>
+        <p:nvSpPr>
+          <p:cNvPr id="12" name="Shape 10"/>
+          <p:cNvSpPr/>
+          <p:nvPr/>
+        </p:nvSpPr>
+        <p:spPr>
+          <a:xfrm>
+            <a:off x="365760" y="3008376"/>
+            <a:ext cx="8412480" cy="1837944"/>
+          </a:xfrm>
+          <a:prstGeom prst="roundRect">
+            <a:avLst>
+              <a:gd name="adj" fmla="val 4975"/>
+            </a:avLst>
+          </a:prstGeom>
+          <a:solidFill>
+            <a:srgbClr val="E8F8EF"/>
+          </a:solidFill>
+          <a:ln/>
+          <a:effectLst>
+            <a:outerShdw sx="100000" sy="100000" kx="0" ky="0" algn="bl" rotWithShape="0" blurRad="101600" dist="38100" dir="2700000">
+              <a:srgbClr val="000000">
+                <a:alpha val="12000"/>
+              </a:srgbClr>
+            </a:outerShdw>
+          </a:effectLst>
+        </p:spPr>
+      </p:sp>
+      <p:sp>
+        <p:nvSpPr>
+          <p:cNvPr id="13" name="Text 11"/>
+          <p:cNvSpPr/>
+          <p:nvPr/>
+        </p:nvSpPr>
+        <p:spPr>
+          <a:xfrm>
+            <a:off x="566928" y="3072384"/>
+            <a:ext cx="8229600" cy="237744"/>
+          </a:xfrm>
+          <a:prstGeom prst="rect">
+            <a:avLst/>
+          </a:prstGeom>
+          <a:noFill/>
+          <a:ln/>
+        </p:spPr>
+        <p:txBody>
+          <a:bodyPr wrap="square" lIns="0" tIns="0" rIns="0" bIns="0" rtlCol="0" anchor="ctr"/>
+          <a:lstStyle/>
+          <a:p>
+            <a:pPr indent="0" marL="0">
+              <a:buNone/>
+            </a:pPr>
+            <a:r>
+              <a:rPr lang="en-US" sz="1100" b="1" spc="100" kern="0" dirty="0">
+                <a:solidFill>
+                  <a:srgbClr val="34B76F"/>
+                </a:solidFill>
+                <a:latin typeface="Calibri" pitchFamily="34" charset="0"/>
+                <a:ea typeface="Calibri" pitchFamily="34" charset="-122"/>
+                <a:cs typeface="Calibri" pitchFamily="34" charset="-120"/>
+              </a:rPr>
+              <a:t>✅  THE PATTERN</a:t>
+            </a:r>
+            <a:endParaRPr lang="en-US" sz="1100" dirty="0"/>
+          </a:p>
+        </p:txBody>
+      </p:sp>
+      <p:sp>
+        <p:nvSpPr>
+          <p:cNvPr id="14" name="Text 12"/>
+          <p:cNvSpPr/>
+          <p:nvPr/>
+        </p:nvSpPr>
+        <p:spPr>
+          <a:xfrm>
+            <a:off x="566928" y="3328416"/>
+            <a:ext cx="8010144" cy="1380744"/>
+          </a:xfrm>
+          <a:prstGeom prst="rect">
+            <a:avLst/>
+          </a:prstGeom>
+          <a:noFill/>
+          <a:ln/>
+        </p:spPr>
+        <p:txBody>
+          <a:bodyPr wrap="square" lIns="0" tIns="0" rIns="0" bIns="0" rtlCol="0" anchor="t">
+            <a:normAutofit/>
+          </a:bodyPr>
+          <a:lstStyle/>
+          <a:p>
+            <a:pPr indent="0" marL="0">
+              <a:buNone/>
+            </a:pPr>
+            <a:r>
+              <a:rPr lang="en-US" sz="1300" dirty="0">
+                <a:solidFill>
+                  <a:srgbClr val="1E293B"/>
+                </a:solidFill>
+                <a:latin typeface="Calibri" pitchFamily="34" charset="0"/>
+                <a:ea typeface="Calibri" pitchFamily="34" charset="-122"/>
+                <a:cs typeface="Calibri" pitchFamily="34" charset="-120"/>
+              </a:rPr>
+              <a:t>A verb has to match its subject. One thing is, was, or runs. More than one thing are, were, or run. Find the subject first, then check the verb against it.</a:t>
+            </a:r>
+            <a:endParaRPr lang="en-US" sz="1300" dirty="0"/>
+          </a:p>
+          <a:p>
+            <a:pPr indent="0" marL="0">
+              <a:buNone/>
+            </a:pPr>
+            <a:r>
+              <a:rPr lang="en-US" sz="1300" dirty="0">
+                <a:solidFill>
+                  <a:srgbClr val="1E293B"/>
+                </a:solidFill>
+                <a:latin typeface="Calibri" pitchFamily="34" charset="0"/>
+                <a:ea typeface="Calibri" pitchFamily="34" charset="-122"/>
+                <a:cs typeface="Calibri" pitchFamily="34" charset="-120"/>
+              </a:rPr>
+              <a:t>One girl, so was. Two girls would need were.</a:t>
+            </a:r>
+            <a:endParaRPr lang="en-US" sz="1300" dirty="0"/>
           </a:p>
         </p:txBody>
       </p:sp>
@@ -4145,7 +5185,7 @@
             <a:avLst/>
           </a:prstGeom>
           <a:solidFill>
-            <a:srgbClr val="0E1C42"/>
+            <a:srgbClr val="C7922C"/>
           </a:solidFill>
           <a:ln/>
         </p:spPr>
@@ -4183,7 +5223,7 @@
                 <a:ea typeface="Calibri" pitchFamily="34" charset="-122"/>
                 <a:cs typeface="Calibri" pitchFamily="34" charset="-120"/>
               </a:rPr>
-              <a:t>🔠  Spelling</a:t>
+              <a:t>✏️  Grammar</a:t>
             </a:r>
             <a:endParaRPr lang="en-US" sz="2200" dirty="0"/>
           </a:p>
@@ -4216,13 +5256,13 @@
             <a:r>
               <a:rPr lang="en-US" sz="1100" b="1" spc="100" kern="0" dirty="0">
                 <a:solidFill>
-                  <a:srgbClr val="0E1C42"/>
-                </a:solidFill>
-                <a:latin typeface="Calibri" pitchFamily="34" charset="0"/>
-                <a:ea typeface="Calibri" pitchFamily="34" charset="-122"/>
-                <a:cs typeface="Calibri" pitchFamily="34" charset="-120"/>
-              </a:rPr>
-              <a:t>PLURALS: -S, -ES, AND -IES</a:t>
+                  <a:srgbClr val="C7922C"/>
+                </a:solidFill>
+                <a:latin typeface="Calibri" pitchFamily="34" charset="0"/>
+                <a:ea typeface="Calibri" pitchFamily="34" charset="-122"/>
+                <a:cs typeface="Calibri" pitchFamily="34" charset="-120"/>
+              </a:rPr>
+              <a:t>SUBJECT-VERB AGREEMENT</a:t>
             </a:r>
             <a:endParaRPr lang="en-US" sz="1100" dirty="0"/>
           </a:p>
@@ -4236,77 +5276,16 @@
         </p:nvSpPr>
         <p:spPr>
           <a:xfrm>
-            <a:off x="411480" y="1078992"/>
-            <a:ext cx="2712720" cy="457200"/>
+            <a:off x="365760" y="1078992"/>
+            <a:ext cx="8412480" cy="658368"/>
           </a:xfrm>
           <a:prstGeom prst="roundRect">
             <a:avLst>
-              <a:gd name="adj" fmla="val 16000"/>
+              <a:gd name="adj" fmla="val 13889"/>
             </a:avLst>
           </a:prstGeom>
           <a:solidFill>
-            <a:srgbClr val="0E1C42"/>
-          </a:solidFill>
-          <a:ln/>
-        </p:spPr>
-      </p:sp>
-      <p:sp>
-        <p:nvSpPr>
-          <p:cNvPr id="6" name="Text 4"/>
-          <p:cNvSpPr/>
-          <p:nvPr/>
-        </p:nvSpPr>
-        <p:spPr>
-          <a:xfrm>
-            <a:off x="457200" y="1133856"/>
-            <a:ext cx="2621280" cy="347472"/>
-          </a:xfrm>
-          <a:prstGeom prst="rect">
-            <a:avLst/>
-          </a:prstGeom>
-          <a:noFill/>
-          <a:ln/>
-        </p:spPr>
-        <p:txBody>
-          <a:bodyPr wrap="square" lIns="0" tIns="0" rIns="0" bIns="0" rtlCol="0" anchor="ctr"/>
-          <a:lstStyle/>
-          <a:p>
-            <a:pPr algn="ctr" indent="0" marL="0">
-              <a:buNone/>
-            </a:pPr>
-            <a:r>
-              <a:rPr lang="en-US" sz="1300" b="1" dirty="0">
-                <a:solidFill>
-                  <a:srgbClr val="FFFFFF"/>
-                </a:solidFill>
-                <a:latin typeface="Calibri" pitchFamily="34" charset="0"/>
-                <a:ea typeface="Calibri" pitchFamily="34" charset="-122"/>
-                <a:cs typeface="Calibri" pitchFamily="34" charset="-120"/>
-              </a:rPr>
-              <a:t>just -s</a:t>
-            </a:r>
-            <a:endParaRPr lang="en-US" sz="1300" dirty="0"/>
-          </a:p>
-        </p:txBody>
-      </p:sp>
-      <p:sp>
-        <p:nvSpPr>
-          <p:cNvPr id="7" name="Shape 5"/>
-          <p:cNvSpPr/>
-          <p:nvPr/>
-        </p:nvSpPr>
-        <p:spPr>
-          <a:xfrm>
-            <a:off x="411480" y="1591056"/>
-            <a:ext cx="2712720" cy="2103120"/>
-          </a:xfrm>
-          <a:prstGeom prst="roundRect">
-            <a:avLst>
-              <a:gd name="adj" fmla="val 4348"/>
-            </a:avLst>
-          </a:prstGeom>
-          <a:solidFill>
-            <a:srgbClr val="FFFFFF"/>
+            <a:srgbClr val="FEF6E8"/>
           </a:solidFill>
           <a:ln/>
           <a:effectLst>
@@ -4320,152 +5299,57 @@
       </p:sp>
       <p:sp>
         <p:nvSpPr>
-          <p:cNvPr id="8" name="Text 6"/>
-          <p:cNvSpPr/>
-          <p:nvPr/>
-        </p:nvSpPr>
-        <p:spPr>
-          <a:xfrm>
-            <a:off x="502920" y="1700784"/>
-            <a:ext cx="2529840" cy="1883664"/>
-          </a:xfrm>
-          <a:prstGeom prst="rect">
-            <a:avLst/>
-          </a:prstGeom>
-          <a:noFill/>
-          <a:ln/>
-        </p:spPr>
-        <p:txBody>
-          <a:bodyPr wrap="square" lIns="0" tIns="0" rIns="0" bIns="0" rtlCol="0" anchor="ctr"/>
-          <a:lstStyle/>
-          <a:p>
-            <a:pPr algn="ctr" indent="0" marL="0">
-              <a:buNone/>
-            </a:pPr>
-            <a:r>
-              <a:rPr lang="en-US" sz="1400" dirty="0">
-                <a:solidFill>
-                  <a:srgbClr val="1E293B"/>
-                </a:solidFill>
-                <a:latin typeface="Calibri" pitchFamily="34" charset="0"/>
-                <a:ea typeface="Calibri" pitchFamily="34" charset="-122"/>
-                <a:cs typeface="Calibri" pitchFamily="34" charset="-120"/>
-              </a:rPr>
-              <a:t>spoons</a:t>
-            </a:r>
-            <a:endParaRPr lang="en-US" sz="1400" dirty="0"/>
-          </a:p>
-          <a:p>
-            <a:pPr algn="ctr" indent="0" marL="0">
-              <a:buNone/>
-            </a:pPr>
-            <a:r>
-              <a:rPr lang="en-US" sz="1400" dirty="0">
-                <a:solidFill>
-                  <a:srgbClr val="1E293B"/>
-                </a:solidFill>
-                <a:latin typeface="Calibri" pitchFamily="34" charset="0"/>
-                <a:ea typeface="Calibri" pitchFamily="34" charset="-122"/>
-                <a:cs typeface="Calibri" pitchFamily="34" charset="-120"/>
-              </a:rPr>
-              <a:t>bowls</a:t>
-            </a:r>
-            <a:endParaRPr lang="en-US" sz="1400" dirty="0"/>
-          </a:p>
-          <a:p>
-            <a:pPr algn="ctr" indent="0" marL="0">
-              <a:buNone/>
-            </a:pPr>
-            <a:r>
-              <a:rPr lang="en-US" sz="1400" dirty="0">
-                <a:solidFill>
-                  <a:srgbClr val="1E293B"/>
-                </a:solidFill>
-                <a:latin typeface="Calibri" pitchFamily="34" charset="0"/>
-                <a:ea typeface="Calibri" pitchFamily="34" charset="-122"/>
-                <a:cs typeface="Calibri" pitchFamily="34" charset="-120"/>
-              </a:rPr>
-              <a:t>kettles</a:t>
-            </a:r>
-            <a:endParaRPr lang="en-US" sz="1400" dirty="0"/>
-          </a:p>
-        </p:txBody>
-      </p:sp>
-      <p:sp>
-        <p:nvSpPr>
-          <p:cNvPr id="9" name="Shape 7"/>
-          <p:cNvSpPr/>
-          <p:nvPr/>
-        </p:nvSpPr>
-        <p:spPr>
-          <a:xfrm>
-            <a:off x="3215640" y="1078992"/>
-            <a:ext cx="2712720" cy="457200"/>
+          <p:cNvPr id="6" name="Text 4"/>
+          <p:cNvSpPr/>
+          <p:nvPr/>
+        </p:nvSpPr>
+        <p:spPr>
+          <a:xfrm>
+            <a:off x="594360" y="1225296"/>
+            <a:ext cx="7863840" cy="402336"/>
+          </a:xfrm>
+          <a:prstGeom prst="rect">
+            <a:avLst/>
+          </a:prstGeom>
+          <a:noFill/>
+          <a:ln/>
+        </p:spPr>
+        <p:txBody>
+          <a:bodyPr wrap="square" lIns="0" tIns="0" rIns="0" bIns="0" rtlCol="0" anchor="ctr"/>
+          <a:lstStyle/>
+          <a:p>
+            <a:pPr indent="0" marL="0">
+              <a:buNone/>
+            </a:pPr>
+            <a:r>
+              <a:rPr lang="en-US" sz="1600" dirty="0">
+                <a:solidFill>
+                  <a:srgbClr val="1E293B"/>
+                </a:solidFill>
+                <a:latin typeface="Calibri" pitchFamily="34" charset="0"/>
+                <a:ea typeface="Calibri" pitchFamily="34" charset="-122"/>
+                <a:cs typeface="Calibri" pitchFamily="34" charset="-120"/>
+              </a:rPr>
+              <a:t>The mice run down the hall.</a:t>
+            </a:r>
+            <a:endParaRPr lang="en-US" sz="1600" dirty="0"/>
+          </a:p>
+        </p:txBody>
+      </p:sp>
+      <p:sp>
+        <p:nvSpPr>
+          <p:cNvPr id="7" name="Shape 5"/>
+          <p:cNvSpPr/>
+          <p:nvPr/>
+        </p:nvSpPr>
+        <p:spPr>
+          <a:xfrm>
+            <a:off x="365760" y="1810512"/>
+            <a:ext cx="8412480" cy="658368"/>
           </a:xfrm>
           <a:prstGeom prst="roundRect">
             <a:avLst>
-              <a:gd name="adj" fmla="val 16000"/>
-            </a:avLst>
-          </a:prstGeom>
-          <a:solidFill>
-            <a:srgbClr val="0E1C42"/>
-          </a:solidFill>
-          <a:ln/>
-        </p:spPr>
-      </p:sp>
-      <p:sp>
-        <p:nvSpPr>
-          <p:cNvPr id="10" name="Text 8"/>
-          <p:cNvSpPr/>
-          <p:nvPr/>
-        </p:nvSpPr>
-        <p:spPr>
-          <a:xfrm>
-            <a:off x="3261360" y="1133856"/>
-            <a:ext cx="2621280" cy="347472"/>
-          </a:xfrm>
-          <a:prstGeom prst="rect">
-            <a:avLst/>
-          </a:prstGeom>
-          <a:noFill/>
-          <a:ln/>
-        </p:spPr>
-        <p:txBody>
-          <a:bodyPr wrap="square" lIns="0" tIns="0" rIns="0" bIns="0" rtlCol="0" anchor="ctr"/>
-          <a:lstStyle/>
-          <a:p>
-            <a:pPr algn="ctr" indent="0" marL="0">
-              <a:buNone/>
-            </a:pPr>
-            <a:r>
-              <a:rPr lang="en-US" sz="1300" b="1" dirty="0">
-                <a:solidFill>
-                  <a:srgbClr val="FFFFFF"/>
-                </a:solidFill>
-                <a:latin typeface="Calibri" pitchFamily="34" charset="0"/>
-                <a:ea typeface="Calibri" pitchFamily="34" charset="-122"/>
-                <a:cs typeface="Calibri" pitchFamily="34" charset="-120"/>
-              </a:rPr>
-              <a:t>-es</a:t>
-            </a:r>
-            <a:endParaRPr lang="en-US" sz="1300" dirty="0"/>
-          </a:p>
-        </p:txBody>
-      </p:sp>
-      <p:sp>
-        <p:nvSpPr>
-          <p:cNvPr id="11" name="Shape 9"/>
-          <p:cNvSpPr/>
-          <p:nvPr/>
-        </p:nvSpPr>
-        <p:spPr>
-          <a:xfrm>
-            <a:off x="3215640" y="1591056"/>
-            <a:ext cx="2712720" cy="2103120"/>
-          </a:xfrm>
-          <a:prstGeom prst="roundRect">
-            <a:avLst>
-              <a:gd name="adj" fmla="val 4348"/>
+              <a:gd name="adj" fmla="val 13889"/>
             </a:avLst>
           </a:prstGeom>
           <a:solidFill>
@@ -4483,156 +5367,61 @@
       </p:sp>
       <p:sp>
         <p:nvSpPr>
-          <p:cNvPr id="12" name="Text 10"/>
-          <p:cNvSpPr/>
-          <p:nvPr/>
-        </p:nvSpPr>
-        <p:spPr>
-          <a:xfrm>
-            <a:off x="3307080" y="1700784"/>
-            <a:ext cx="2529840" cy="1883664"/>
-          </a:xfrm>
-          <a:prstGeom prst="rect">
-            <a:avLst/>
-          </a:prstGeom>
-          <a:noFill/>
-          <a:ln/>
-        </p:spPr>
-        <p:txBody>
-          <a:bodyPr wrap="square" lIns="0" tIns="0" rIns="0" bIns="0" rtlCol="0" anchor="ctr"/>
-          <a:lstStyle/>
-          <a:p>
-            <a:pPr algn="ctr" indent="0" marL="0">
-              <a:buNone/>
-            </a:pPr>
-            <a:r>
-              <a:rPr lang="en-US" sz="1400" dirty="0">
-                <a:solidFill>
-                  <a:srgbClr val="1E293B"/>
-                </a:solidFill>
-                <a:latin typeface="Calibri" pitchFamily="34" charset="0"/>
-                <a:ea typeface="Calibri" pitchFamily="34" charset="-122"/>
-                <a:cs typeface="Calibri" pitchFamily="34" charset="-120"/>
-              </a:rPr>
-              <a:t>dishes</a:t>
-            </a:r>
-            <a:endParaRPr lang="en-US" sz="1400" dirty="0"/>
-          </a:p>
-          <a:p>
-            <a:pPr algn="ctr" indent="0" marL="0">
-              <a:buNone/>
-            </a:pPr>
-            <a:r>
-              <a:rPr lang="en-US" sz="1400" dirty="0">
-                <a:solidFill>
-                  <a:srgbClr val="1E293B"/>
-                </a:solidFill>
-                <a:latin typeface="Calibri" pitchFamily="34" charset="0"/>
-                <a:ea typeface="Calibri" pitchFamily="34" charset="-122"/>
-                <a:cs typeface="Calibri" pitchFamily="34" charset="-120"/>
-              </a:rPr>
-              <a:t>boxes</a:t>
-            </a:r>
-            <a:endParaRPr lang="en-US" sz="1400" dirty="0"/>
-          </a:p>
-          <a:p>
-            <a:pPr algn="ctr" indent="0" marL="0">
-              <a:buNone/>
-            </a:pPr>
-            <a:r>
-              <a:rPr lang="en-US" sz="1400" dirty="0">
-                <a:solidFill>
-                  <a:srgbClr val="1E293B"/>
-                </a:solidFill>
-                <a:latin typeface="Calibri" pitchFamily="34" charset="0"/>
-                <a:ea typeface="Calibri" pitchFamily="34" charset="-122"/>
-                <a:cs typeface="Calibri" pitchFamily="34" charset="-120"/>
-              </a:rPr>
-              <a:t>wishes</a:t>
-            </a:r>
-            <a:endParaRPr lang="en-US" sz="1400" dirty="0"/>
-          </a:p>
-        </p:txBody>
-      </p:sp>
-      <p:sp>
-        <p:nvSpPr>
-          <p:cNvPr id="13" name="Shape 11"/>
-          <p:cNvSpPr/>
-          <p:nvPr/>
-        </p:nvSpPr>
-        <p:spPr>
-          <a:xfrm>
-            <a:off x="6019800" y="1078992"/>
-            <a:ext cx="2712720" cy="457200"/>
+          <p:cNvPr id="8" name="Text 6"/>
+          <p:cNvSpPr/>
+          <p:nvPr/>
+        </p:nvSpPr>
+        <p:spPr>
+          <a:xfrm>
+            <a:off x="594360" y="1956816"/>
+            <a:ext cx="7863840" cy="402336"/>
+          </a:xfrm>
+          <a:prstGeom prst="rect">
+            <a:avLst/>
+          </a:prstGeom>
+          <a:noFill/>
+          <a:ln/>
+        </p:spPr>
+        <p:txBody>
+          <a:bodyPr wrap="square" lIns="0" tIns="0" rIns="0" bIns="0" rtlCol="0" anchor="ctr"/>
+          <a:lstStyle/>
+          <a:p>
+            <a:pPr indent="0" marL="0">
+              <a:buNone/>
+            </a:pPr>
+            <a:r>
+              <a:rPr lang="en-US" sz="1600" dirty="0">
+                <a:solidFill>
+                  <a:srgbClr val="1E293B"/>
+                </a:solidFill>
+                <a:latin typeface="Calibri" pitchFamily="34" charset="0"/>
+                <a:ea typeface="Calibri" pitchFamily="34" charset="-122"/>
+                <a:cs typeface="Calibri" pitchFamily="34" charset="-120"/>
+              </a:rPr>
+              <a:t>Despereaux hears the music every night.</a:t>
+            </a:r>
+            <a:endParaRPr lang="en-US" sz="1600" dirty="0"/>
+          </a:p>
+        </p:txBody>
+      </p:sp>
+      <p:sp>
+        <p:nvSpPr>
+          <p:cNvPr id="9" name="Shape 7"/>
+          <p:cNvSpPr/>
+          <p:nvPr/>
+        </p:nvSpPr>
+        <p:spPr>
+          <a:xfrm>
+            <a:off x="365760" y="2542032"/>
+            <a:ext cx="8412480" cy="658368"/>
           </a:xfrm>
           <a:prstGeom prst="roundRect">
             <a:avLst>
-              <a:gd name="adj" fmla="val 16000"/>
+              <a:gd name="adj" fmla="val 13889"/>
             </a:avLst>
           </a:prstGeom>
           <a:solidFill>
-            <a:srgbClr val="0E1C42"/>
-          </a:solidFill>
-          <a:ln/>
-        </p:spPr>
-      </p:sp>
-      <p:sp>
-        <p:nvSpPr>
-          <p:cNvPr id="14" name="Text 12"/>
-          <p:cNvSpPr/>
-          <p:nvPr/>
-        </p:nvSpPr>
-        <p:spPr>
-          <a:xfrm>
-            <a:off x="6065520" y="1133856"/>
-            <a:ext cx="2621280" cy="347472"/>
-          </a:xfrm>
-          <a:prstGeom prst="rect">
-            <a:avLst/>
-          </a:prstGeom>
-          <a:noFill/>
-          <a:ln/>
-        </p:spPr>
-        <p:txBody>
-          <a:bodyPr wrap="square" lIns="0" tIns="0" rIns="0" bIns="0" rtlCol="0" anchor="ctr"/>
-          <a:lstStyle/>
-          <a:p>
-            <a:pPr algn="ctr" indent="0" marL="0">
-              <a:buNone/>
-            </a:pPr>
-            <a:r>
-              <a:rPr lang="en-US" sz="1300" b="1" dirty="0">
-                <a:solidFill>
-                  <a:srgbClr val="FFFFFF"/>
-                </a:solidFill>
-                <a:latin typeface="Calibri" pitchFamily="34" charset="0"/>
-                <a:ea typeface="Calibri" pitchFamily="34" charset="-122"/>
-                <a:cs typeface="Calibri" pitchFamily="34" charset="-120"/>
-              </a:rPr>
-              <a:t>y → -ies</a:t>
-            </a:r>
-            <a:endParaRPr lang="en-US" sz="1300" dirty="0"/>
-          </a:p>
-        </p:txBody>
-      </p:sp>
-      <p:sp>
-        <p:nvSpPr>
-          <p:cNvPr id="15" name="Shape 13"/>
-          <p:cNvSpPr/>
-          <p:nvPr/>
-        </p:nvSpPr>
-        <p:spPr>
-          <a:xfrm>
-            <a:off x="6019800" y="1591056"/>
-            <a:ext cx="2712720" cy="2103120"/>
-          </a:xfrm>
-          <a:prstGeom prst="roundRect">
-            <a:avLst>
-              <a:gd name="adj" fmla="val 4348"/>
-            </a:avLst>
-          </a:prstGeom>
-          <a:solidFill>
-            <a:srgbClr val="FFFFFF"/>
+            <a:srgbClr val="FEF6E8"/>
           </a:solidFill>
           <a:ln/>
           <a:effectLst>
@@ -4646,57 +5435,147 @@
       </p:sp>
       <p:sp>
         <p:nvSpPr>
-          <p:cNvPr id="16" name="Text 14"/>
-          <p:cNvSpPr/>
-          <p:nvPr/>
-        </p:nvSpPr>
-        <p:spPr>
-          <a:xfrm>
-            <a:off x="6111240" y="1700784"/>
-            <a:ext cx="2529840" cy="1883664"/>
-          </a:xfrm>
-          <a:prstGeom prst="rect">
-            <a:avLst/>
-          </a:prstGeom>
-          <a:noFill/>
-          <a:ln/>
-        </p:spPr>
-        <p:txBody>
-          <a:bodyPr wrap="square" lIns="0" tIns="0" rIns="0" bIns="0" rtlCol="0" anchor="ctr"/>
-          <a:lstStyle/>
-          <a:p>
-            <a:pPr algn="ctr" indent="0" marL="0">
-              <a:buNone/>
-            </a:pPr>
-            <a:r>
-              <a:rPr lang="en-US" sz="1400" dirty="0">
-                <a:solidFill>
-                  <a:srgbClr val="1E293B"/>
-                </a:solidFill>
-                <a:latin typeface="Calibri" pitchFamily="34" charset="0"/>
-                <a:ea typeface="Calibri" pitchFamily="34" charset="-122"/>
-                <a:cs typeface="Calibri" pitchFamily="34" charset="-120"/>
-              </a:rPr>
-              <a:t>stories</a:t>
-            </a:r>
-            <a:endParaRPr lang="en-US" sz="1400" dirty="0"/>
-          </a:p>
-          <a:p>
-            <a:pPr algn="ctr" indent="0" marL="0">
-              <a:buNone/>
-            </a:pPr>
-            <a:r>
-              <a:rPr lang="en-US" sz="1400" dirty="0">
-                <a:solidFill>
-                  <a:srgbClr val="1E293B"/>
-                </a:solidFill>
-                <a:latin typeface="Calibri" pitchFamily="34" charset="0"/>
-                <a:ea typeface="Calibri" pitchFamily="34" charset="-122"/>
-                <a:cs typeface="Calibri" pitchFamily="34" charset="-120"/>
-              </a:rPr>
-              <a:t>ponies</a:t>
-            </a:r>
-            <a:endParaRPr lang="en-US" sz="1400" dirty="0"/>
+          <p:cNvPr id="10" name="Text 8"/>
+          <p:cNvSpPr/>
+          <p:nvPr/>
+        </p:nvSpPr>
+        <p:spPr>
+          <a:xfrm>
+            <a:off x="594360" y="2688336"/>
+            <a:ext cx="7863840" cy="402336"/>
+          </a:xfrm>
+          <a:prstGeom prst="rect">
+            <a:avLst/>
+          </a:prstGeom>
+          <a:noFill/>
+          <a:ln/>
+        </p:spPr>
+        <p:txBody>
+          <a:bodyPr wrap="square" lIns="0" tIns="0" rIns="0" bIns="0" rtlCol="0" anchor="ctr"/>
+          <a:lstStyle/>
+          <a:p>
+            <a:pPr indent="0" marL="0">
+              <a:buNone/>
+            </a:pPr>
+            <a:r>
+              <a:rPr lang="en-US" sz="1600" dirty="0">
+                <a:solidFill>
+                  <a:srgbClr val="1E293B"/>
+                </a:solidFill>
+                <a:latin typeface="Calibri" pitchFamily="34" charset="0"/>
+                <a:ea typeface="Calibri" pitchFamily="34" charset="-122"/>
+                <a:cs typeface="Calibri" pitchFamily="34" charset="-120"/>
+              </a:rPr>
+              <a:t>The brothers are afraid of the light.</a:t>
+            </a:r>
+            <a:endParaRPr lang="en-US" sz="1600" dirty="0"/>
+          </a:p>
+        </p:txBody>
+      </p:sp>
+      <p:sp>
+        <p:nvSpPr>
+          <p:cNvPr id="11" name="Shape 9"/>
+          <p:cNvSpPr/>
+          <p:nvPr/>
+        </p:nvSpPr>
+        <p:spPr>
+          <a:xfrm>
+            <a:off x="365760" y="3273552"/>
+            <a:ext cx="8412480" cy="658368"/>
+          </a:xfrm>
+          <a:prstGeom prst="roundRect">
+            <a:avLst>
+              <a:gd name="adj" fmla="val 13889"/>
+            </a:avLst>
+          </a:prstGeom>
+          <a:solidFill>
+            <a:srgbClr val="FFFFFF"/>
+          </a:solidFill>
+          <a:ln/>
+          <a:effectLst>
+            <a:outerShdw sx="100000" sy="100000" kx="0" ky="0" algn="bl" rotWithShape="0" blurRad="101600" dist="38100" dir="2700000">
+              <a:srgbClr val="000000">
+                <a:alpha val="12000"/>
+              </a:srgbClr>
+            </a:outerShdw>
+          </a:effectLst>
+        </p:spPr>
+      </p:sp>
+      <p:sp>
+        <p:nvSpPr>
+          <p:cNvPr id="12" name="Text 10"/>
+          <p:cNvSpPr/>
+          <p:nvPr/>
+        </p:nvSpPr>
+        <p:spPr>
+          <a:xfrm>
+            <a:off x="594360" y="3419856"/>
+            <a:ext cx="7863840" cy="402336"/>
+          </a:xfrm>
+          <a:prstGeom prst="rect">
+            <a:avLst/>
+          </a:prstGeom>
+          <a:noFill/>
+          <a:ln/>
+        </p:spPr>
+        <p:txBody>
+          <a:bodyPr wrap="square" lIns="0" tIns="0" rIns="0" bIns="0" rtlCol="0" anchor="ctr"/>
+          <a:lstStyle/>
+          <a:p>
+            <a:pPr indent="0" marL="0">
+              <a:buNone/>
+            </a:pPr>
+            <a:r>
+              <a:rPr lang="en-US" sz="1600" dirty="0">
+                <a:solidFill>
+                  <a:srgbClr val="1E293B"/>
+                </a:solidFill>
+                <a:latin typeface="Calibri" pitchFamily="34" charset="0"/>
+                <a:ea typeface="Calibri" pitchFamily="34" charset="-122"/>
+                <a:cs typeface="Calibri" pitchFamily="34" charset="-120"/>
+              </a:rPr>
+              <a:t>Mig stirs the soup slowly.</a:t>
+            </a:r>
+            <a:endParaRPr lang="en-US" sz="1600" dirty="0"/>
+          </a:p>
+        </p:txBody>
+      </p:sp>
+      <p:sp>
+        <p:nvSpPr>
+          <p:cNvPr id="13" name="Text 11"/>
+          <p:cNvSpPr/>
+          <p:nvPr/>
+        </p:nvSpPr>
+        <p:spPr>
+          <a:xfrm>
+            <a:off x="365760" y="4050792"/>
+            <a:ext cx="8412480" cy="365760"/>
+          </a:xfrm>
+          <a:prstGeom prst="rect">
+            <a:avLst/>
+          </a:prstGeom>
+          <a:noFill/>
+          <a:ln/>
+        </p:spPr>
+        <p:txBody>
+          <a:bodyPr wrap="square" lIns="0" tIns="0" rIns="0" bIns="0" rtlCol="0" anchor="ctr"/>
+          <a:lstStyle/>
+          <a:p>
+            <a:pPr indent="0" marL="0">
+              <a:buNone/>
+            </a:pPr>
+            <a:r>
+              <a:rPr lang="en-US" sz="1500" i="1" dirty="0">
+                <a:solidFill>
+                  <a:srgbClr val="64748B"/>
+                </a:solidFill>
+                <a:latin typeface="Calibri" pitchFamily="34" charset="0"/>
+                <a:ea typeface="Calibri" pitchFamily="34" charset="-122"/>
+                <a:cs typeface="Calibri" pitchFamily="34" charset="-120"/>
+              </a:rPr>
+              <a:t>Your turn. Tap both the subject and the verb that goes with it. The sentence only finishes when you have found the pair.</a:t>
+            </a:r>
+            <a:endParaRPr lang="en-US" sz="1500" dirty="0"/>
           </a:p>
         </p:txBody>
       </p:sp>
@@ -4711,6 +5590,2208 @@
 <file path=ppt/slides/slide15.xml><?xml version="1.0" encoding="utf-8"?>
 <p:sld xmlns:a="http://schemas.openxmlformats.org/drawingml/2006/main" xmlns:r="http://schemas.openxmlformats.org/officeDocument/2006/relationships" xmlns:p="http://schemas.openxmlformats.org/presentationml/2006/main">
   <p:cSld name="Slide 15">
+    <p:bg>
+      <p:bgPr>
+        <a:solidFill>
+          <a:srgbClr val="F8FAFC"/>
+        </a:solidFill>
+      </p:bgPr>
+    </p:bg>
+    <p:spTree>
+      <p:nvGrpSpPr>
+        <p:cNvPr id="1" name=""/>
+        <p:cNvGrpSpPr/>
+        <p:nvPr/>
+      </p:nvGrpSpPr>
+      <p:grpSpPr>
+        <a:xfrm>
+          <a:off x="0" y="0"/>
+          <a:ext cx="0" cy="0"/>
+          <a:chOff x="0" y="0"/>
+          <a:chExt cx="0" cy="0"/>
+        </a:xfrm>
+      </p:grpSpPr>
+      <p:sp>
+        <p:nvSpPr>
+          <p:cNvPr id="2" name="Shape 0"/>
+          <p:cNvSpPr/>
+          <p:nvPr/>
+        </p:nvSpPr>
+        <p:spPr>
+          <a:xfrm>
+            <a:off x="0" y="0"/>
+            <a:ext cx="9144000" cy="566928"/>
+          </a:xfrm>
+          <a:prstGeom prst="rect">
+            <a:avLst/>
+          </a:prstGeom>
+          <a:solidFill>
+            <a:srgbClr val="C7922C"/>
+          </a:solidFill>
+          <a:ln/>
+        </p:spPr>
+      </p:sp>
+      <p:sp>
+        <p:nvSpPr>
+          <p:cNvPr id="3" name="Text 1"/>
+          <p:cNvSpPr/>
+          <p:nvPr/>
+        </p:nvSpPr>
+        <p:spPr>
+          <a:xfrm>
+            <a:off x="365760" y="54864"/>
+            <a:ext cx="8412480" cy="457200"/>
+          </a:xfrm>
+          <a:prstGeom prst="rect">
+            <a:avLst/>
+          </a:prstGeom>
+          <a:noFill/>
+          <a:ln/>
+        </p:spPr>
+        <p:txBody>
+          <a:bodyPr wrap="square" lIns="0" tIns="0" rIns="0" bIns="0" rtlCol="0" anchor="ctr"/>
+          <a:lstStyle/>
+          <a:p>
+            <a:pPr indent="0" marL="0">
+              <a:buNone/>
+            </a:pPr>
+            <a:r>
+              <a:rPr lang="en-US" sz="2200" b="1" dirty="0">
+                <a:solidFill>
+                  <a:srgbClr val="FFFFFF"/>
+                </a:solidFill>
+                <a:latin typeface="Calibri" pitchFamily="34" charset="0"/>
+                <a:ea typeface="Calibri" pitchFamily="34" charset="-122"/>
+                <a:cs typeface="Calibri" pitchFamily="34" charset="-120"/>
+              </a:rPr>
+              <a:t>✏️  Grammar</a:t>
+            </a:r>
+            <a:endParaRPr lang="en-US" sz="2200" dirty="0"/>
+          </a:p>
+        </p:txBody>
+      </p:sp>
+      <p:sp>
+        <p:nvSpPr>
+          <p:cNvPr id="4" name="Text 2"/>
+          <p:cNvSpPr/>
+          <p:nvPr/>
+        </p:nvSpPr>
+        <p:spPr>
+          <a:xfrm>
+            <a:off x="365760" y="777240"/>
+            <a:ext cx="8229600" cy="237744"/>
+          </a:xfrm>
+          <a:prstGeom prst="rect">
+            <a:avLst/>
+          </a:prstGeom>
+          <a:noFill/>
+          <a:ln/>
+        </p:spPr>
+        <p:txBody>
+          <a:bodyPr wrap="square" lIns="0" tIns="0" rIns="0" bIns="0" rtlCol="0" anchor="ctr"/>
+          <a:lstStyle/>
+          <a:p>
+            <a:pPr indent="0" marL="0">
+              <a:buNone/>
+            </a:pPr>
+            <a:r>
+              <a:rPr lang="en-US" sz="1100" b="1" spc="100" kern="0" dirty="0">
+                <a:solidFill>
+                  <a:srgbClr val="C7922C"/>
+                </a:solidFill>
+                <a:latin typeface="Calibri" pitchFamily="34" charset="0"/>
+                <a:ea typeface="Calibri" pitchFamily="34" charset="-122"/>
+                <a:cs typeface="Calibri" pitchFamily="34" charset="-120"/>
+              </a:rPr>
+              <a:t>SUBJECT-VERB AGREEMENT</a:t>
+            </a:r>
+            <a:endParaRPr lang="en-US" sz="1100" dirty="0"/>
+          </a:p>
+        </p:txBody>
+      </p:sp>
+      <p:sp>
+        <p:nvSpPr>
+          <p:cNvPr id="5" name="Shape 3"/>
+          <p:cNvSpPr/>
+          <p:nvPr/>
+        </p:nvSpPr>
+        <p:spPr>
+          <a:xfrm>
+            <a:off x="365760" y="1078992"/>
+            <a:ext cx="8412480" cy="658368"/>
+          </a:xfrm>
+          <a:prstGeom prst="roundRect">
+            <a:avLst>
+              <a:gd name="adj" fmla="val 13889"/>
+            </a:avLst>
+          </a:prstGeom>
+          <a:solidFill>
+            <a:srgbClr val="FEF6E8"/>
+          </a:solidFill>
+          <a:ln/>
+          <a:effectLst>
+            <a:outerShdw sx="100000" sy="100000" kx="0" ky="0" algn="bl" rotWithShape="0" blurRad="101600" dist="38100" dir="2700000">
+              <a:srgbClr val="000000">
+                <a:alpha val="12000"/>
+              </a:srgbClr>
+            </a:outerShdw>
+          </a:effectLst>
+        </p:spPr>
+      </p:sp>
+      <p:sp>
+        <p:nvSpPr>
+          <p:cNvPr id="6" name="Text 4"/>
+          <p:cNvSpPr/>
+          <p:nvPr/>
+        </p:nvSpPr>
+        <p:spPr>
+          <a:xfrm>
+            <a:off x="594360" y="1225296"/>
+            <a:ext cx="7863840" cy="402336"/>
+          </a:xfrm>
+          <a:prstGeom prst="rect">
+            <a:avLst/>
+          </a:prstGeom>
+          <a:noFill/>
+          <a:ln/>
+        </p:spPr>
+        <p:txBody>
+          <a:bodyPr wrap="square" lIns="0" tIns="0" rIns="0" bIns="0" rtlCol="0" anchor="ctr"/>
+          <a:lstStyle/>
+          <a:p>
+            <a:pPr indent="0" marL="0">
+              <a:buNone/>
+            </a:pPr>
+            <a:r>
+              <a:rPr lang="en-US" sz="1600" dirty="0">
+                <a:solidFill>
+                  <a:srgbClr val="1E293B"/>
+                </a:solidFill>
+                <a:latin typeface="Calibri" pitchFamily="34" charset="0"/>
+                <a:ea typeface="Calibri" pitchFamily="34" charset="-122"/>
+                <a:cs typeface="Calibri" pitchFamily="34" charset="-120"/>
+              </a:rPr>
+              <a:t>The </a:t>
+            </a:r>
+            <a:pPr indent="0" marL="0">
+              <a:buNone/>
+            </a:pPr>
+            <a:r>
+              <a:rPr lang="en-US" sz="1600" b="1" dirty="0">
+                <a:solidFill>
+                  <a:srgbClr val="34B76F"/>
+                </a:solidFill>
+                <a:latin typeface="Calibri" pitchFamily="34" charset="0"/>
+                <a:ea typeface="Calibri" pitchFamily="34" charset="-122"/>
+                <a:cs typeface="Calibri" pitchFamily="34" charset="-120"/>
+              </a:rPr>
+              <a:t>mice </a:t>
+            </a:r>
+            <a:pPr indent="0" marL="0">
+              <a:buNone/>
+            </a:pPr>
+            <a:r>
+              <a:rPr lang="en-US" sz="1600" b="1" dirty="0">
+                <a:solidFill>
+                  <a:srgbClr val="34B76F"/>
+                </a:solidFill>
+                <a:latin typeface="Calibri" pitchFamily="34" charset="0"/>
+                <a:ea typeface="Calibri" pitchFamily="34" charset="-122"/>
+                <a:cs typeface="Calibri" pitchFamily="34" charset="-120"/>
+              </a:rPr>
+              <a:t>run </a:t>
+            </a:r>
+            <a:pPr indent="0" marL="0">
+              <a:buNone/>
+            </a:pPr>
+            <a:r>
+              <a:rPr lang="en-US" sz="1600" dirty="0">
+                <a:solidFill>
+                  <a:srgbClr val="1E293B"/>
+                </a:solidFill>
+                <a:latin typeface="Calibri" pitchFamily="34" charset="0"/>
+                <a:ea typeface="Calibri" pitchFamily="34" charset="-122"/>
+                <a:cs typeface="Calibri" pitchFamily="34" charset="-120"/>
+              </a:rPr>
+              <a:t>down </a:t>
+            </a:r>
+            <a:pPr indent="0" marL="0">
+              <a:buNone/>
+            </a:pPr>
+            <a:r>
+              <a:rPr lang="en-US" sz="1600" dirty="0">
+                <a:solidFill>
+                  <a:srgbClr val="1E293B"/>
+                </a:solidFill>
+                <a:latin typeface="Calibri" pitchFamily="34" charset="0"/>
+                <a:ea typeface="Calibri" pitchFamily="34" charset="-122"/>
+                <a:cs typeface="Calibri" pitchFamily="34" charset="-120"/>
+              </a:rPr>
+              <a:t>the </a:t>
+            </a:r>
+            <a:pPr indent="0" marL="0">
+              <a:buNone/>
+            </a:pPr>
+            <a:r>
+              <a:rPr lang="en-US" sz="1600" dirty="0">
+                <a:solidFill>
+                  <a:srgbClr val="1E293B"/>
+                </a:solidFill>
+                <a:latin typeface="Calibri" pitchFamily="34" charset="0"/>
+                <a:ea typeface="Calibri" pitchFamily="34" charset="-122"/>
+                <a:cs typeface="Calibri" pitchFamily="34" charset="-120"/>
+              </a:rPr>
+              <a:t>hall.</a:t>
+            </a:r>
+            <a:endParaRPr lang="en-US" sz="1600" dirty="0"/>
+          </a:p>
+        </p:txBody>
+      </p:sp>
+      <p:sp>
+        <p:nvSpPr>
+          <p:cNvPr id="7" name="Shape 5"/>
+          <p:cNvSpPr/>
+          <p:nvPr/>
+        </p:nvSpPr>
+        <p:spPr>
+          <a:xfrm>
+            <a:off x="365760" y="1810512"/>
+            <a:ext cx="8412480" cy="658368"/>
+          </a:xfrm>
+          <a:prstGeom prst="roundRect">
+            <a:avLst>
+              <a:gd name="adj" fmla="val 13889"/>
+            </a:avLst>
+          </a:prstGeom>
+          <a:solidFill>
+            <a:srgbClr val="FFFFFF"/>
+          </a:solidFill>
+          <a:ln/>
+          <a:effectLst>
+            <a:outerShdw sx="100000" sy="100000" kx="0" ky="0" algn="bl" rotWithShape="0" blurRad="101600" dist="38100" dir="2700000">
+              <a:srgbClr val="000000">
+                <a:alpha val="12000"/>
+              </a:srgbClr>
+            </a:outerShdw>
+          </a:effectLst>
+        </p:spPr>
+      </p:sp>
+      <p:sp>
+        <p:nvSpPr>
+          <p:cNvPr id="8" name="Text 6"/>
+          <p:cNvSpPr/>
+          <p:nvPr/>
+        </p:nvSpPr>
+        <p:spPr>
+          <a:xfrm>
+            <a:off x="594360" y="1956816"/>
+            <a:ext cx="7863840" cy="402336"/>
+          </a:xfrm>
+          <a:prstGeom prst="rect">
+            <a:avLst/>
+          </a:prstGeom>
+          <a:noFill/>
+          <a:ln/>
+        </p:spPr>
+        <p:txBody>
+          <a:bodyPr wrap="square" lIns="0" tIns="0" rIns="0" bIns="0" rtlCol="0" anchor="ctr"/>
+          <a:lstStyle/>
+          <a:p>
+            <a:pPr indent="0" marL="0">
+              <a:buNone/>
+            </a:pPr>
+            <a:r>
+              <a:rPr lang="en-US" sz="1600" b="1" dirty="0">
+                <a:solidFill>
+                  <a:srgbClr val="34B76F"/>
+                </a:solidFill>
+                <a:latin typeface="Calibri" pitchFamily="34" charset="0"/>
+                <a:ea typeface="Calibri" pitchFamily="34" charset="-122"/>
+                <a:cs typeface="Calibri" pitchFamily="34" charset="-120"/>
+              </a:rPr>
+              <a:t>Despereaux </a:t>
+            </a:r>
+            <a:pPr indent="0" marL="0">
+              <a:buNone/>
+            </a:pPr>
+            <a:r>
+              <a:rPr lang="en-US" sz="1600" b="1" dirty="0">
+                <a:solidFill>
+                  <a:srgbClr val="34B76F"/>
+                </a:solidFill>
+                <a:latin typeface="Calibri" pitchFamily="34" charset="0"/>
+                <a:ea typeface="Calibri" pitchFamily="34" charset="-122"/>
+                <a:cs typeface="Calibri" pitchFamily="34" charset="-120"/>
+              </a:rPr>
+              <a:t>hears </a:t>
+            </a:r>
+            <a:pPr indent="0" marL="0">
+              <a:buNone/>
+            </a:pPr>
+            <a:r>
+              <a:rPr lang="en-US" sz="1600" dirty="0">
+                <a:solidFill>
+                  <a:srgbClr val="1E293B"/>
+                </a:solidFill>
+                <a:latin typeface="Calibri" pitchFamily="34" charset="0"/>
+                <a:ea typeface="Calibri" pitchFamily="34" charset="-122"/>
+                <a:cs typeface="Calibri" pitchFamily="34" charset="-120"/>
+              </a:rPr>
+              <a:t>the </a:t>
+            </a:r>
+            <a:pPr indent="0" marL="0">
+              <a:buNone/>
+            </a:pPr>
+            <a:r>
+              <a:rPr lang="en-US" sz="1600" dirty="0">
+                <a:solidFill>
+                  <a:srgbClr val="1E293B"/>
+                </a:solidFill>
+                <a:latin typeface="Calibri" pitchFamily="34" charset="0"/>
+                <a:ea typeface="Calibri" pitchFamily="34" charset="-122"/>
+                <a:cs typeface="Calibri" pitchFamily="34" charset="-120"/>
+              </a:rPr>
+              <a:t>music </a:t>
+            </a:r>
+            <a:pPr indent="0" marL="0">
+              <a:buNone/>
+            </a:pPr>
+            <a:r>
+              <a:rPr lang="en-US" sz="1600" dirty="0">
+                <a:solidFill>
+                  <a:srgbClr val="1E293B"/>
+                </a:solidFill>
+                <a:latin typeface="Calibri" pitchFamily="34" charset="0"/>
+                <a:ea typeface="Calibri" pitchFamily="34" charset="-122"/>
+                <a:cs typeface="Calibri" pitchFamily="34" charset="-120"/>
+              </a:rPr>
+              <a:t>every </a:t>
+            </a:r>
+            <a:pPr indent="0" marL="0">
+              <a:buNone/>
+            </a:pPr>
+            <a:r>
+              <a:rPr lang="en-US" sz="1600" dirty="0">
+                <a:solidFill>
+                  <a:srgbClr val="1E293B"/>
+                </a:solidFill>
+                <a:latin typeface="Calibri" pitchFamily="34" charset="0"/>
+                <a:ea typeface="Calibri" pitchFamily="34" charset="-122"/>
+                <a:cs typeface="Calibri" pitchFamily="34" charset="-120"/>
+              </a:rPr>
+              <a:t>night.</a:t>
+            </a:r>
+            <a:endParaRPr lang="en-US" sz="1600" dirty="0"/>
+          </a:p>
+        </p:txBody>
+      </p:sp>
+      <p:sp>
+        <p:nvSpPr>
+          <p:cNvPr id="9" name="Shape 7"/>
+          <p:cNvSpPr/>
+          <p:nvPr/>
+        </p:nvSpPr>
+        <p:spPr>
+          <a:xfrm>
+            <a:off x="365760" y="2542032"/>
+            <a:ext cx="8412480" cy="658368"/>
+          </a:xfrm>
+          <a:prstGeom prst="roundRect">
+            <a:avLst>
+              <a:gd name="adj" fmla="val 13889"/>
+            </a:avLst>
+          </a:prstGeom>
+          <a:solidFill>
+            <a:srgbClr val="FEF6E8"/>
+          </a:solidFill>
+          <a:ln/>
+          <a:effectLst>
+            <a:outerShdw sx="100000" sy="100000" kx="0" ky="0" algn="bl" rotWithShape="0" blurRad="101600" dist="38100" dir="2700000">
+              <a:srgbClr val="000000">
+                <a:alpha val="12000"/>
+              </a:srgbClr>
+            </a:outerShdw>
+          </a:effectLst>
+        </p:spPr>
+      </p:sp>
+      <p:sp>
+        <p:nvSpPr>
+          <p:cNvPr id="10" name="Text 8"/>
+          <p:cNvSpPr/>
+          <p:nvPr/>
+        </p:nvSpPr>
+        <p:spPr>
+          <a:xfrm>
+            <a:off x="594360" y="2688336"/>
+            <a:ext cx="7863840" cy="402336"/>
+          </a:xfrm>
+          <a:prstGeom prst="rect">
+            <a:avLst/>
+          </a:prstGeom>
+          <a:noFill/>
+          <a:ln/>
+        </p:spPr>
+        <p:txBody>
+          <a:bodyPr wrap="square" lIns="0" tIns="0" rIns="0" bIns="0" rtlCol="0" anchor="ctr"/>
+          <a:lstStyle/>
+          <a:p>
+            <a:pPr indent="0" marL="0">
+              <a:buNone/>
+            </a:pPr>
+            <a:r>
+              <a:rPr lang="en-US" sz="1600" dirty="0">
+                <a:solidFill>
+                  <a:srgbClr val="1E293B"/>
+                </a:solidFill>
+                <a:latin typeface="Calibri" pitchFamily="34" charset="0"/>
+                <a:ea typeface="Calibri" pitchFamily="34" charset="-122"/>
+                <a:cs typeface="Calibri" pitchFamily="34" charset="-120"/>
+              </a:rPr>
+              <a:t>The </a:t>
+            </a:r>
+            <a:pPr indent="0" marL="0">
+              <a:buNone/>
+            </a:pPr>
+            <a:r>
+              <a:rPr lang="en-US" sz="1600" b="1" dirty="0">
+                <a:solidFill>
+                  <a:srgbClr val="34B76F"/>
+                </a:solidFill>
+                <a:latin typeface="Calibri" pitchFamily="34" charset="0"/>
+                <a:ea typeface="Calibri" pitchFamily="34" charset="-122"/>
+                <a:cs typeface="Calibri" pitchFamily="34" charset="-120"/>
+              </a:rPr>
+              <a:t>brothers </a:t>
+            </a:r>
+            <a:pPr indent="0" marL="0">
+              <a:buNone/>
+            </a:pPr>
+            <a:r>
+              <a:rPr lang="en-US" sz="1600" b="1" dirty="0">
+                <a:solidFill>
+                  <a:srgbClr val="34B76F"/>
+                </a:solidFill>
+                <a:latin typeface="Calibri" pitchFamily="34" charset="0"/>
+                <a:ea typeface="Calibri" pitchFamily="34" charset="-122"/>
+                <a:cs typeface="Calibri" pitchFamily="34" charset="-120"/>
+              </a:rPr>
+              <a:t>are </a:t>
+            </a:r>
+            <a:pPr indent="0" marL="0">
+              <a:buNone/>
+            </a:pPr>
+            <a:r>
+              <a:rPr lang="en-US" sz="1600" dirty="0">
+                <a:solidFill>
+                  <a:srgbClr val="1E293B"/>
+                </a:solidFill>
+                <a:latin typeface="Calibri" pitchFamily="34" charset="0"/>
+                <a:ea typeface="Calibri" pitchFamily="34" charset="-122"/>
+                <a:cs typeface="Calibri" pitchFamily="34" charset="-120"/>
+              </a:rPr>
+              <a:t>afraid </a:t>
+            </a:r>
+            <a:pPr indent="0" marL="0">
+              <a:buNone/>
+            </a:pPr>
+            <a:r>
+              <a:rPr lang="en-US" sz="1600" dirty="0">
+                <a:solidFill>
+                  <a:srgbClr val="1E293B"/>
+                </a:solidFill>
+                <a:latin typeface="Calibri" pitchFamily="34" charset="0"/>
+                <a:ea typeface="Calibri" pitchFamily="34" charset="-122"/>
+                <a:cs typeface="Calibri" pitchFamily="34" charset="-120"/>
+              </a:rPr>
+              <a:t>of </a:t>
+            </a:r>
+            <a:pPr indent="0" marL="0">
+              <a:buNone/>
+            </a:pPr>
+            <a:r>
+              <a:rPr lang="en-US" sz="1600" dirty="0">
+                <a:solidFill>
+                  <a:srgbClr val="1E293B"/>
+                </a:solidFill>
+                <a:latin typeface="Calibri" pitchFamily="34" charset="0"/>
+                <a:ea typeface="Calibri" pitchFamily="34" charset="-122"/>
+                <a:cs typeface="Calibri" pitchFamily="34" charset="-120"/>
+              </a:rPr>
+              <a:t>the </a:t>
+            </a:r>
+            <a:pPr indent="0" marL="0">
+              <a:buNone/>
+            </a:pPr>
+            <a:r>
+              <a:rPr lang="en-US" sz="1600" dirty="0">
+                <a:solidFill>
+                  <a:srgbClr val="1E293B"/>
+                </a:solidFill>
+                <a:latin typeface="Calibri" pitchFamily="34" charset="0"/>
+                <a:ea typeface="Calibri" pitchFamily="34" charset="-122"/>
+                <a:cs typeface="Calibri" pitchFamily="34" charset="-120"/>
+              </a:rPr>
+              <a:t>light.</a:t>
+            </a:r>
+            <a:endParaRPr lang="en-US" sz="1600" dirty="0"/>
+          </a:p>
+        </p:txBody>
+      </p:sp>
+      <p:sp>
+        <p:nvSpPr>
+          <p:cNvPr id="11" name="Shape 9"/>
+          <p:cNvSpPr/>
+          <p:nvPr/>
+        </p:nvSpPr>
+        <p:spPr>
+          <a:xfrm>
+            <a:off x="365760" y="3273552"/>
+            <a:ext cx="8412480" cy="658368"/>
+          </a:xfrm>
+          <a:prstGeom prst="roundRect">
+            <a:avLst>
+              <a:gd name="adj" fmla="val 13889"/>
+            </a:avLst>
+          </a:prstGeom>
+          <a:solidFill>
+            <a:srgbClr val="FFFFFF"/>
+          </a:solidFill>
+          <a:ln/>
+          <a:effectLst>
+            <a:outerShdw sx="100000" sy="100000" kx="0" ky="0" algn="bl" rotWithShape="0" blurRad="101600" dist="38100" dir="2700000">
+              <a:srgbClr val="000000">
+                <a:alpha val="12000"/>
+              </a:srgbClr>
+            </a:outerShdw>
+          </a:effectLst>
+        </p:spPr>
+      </p:sp>
+      <p:sp>
+        <p:nvSpPr>
+          <p:cNvPr id="12" name="Text 10"/>
+          <p:cNvSpPr/>
+          <p:nvPr/>
+        </p:nvSpPr>
+        <p:spPr>
+          <a:xfrm>
+            <a:off x="594360" y="3419856"/>
+            <a:ext cx="7863840" cy="402336"/>
+          </a:xfrm>
+          <a:prstGeom prst="rect">
+            <a:avLst/>
+          </a:prstGeom>
+          <a:noFill/>
+          <a:ln/>
+        </p:spPr>
+        <p:txBody>
+          <a:bodyPr wrap="square" lIns="0" tIns="0" rIns="0" bIns="0" rtlCol="0" anchor="ctr"/>
+          <a:lstStyle/>
+          <a:p>
+            <a:pPr indent="0" marL="0">
+              <a:buNone/>
+            </a:pPr>
+            <a:r>
+              <a:rPr lang="en-US" sz="1600" b="1" dirty="0">
+                <a:solidFill>
+                  <a:srgbClr val="34B76F"/>
+                </a:solidFill>
+                <a:latin typeface="Calibri" pitchFamily="34" charset="0"/>
+                <a:ea typeface="Calibri" pitchFamily="34" charset="-122"/>
+                <a:cs typeface="Calibri" pitchFamily="34" charset="-120"/>
+              </a:rPr>
+              <a:t>Mig </a:t>
+            </a:r>
+            <a:pPr indent="0" marL="0">
+              <a:buNone/>
+            </a:pPr>
+            <a:r>
+              <a:rPr lang="en-US" sz="1600" b="1" dirty="0">
+                <a:solidFill>
+                  <a:srgbClr val="34B76F"/>
+                </a:solidFill>
+                <a:latin typeface="Calibri" pitchFamily="34" charset="0"/>
+                <a:ea typeface="Calibri" pitchFamily="34" charset="-122"/>
+                <a:cs typeface="Calibri" pitchFamily="34" charset="-120"/>
+              </a:rPr>
+              <a:t>stirs </a:t>
+            </a:r>
+            <a:pPr indent="0" marL="0">
+              <a:buNone/>
+            </a:pPr>
+            <a:r>
+              <a:rPr lang="en-US" sz="1600" dirty="0">
+                <a:solidFill>
+                  <a:srgbClr val="1E293B"/>
+                </a:solidFill>
+                <a:latin typeface="Calibri" pitchFamily="34" charset="0"/>
+                <a:ea typeface="Calibri" pitchFamily="34" charset="-122"/>
+                <a:cs typeface="Calibri" pitchFamily="34" charset="-120"/>
+              </a:rPr>
+              <a:t>the </a:t>
+            </a:r>
+            <a:pPr indent="0" marL="0">
+              <a:buNone/>
+            </a:pPr>
+            <a:r>
+              <a:rPr lang="en-US" sz="1600" dirty="0">
+                <a:solidFill>
+                  <a:srgbClr val="1E293B"/>
+                </a:solidFill>
+                <a:latin typeface="Calibri" pitchFamily="34" charset="0"/>
+                <a:ea typeface="Calibri" pitchFamily="34" charset="-122"/>
+                <a:cs typeface="Calibri" pitchFamily="34" charset="-120"/>
+              </a:rPr>
+              <a:t>soup </a:t>
+            </a:r>
+            <a:pPr indent="0" marL="0">
+              <a:buNone/>
+            </a:pPr>
+            <a:r>
+              <a:rPr lang="en-US" sz="1600" dirty="0">
+                <a:solidFill>
+                  <a:srgbClr val="1E293B"/>
+                </a:solidFill>
+                <a:latin typeface="Calibri" pitchFamily="34" charset="0"/>
+                <a:ea typeface="Calibri" pitchFamily="34" charset="-122"/>
+                <a:cs typeface="Calibri" pitchFamily="34" charset="-120"/>
+              </a:rPr>
+              <a:t>slowly.</a:t>
+            </a:r>
+            <a:endParaRPr lang="en-US" sz="1600" dirty="0"/>
+          </a:p>
+        </p:txBody>
+      </p:sp>
+      <p:sp>
+        <p:nvSpPr>
+          <p:cNvPr id="13" name="Text 11"/>
+          <p:cNvSpPr/>
+          <p:nvPr/>
+        </p:nvSpPr>
+        <p:spPr>
+          <a:xfrm>
+            <a:off x="365760" y="4050792"/>
+            <a:ext cx="8412480" cy="365760"/>
+          </a:xfrm>
+          <a:prstGeom prst="rect">
+            <a:avLst/>
+          </a:prstGeom>
+          <a:noFill/>
+          <a:ln/>
+        </p:spPr>
+        <p:txBody>
+          <a:bodyPr wrap="square" lIns="0" tIns="0" rIns="0" bIns="0" rtlCol="0" anchor="ctr"/>
+          <a:lstStyle/>
+          <a:p>
+            <a:pPr indent="0" marL="0">
+              <a:buNone/>
+            </a:pPr>
+            <a:r>
+              <a:rPr lang="en-US" sz="1500" b="1" dirty="0">
+                <a:solidFill>
+                  <a:srgbClr val="34B76F"/>
+                </a:solidFill>
+                <a:latin typeface="Calibri" pitchFamily="34" charset="0"/>
+                <a:ea typeface="Calibri" pitchFamily="34" charset="-122"/>
+                <a:cs typeface="Calibri" pitchFamily="34" charset="-120"/>
+              </a:rPr>
+              <a:t>✅  Answers revealed</a:t>
+            </a:r>
+            <a:endParaRPr lang="en-US" sz="1500" dirty="0"/>
+          </a:p>
+        </p:txBody>
+      </p:sp>
+    </p:spTree>
+  </p:cSld>
+  <p:clrMapOvr>
+    <a:masterClrMapping/>
+  </p:clrMapOvr>
+</p:sld>
+</file>
+
+<file path=ppt/slides/slide16.xml><?xml version="1.0" encoding="utf-8"?>
+<p:sld xmlns:a="http://schemas.openxmlformats.org/drawingml/2006/main" xmlns:r="http://schemas.openxmlformats.org/officeDocument/2006/relationships" xmlns:p="http://schemas.openxmlformats.org/presentationml/2006/main">
+  <p:cSld name="Slide 16">
+    <p:bg>
+      <p:bgPr>
+        <a:solidFill>
+          <a:srgbClr val="F8FAFC"/>
+        </a:solidFill>
+      </p:bgPr>
+    </p:bg>
+    <p:spTree>
+      <p:nvGrpSpPr>
+        <p:cNvPr id="1" name=""/>
+        <p:cNvGrpSpPr/>
+        <p:nvPr/>
+      </p:nvGrpSpPr>
+      <p:grpSpPr>
+        <a:xfrm>
+          <a:off x="0" y="0"/>
+          <a:ext cx="0" cy="0"/>
+          <a:chOff x="0" y="0"/>
+          <a:chExt cx="0" cy="0"/>
+        </a:xfrm>
+      </p:grpSpPr>
+      <p:sp>
+        <p:nvSpPr>
+          <p:cNvPr id="2" name="Shape 0"/>
+          <p:cNvSpPr/>
+          <p:nvPr/>
+        </p:nvSpPr>
+        <p:spPr>
+          <a:xfrm>
+            <a:off x="0" y="0"/>
+            <a:ext cx="9144000" cy="566928"/>
+          </a:xfrm>
+          <a:prstGeom prst="rect">
+            <a:avLst/>
+          </a:prstGeom>
+          <a:solidFill>
+            <a:srgbClr val="0E1C42"/>
+          </a:solidFill>
+          <a:ln/>
+        </p:spPr>
+      </p:sp>
+      <p:sp>
+        <p:nvSpPr>
+          <p:cNvPr id="3" name="Text 1"/>
+          <p:cNvSpPr/>
+          <p:nvPr/>
+        </p:nvSpPr>
+        <p:spPr>
+          <a:xfrm>
+            <a:off x="365760" y="54864"/>
+            <a:ext cx="8412480" cy="457200"/>
+          </a:xfrm>
+          <a:prstGeom prst="rect">
+            <a:avLst/>
+          </a:prstGeom>
+          <a:noFill/>
+          <a:ln/>
+        </p:spPr>
+        <p:txBody>
+          <a:bodyPr wrap="square" lIns="0" tIns="0" rIns="0" bIns="0" rtlCol="0" anchor="ctr"/>
+          <a:lstStyle/>
+          <a:p>
+            <a:pPr indent="0" marL="0">
+              <a:buNone/>
+            </a:pPr>
+            <a:r>
+              <a:rPr lang="en-US" sz="2200" b="1" dirty="0">
+                <a:solidFill>
+                  <a:srgbClr val="FFFFFF"/>
+                </a:solidFill>
+                <a:latin typeface="Calibri" pitchFamily="34" charset="0"/>
+                <a:ea typeface="Calibri" pitchFamily="34" charset="-122"/>
+                <a:cs typeface="Calibri" pitchFamily="34" charset="-120"/>
+              </a:rPr>
+              <a:t>🔠  Spelling</a:t>
+            </a:r>
+            <a:endParaRPr lang="en-US" sz="2200" dirty="0"/>
+          </a:p>
+        </p:txBody>
+      </p:sp>
+      <p:sp>
+        <p:nvSpPr>
+          <p:cNvPr id="4" name="Text 2"/>
+          <p:cNvSpPr/>
+          <p:nvPr/>
+        </p:nvSpPr>
+        <p:spPr>
+          <a:xfrm>
+            <a:off x="365760" y="777240"/>
+            <a:ext cx="8229600" cy="237744"/>
+          </a:xfrm>
+          <a:prstGeom prst="rect">
+            <a:avLst/>
+          </a:prstGeom>
+          <a:noFill/>
+          <a:ln/>
+        </p:spPr>
+        <p:txBody>
+          <a:bodyPr wrap="square" lIns="0" tIns="0" rIns="0" bIns="0" rtlCol="0" anchor="ctr"/>
+          <a:lstStyle/>
+          <a:p>
+            <a:pPr indent="0" marL="0">
+              <a:buNone/>
+            </a:pPr>
+            <a:r>
+              <a:rPr lang="en-US" sz="1100" b="1" spc="100" kern="0" dirty="0">
+                <a:solidFill>
+                  <a:srgbClr val="0E1C42"/>
+                </a:solidFill>
+                <a:latin typeface="Calibri" pitchFamily="34" charset="0"/>
+                <a:ea typeface="Calibri" pitchFamily="34" charset="-122"/>
+                <a:cs typeface="Calibri" pitchFamily="34" charset="-120"/>
+              </a:rPr>
+              <a:t>POSSESSIVES VS. PLURALS</a:t>
+            </a:r>
+            <a:endParaRPr lang="en-US" sz="1100" dirty="0"/>
+          </a:p>
+        </p:txBody>
+      </p:sp>
+      <p:sp>
+        <p:nvSpPr>
+          <p:cNvPr id="5" name="Text 3"/>
+          <p:cNvSpPr/>
+          <p:nvPr/>
+        </p:nvSpPr>
+        <p:spPr>
+          <a:xfrm>
+            <a:off x="365760" y="1051560"/>
+            <a:ext cx="8229600" cy="237744"/>
+          </a:xfrm>
+          <a:prstGeom prst="rect">
+            <a:avLst/>
+          </a:prstGeom>
+          <a:noFill/>
+          <a:ln/>
+        </p:spPr>
+        <p:txBody>
+          <a:bodyPr wrap="square" lIns="0" tIns="0" rIns="0" bIns="0" rtlCol="0" anchor="ctr"/>
+          <a:lstStyle/>
+          <a:p>
+            <a:pPr indent="0" marL="0">
+              <a:buNone/>
+            </a:pPr>
+            <a:r>
+              <a:rPr lang="en-US" sz="1100" b="1" spc="100" kern="0" dirty="0">
+                <a:solidFill>
+                  <a:srgbClr val="C7922C"/>
+                </a:solidFill>
+                <a:latin typeface="Calibri" pitchFamily="34" charset="0"/>
+                <a:ea typeface="Calibri" pitchFamily="34" charset="-122"/>
+                <a:cs typeface="Calibri" pitchFamily="34" charset="-120"/>
+              </a:rPr>
+              <a:t>📖  THE RULE</a:t>
+            </a:r>
+            <a:endParaRPr lang="en-US" sz="1100" dirty="0"/>
+          </a:p>
+        </p:txBody>
+      </p:sp>
+      <p:sp>
+        <p:nvSpPr>
+          <p:cNvPr id="6" name="Shape 4"/>
+          <p:cNvSpPr/>
+          <p:nvPr/>
+        </p:nvSpPr>
+        <p:spPr>
+          <a:xfrm>
+            <a:off x="365760" y="1298448"/>
+            <a:ext cx="8412480" cy="960120"/>
+          </a:xfrm>
+          <a:prstGeom prst="roundRect">
+            <a:avLst>
+              <a:gd name="adj" fmla="val 9524"/>
+            </a:avLst>
+          </a:prstGeom>
+          <a:solidFill>
+            <a:srgbClr val="FEF6E8"/>
+          </a:solidFill>
+          <a:ln w="19050">
+            <a:solidFill>
+              <a:srgbClr val="C7922C"/>
+            </a:solidFill>
+            <a:prstDash val="solid"/>
+          </a:ln>
+          <a:effectLst>
+            <a:outerShdw sx="100000" sy="100000" kx="0" ky="0" algn="bl" rotWithShape="0" blurRad="101600" dist="38100" dir="2700000">
+              <a:srgbClr val="000000">
+                <a:alpha val="12000"/>
+              </a:srgbClr>
+            </a:outerShdw>
+          </a:effectLst>
+        </p:spPr>
+      </p:sp>
+      <p:sp>
+        <p:nvSpPr>
+          <p:cNvPr id="7" name="Text 5"/>
+          <p:cNvSpPr/>
+          <p:nvPr/>
+        </p:nvSpPr>
+        <p:spPr>
+          <a:xfrm>
+            <a:off x="594360" y="1426464"/>
+            <a:ext cx="7955280" cy="704088"/>
+          </a:xfrm>
+          <a:prstGeom prst="rect">
+            <a:avLst/>
+          </a:prstGeom>
+          <a:noFill/>
+          <a:ln/>
+        </p:spPr>
+        <p:txBody>
+          <a:bodyPr wrap="square" lIns="0" tIns="0" rIns="0" bIns="0" rtlCol="0" anchor="ctr"/>
+          <a:lstStyle/>
+          <a:p>
+            <a:pPr indent="0" marL="0">
+              <a:buNone/>
+            </a:pPr>
+            <a:r>
+              <a:rPr lang="en-US" sz="1700" dirty="0">
+                <a:solidFill>
+                  <a:srgbClr val="1E293B"/>
+                </a:solidFill>
+                <a:latin typeface="Calibri" pitchFamily="34" charset="0"/>
+                <a:ea typeface="Calibri" pitchFamily="34" charset="-122"/>
+                <a:cs typeface="Calibri" pitchFamily="34" charset="-120"/>
+              </a:rPr>
+              <a:t>Plain -s means more than one: three kings. An apostrophe + s means something belongs to: the king’s crown. If a plural already ends in s, add the apostrophe only: the girls’ room.</a:t>
+            </a:r>
+            <a:endParaRPr lang="en-US" sz="1700" dirty="0"/>
+          </a:p>
+        </p:txBody>
+      </p:sp>
+      <p:sp>
+        <p:nvSpPr>
+          <p:cNvPr id="8" name="Text 6"/>
+          <p:cNvSpPr/>
+          <p:nvPr/>
+        </p:nvSpPr>
+        <p:spPr>
+          <a:xfrm>
+            <a:off x="365760" y="2395728"/>
+            <a:ext cx="8412480" cy="411480"/>
+          </a:xfrm>
+          <a:prstGeom prst="rect">
+            <a:avLst/>
+          </a:prstGeom>
+          <a:noFill/>
+          <a:ln/>
+        </p:spPr>
+        <p:txBody>
+          <a:bodyPr wrap="square" lIns="0" tIns="0" rIns="0" bIns="0" rtlCol="0" anchor="ctr"/>
+          <a:lstStyle/>
+          <a:p>
+            <a:pPr indent="0" marL="0">
+              <a:buNone/>
+            </a:pPr>
+            <a:r>
+              <a:rPr lang="en-US" sz="1400" i="1" dirty="0">
+                <a:solidFill>
+                  <a:srgbClr val="64748B"/>
+                </a:solidFill>
+                <a:latin typeface="Calibri" pitchFamily="34" charset="0"/>
+                <a:ea typeface="Calibri" pitchFamily="34" charset="-122"/>
+                <a:cs typeface="Calibri" pitchFamily="34" charset="-120"/>
+              </a:rPr>
+              <a:t>Sound Detective! Look for the apostrophe. Only one word in each row shows belonging.</a:t>
+            </a:r>
+            <a:endParaRPr lang="en-US" sz="1400" dirty="0"/>
+          </a:p>
+        </p:txBody>
+      </p:sp>
+      <p:sp>
+        <p:nvSpPr>
+          <p:cNvPr id="9" name="Shape 7"/>
+          <p:cNvSpPr/>
+          <p:nvPr/>
+        </p:nvSpPr>
+        <p:spPr>
+          <a:xfrm>
+            <a:off x="365760" y="2852928"/>
+            <a:ext cx="8412480" cy="438912"/>
+          </a:xfrm>
+          <a:prstGeom prst="roundRect">
+            <a:avLst>
+              <a:gd name="adj" fmla="val 20833"/>
+            </a:avLst>
+          </a:prstGeom>
+          <a:solidFill>
+            <a:srgbClr val="F8FAFC"/>
+          </a:solidFill>
+          <a:ln/>
+          <a:effectLst>
+            <a:outerShdw sx="100000" sy="100000" kx="0" ky="0" algn="bl" rotWithShape="0" blurRad="101600" dist="38100" dir="2700000">
+              <a:srgbClr val="000000">
+                <a:alpha val="12000"/>
+              </a:srgbClr>
+            </a:outerShdw>
+          </a:effectLst>
+        </p:spPr>
+      </p:sp>
+      <p:sp>
+        <p:nvSpPr>
+          <p:cNvPr id="10" name="Text 8"/>
+          <p:cNvSpPr/>
+          <p:nvPr/>
+        </p:nvSpPr>
+        <p:spPr>
+          <a:xfrm>
+            <a:off x="594360" y="2916936"/>
+            <a:ext cx="7863840" cy="310896"/>
+          </a:xfrm>
+          <a:prstGeom prst="rect">
+            <a:avLst/>
+          </a:prstGeom>
+          <a:noFill/>
+          <a:ln/>
+        </p:spPr>
+        <p:txBody>
+          <a:bodyPr wrap="square" lIns="0" tIns="0" rIns="0" bIns="0" rtlCol="0" anchor="ctr"/>
+          <a:lstStyle/>
+          <a:p>
+            <a:pPr indent="0" marL="0">
+              <a:buNone/>
+            </a:pPr>
+            <a:r>
+              <a:rPr lang="en-US" sz="1500" dirty="0">
+                <a:solidFill>
+                  <a:srgbClr val="1E293B"/>
+                </a:solidFill>
+                <a:latin typeface="Calibri" pitchFamily="34" charset="0"/>
+                <a:ea typeface="Calibri" pitchFamily="34" charset="-122"/>
+                <a:cs typeface="Calibri" pitchFamily="34" charset="-120"/>
+              </a:rPr>
+              <a:t>Stanley’s     ·     </a:t>
+            </a:r>
+            <a:pPr indent="0" marL="0">
+              <a:buNone/>
+            </a:pPr>
+            <a:r>
+              <a:rPr lang="en-US" sz="1500" dirty="0">
+                <a:solidFill>
+                  <a:srgbClr val="1E293B"/>
+                </a:solidFill>
+                <a:latin typeface="Calibri" pitchFamily="34" charset="0"/>
+                <a:ea typeface="Calibri" pitchFamily="34" charset="-122"/>
+                <a:cs typeface="Calibri" pitchFamily="34" charset="-120"/>
+              </a:rPr>
+              <a:t>brothers     ·     </a:t>
+            </a:r>
+            <a:pPr indent="0" marL="0">
+              <a:buNone/>
+            </a:pPr>
+            <a:r>
+              <a:rPr lang="en-US" sz="1500" dirty="0">
+                <a:solidFill>
+                  <a:srgbClr val="1E293B"/>
+                </a:solidFill>
+                <a:latin typeface="Calibri" pitchFamily="34" charset="0"/>
+                <a:ea typeface="Calibri" pitchFamily="34" charset="-122"/>
+                <a:cs typeface="Calibri" pitchFamily="34" charset="-120"/>
+              </a:rPr>
+              <a:t>letters     ·     </a:t>
+            </a:r>
+            <a:pPr indent="0" marL="0">
+              <a:buNone/>
+            </a:pPr>
+            <a:r>
+              <a:rPr lang="en-US" sz="1500" dirty="0">
+                <a:solidFill>
+                  <a:srgbClr val="1E293B"/>
+                </a:solidFill>
+                <a:latin typeface="Calibri" pitchFamily="34" charset="0"/>
+                <a:ea typeface="Calibri" pitchFamily="34" charset="-122"/>
+                <a:cs typeface="Calibri" pitchFamily="34" charset="-120"/>
+              </a:rPr>
+              <a:t>maps</a:t>
+            </a:r>
+            <a:endParaRPr lang="en-US" sz="1500" dirty="0"/>
+          </a:p>
+        </p:txBody>
+      </p:sp>
+      <p:sp>
+        <p:nvSpPr>
+          <p:cNvPr id="11" name="Shape 9"/>
+          <p:cNvSpPr/>
+          <p:nvPr/>
+        </p:nvSpPr>
+        <p:spPr>
+          <a:xfrm>
+            <a:off x="365760" y="3337560"/>
+            <a:ext cx="8412480" cy="438912"/>
+          </a:xfrm>
+          <a:prstGeom prst="roundRect">
+            <a:avLst>
+              <a:gd name="adj" fmla="val 20833"/>
+            </a:avLst>
+          </a:prstGeom>
+          <a:solidFill>
+            <a:srgbClr val="FFFFFF"/>
+          </a:solidFill>
+          <a:ln/>
+          <a:effectLst>
+            <a:outerShdw sx="100000" sy="100000" kx="0" ky="0" algn="bl" rotWithShape="0" blurRad="101600" dist="38100" dir="2700000">
+              <a:srgbClr val="000000">
+                <a:alpha val="12000"/>
+              </a:srgbClr>
+            </a:outerShdw>
+          </a:effectLst>
+        </p:spPr>
+      </p:sp>
+      <p:sp>
+        <p:nvSpPr>
+          <p:cNvPr id="12" name="Text 10"/>
+          <p:cNvSpPr/>
+          <p:nvPr/>
+        </p:nvSpPr>
+        <p:spPr>
+          <a:xfrm>
+            <a:off x="594360" y="3401568"/>
+            <a:ext cx="7863840" cy="310896"/>
+          </a:xfrm>
+          <a:prstGeom prst="rect">
+            <a:avLst/>
+          </a:prstGeom>
+          <a:noFill/>
+          <a:ln/>
+        </p:spPr>
+        <p:txBody>
+          <a:bodyPr wrap="square" lIns="0" tIns="0" rIns="0" bIns="0" rtlCol="0" anchor="ctr"/>
+          <a:lstStyle/>
+          <a:p>
+            <a:pPr indent="0" marL="0">
+              <a:buNone/>
+            </a:pPr>
+            <a:r>
+              <a:rPr lang="en-US" sz="1500" dirty="0">
+                <a:solidFill>
+                  <a:srgbClr val="1E293B"/>
+                </a:solidFill>
+                <a:latin typeface="Calibri" pitchFamily="34" charset="0"/>
+                <a:ea typeface="Calibri" pitchFamily="34" charset="-122"/>
+                <a:cs typeface="Calibri" pitchFamily="34" charset="-120"/>
+              </a:rPr>
+              <a:t>mice     ·     </a:t>
+            </a:r>
+            <a:pPr indent="0" marL="0">
+              <a:buNone/>
+            </a:pPr>
+            <a:r>
+              <a:rPr lang="en-US" sz="1500" dirty="0">
+                <a:solidFill>
+                  <a:srgbClr val="1E293B"/>
+                </a:solidFill>
+                <a:latin typeface="Calibri" pitchFamily="34" charset="0"/>
+                <a:ea typeface="Calibri" pitchFamily="34" charset="-122"/>
+                <a:cs typeface="Calibri" pitchFamily="34" charset="-120"/>
+              </a:rPr>
+              <a:t>mouse’s     ·     </a:t>
+            </a:r>
+            <a:pPr indent="0" marL="0">
+              <a:buNone/>
+            </a:pPr>
+            <a:r>
+              <a:rPr lang="en-US" sz="1500" dirty="0">
+                <a:solidFill>
+                  <a:srgbClr val="1E293B"/>
+                </a:solidFill>
+                <a:latin typeface="Calibri" pitchFamily="34" charset="0"/>
+                <a:ea typeface="Calibri" pitchFamily="34" charset="-122"/>
+                <a:cs typeface="Calibri" pitchFamily="34" charset="-120"/>
+              </a:rPr>
+              <a:t>houses     ·     </a:t>
+            </a:r>
+            <a:pPr indent="0" marL="0">
+              <a:buNone/>
+            </a:pPr>
+            <a:r>
+              <a:rPr lang="en-US" sz="1500" dirty="0">
+                <a:solidFill>
+                  <a:srgbClr val="1E293B"/>
+                </a:solidFill>
+                <a:latin typeface="Calibri" pitchFamily="34" charset="0"/>
+                <a:ea typeface="Calibri" pitchFamily="34" charset="-122"/>
+                <a:cs typeface="Calibri" pitchFamily="34" charset="-120"/>
+              </a:rPr>
+              <a:t>boxes</a:t>
+            </a:r>
+            <a:endParaRPr lang="en-US" sz="1500" dirty="0"/>
+          </a:p>
+        </p:txBody>
+      </p:sp>
+      <p:sp>
+        <p:nvSpPr>
+          <p:cNvPr id="13" name="Shape 11"/>
+          <p:cNvSpPr/>
+          <p:nvPr/>
+        </p:nvSpPr>
+        <p:spPr>
+          <a:xfrm>
+            <a:off x="365760" y="3822192"/>
+            <a:ext cx="8412480" cy="438912"/>
+          </a:xfrm>
+          <a:prstGeom prst="roundRect">
+            <a:avLst>
+              <a:gd name="adj" fmla="val 20833"/>
+            </a:avLst>
+          </a:prstGeom>
+          <a:solidFill>
+            <a:srgbClr val="F8FAFC"/>
+          </a:solidFill>
+          <a:ln/>
+          <a:effectLst>
+            <a:outerShdw sx="100000" sy="100000" kx="0" ky="0" algn="bl" rotWithShape="0" blurRad="101600" dist="38100" dir="2700000">
+              <a:srgbClr val="000000">
+                <a:alpha val="12000"/>
+              </a:srgbClr>
+            </a:outerShdw>
+          </a:effectLst>
+        </p:spPr>
+      </p:sp>
+      <p:sp>
+        <p:nvSpPr>
+          <p:cNvPr id="14" name="Text 12"/>
+          <p:cNvSpPr/>
+          <p:nvPr/>
+        </p:nvSpPr>
+        <p:spPr>
+          <a:xfrm>
+            <a:off x="594360" y="3886200"/>
+            <a:ext cx="7863840" cy="310896"/>
+          </a:xfrm>
+          <a:prstGeom prst="rect">
+            <a:avLst/>
+          </a:prstGeom>
+          <a:noFill/>
+          <a:ln/>
+        </p:spPr>
+        <p:txBody>
+          <a:bodyPr wrap="square" lIns="0" tIns="0" rIns="0" bIns="0" rtlCol="0" anchor="ctr"/>
+          <a:lstStyle/>
+          <a:p>
+            <a:pPr indent="0" marL="0">
+              <a:buNone/>
+            </a:pPr>
+            <a:r>
+              <a:rPr lang="en-US" sz="1500" dirty="0">
+                <a:solidFill>
+                  <a:srgbClr val="1E293B"/>
+                </a:solidFill>
+                <a:latin typeface="Calibri" pitchFamily="34" charset="0"/>
+                <a:ea typeface="Calibri" pitchFamily="34" charset="-122"/>
+                <a:cs typeface="Calibri" pitchFamily="34" charset="-120"/>
+              </a:rPr>
+              <a:t>kings     ·     </a:t>
+            </a:r>
+            <a:pPr indent="0" marL="0">
+              <a:buNone/>
+            </a:pPr>
+            <a:r>
+              <a:rPr lang="en-US" sz="1500" dirty="0">
+                <a:solidFill>
+                  <a:srgbClr val="1E293B"/>
+                </a:solidFill>
+                <a:latin typeface="Calibri" pitchFamily="34" charset="0"/>
+                <a:ea typeface="Calibri" pitchFamily="34" charset="-122"/>
+                <a:cs typeface="Calibri" pitchFamily="34" charset="-120"/>
+              </a:rPr>
+              <a:t>rings     ·     </a:t>
+            </a:r>
+            <a:pPr indent="0" marL="0">
+              <a:buNone/>
+            </a:pPr>
+            <a:r>
+              <a:rPr lang="en-US" sz="1500" dirty="0">
+                <a:solidFill>
+                  <a:srgbClr val="1E293B"/>
+                </a:solidFill>
+                <a:latin typeface="Calibri" pitchFamily="34" charset="0"/>
+                <a:ea typeface="Calibri" pitchFamily="34" charset="-122"/>
+                <a:cs typeface="Calibri" pitchFamily="34" charset="-120"/>
+              </a:rPr>
+              <a:t>king’s     ·     </a:t>
+            </a:r>
+            <a:pPr indent="0" marL="0">
+              <a:buNone/>
+            </a:pPr>
+            <a:r>
+              <a:rPr lang="en-US" sz="1500" dirty="0">
+                <a:solidFill>
+                  <a:srgbClr val="1E293B"/>
+                </a:solidFill>
+                <a:latin typeface="Calibri" pitchFamily="34" charset="0"/>
+                <a:ea typeface="Calibri" pitchFamily="34" charset="-122"/>
+                <a:cs typeface="Calibri" pitchFamily="34" charset="-120"/>
+              </a:rPr>
+              <a:t>wings</a:t>
+            </a:r>
+            <a:endParaRPr lang="en-US" sz="1500" dirty="0"/>
+          </a:p>
+        </p:txBody>
+      </p:sp>
+      <p:sp>
+        <p:nvSpPr>
+          <p:cNvPr id="15" name="Shape 13"/>
+          <p:cNvSpPr/>
+          <p:nvPr/>
+        </p:nvSpPr>
+        <p:spPr>
+          <a:xfrm>
+            <a:off x="365760" y="4306824"/>
+            <a:ext cx="8412480" cy="438912"/>
+          </a:xfrm>
+          <a:prstGeom prst="roundRect">
+            <a:avLst>
+              <a:gd name="adj" fmla="val 20833"/>
+            </a:avLst>
+          </a:prstGeom>
+          <a:solidFill>
+            <a:srgbClr val="FFFFFF"/>
+          </a:solidFill>
+          <a:ln/>
+          <a:effectLst>
+            <a:outerShdw sx="100000" sy="100000" kx="0" ky="0" algn="bl" rotWithShape="0" blurRad="101600" dist="38100" dir="2700000">
+              <a:srgbClr val="000000">
+                <a:alpha val="12000"/>
+              </a:srgbClr>
+            </a:outerShdw>
+          </a:effectLst>
+        </p:spPr>
+      </p:sp>
+      <p:sp>
+        <p:nvSpPr>
+          <p:cNvPr id="16" name="Text 14"/>
+          <p:cNvSpPr/>
+          <p:nvPr/>
+        </p:nvSpPr>
+        <p:spPr>
+          <a:xfrm>
+            <a:off x="594360" y="4370832"/>
+            <a:ext cx="7863840" cy="310896"/>
+          </a:xfrm>
+          <a:prstGeom prst="rect">
+            <a:avLst/>
+          </a:prstGeom>
+          <a:noFill/>
+          <a:ln/>
+        </p:spPr>
+        <p:txBody>
+          <a:bodyPr wrap="square" lIns="0" tIns="0" rIns="0" bIns="0" rtlCol="0" anchor="ctr"/>
+          <a:lstStyle/>
+          <a:p>
+            <a:pPr indent="0" marL="0">
+              <a:buNone/>
+            </a:pPr>
+            <a:r>
+              <a:rPr lang="en-US" sz="1500" dirty="0">
+                <a:solidFill>
+                  <a:srgbClr val="1E293B"/>
+                </a:solidFill>
+                <a:latin typeface="Calibri" pitchFamily="34" charset="0"/>
+                <a:ea typeface="Calibri" pitchFamily="34" charset="-122"/>
+                <a:cs typeface="Calibri" pitchFamily="34" charset="-120"/>
+              </a:rPr>
+              <a:t>princesses     ·     </a:t>
+            </a:r>
+            <a:pPr indent="0" marL="0">
+              <a:buNone/>
+            </a:pPr>
+            <a:r>
+              <a:rPr lang="en-US" sz="1500" dirty="0">
+                <a:solidFill>
+                  <a:srgbClr val="1E293B"/>
+                </a:solidFill>
+                <a:latin typeface="Calibri" pitchFamily="34" charset="0"/>
+                <a:ea typeface="Calibri" pitchFamily="34" charset="-122"/>
+                <a:cs typeface="Calibri" pitchFamily="34" charset="-120"/>
+              </a:rPr>
+              <a:t>dresses     ·     </a:t>
+            </a:r>
+            <a:pPr indent="0" marL="0">
+              <a:buNone/>
+            </a:pPr>
+            <a:r>
+              <a:rPr lang="en-US" sz="1500" dirty="0">
+                <a:solidFill>
+                  <a:srgbClr val="1E293B"/>
+                </a:solidFill>
+                <a:latin typeface="Calibri" pitchFamily="34" charset="0"/>
+                <a:ea typeface="Calibri" pitchFamily="34" charset="-122"/>
+                <a:cs typeface="Calibri" pitchFamily="34" charset="-120"/>
+              </a:rPr>
+              <a:t>glasses     ·     </a:t>
+            </a:r>
+            <a:pPr indent="0" marL="0">
+              <a:buNone/>
+            </a:pPr>
+            <a:r>
+              <a:rPr lang="en-US" sz="1500" dirty="0">
+                <a:solidFill>
+                  <a:srgbClr val="1E293B"/>
+                </a:solidFill>
+                <a:latin typeface="Calibri" pitchFamily="34" charset="0"/>
+                <a:ea typeface="Calibri" pitchFamily="34" charset="-122"/>
+                <a:cs typeface="Calibri" pitchFamily="34" charset="-120"/>
+              </a:rPr>
+              <a:t>princess’s</a:t>
+            </a:r>
+            <a:endParaRPr lang="en-US" sz="1500" dirty="0"/>
+          </a:p>
+        </p:txBody>
+      </p:sp>
+    </p:spTree>
+  </p:cSld>
+  <p:clrMapOvr>
+    <a:masterClrMapping/>
+  </p:clrMapOvr>
+</p:sld>
+</file>
+
+<file path=ppt/slides/slide17.xml><?xml version="1.0" encoding="utf-8"?>
+<p:sld xmlns:a="http://schemas.openxmlformats.org/drawingml/2006/main" xmlns:r="http://schemas.openxmlformats.org/officeDocument/2006/relationships" xmlns:p="http://schemas.openxmlformats.org/presentationml/2006/main">
+  <p:cSld name="Slide 17">
+    <p:bg>
+      <p:bgPr>
+        <a:solidFill>
+          <a:srgbClr val="F8FAFC"/>
+        </a:solidFill>
+      </p:bgPr>
+    </p:bg>
+    <p:spTree>
+      <p:nvGrpSpPr>
+        <p:cNvPr id="1" name=""/>
+        <p:cNvGrpSpPr/>
+        <p:nvPr/>
+      </p:nvGrpSpPr>
+      <p:grpSpPr>
+        <a:xfrm>
+          <a:off x="0" y="0"/>
+          <a:ext cx="0" cy="0"/>
+          <a:chOff x="0" y="0"/>
+          <a:chExt cx="0" cy="0"/>
+        </a:xfrm>
+      </p:grpSpPr>
+      <p:sp>
+        <p:nvSpPr>
+          <p:cNvPr id="2" name="Shape 0"/>
+          <p:cNvSpPr/>
+          <p:nvPr/>
+        </p:nvSpPr>
+        <p:spPr>
+          <a:xfrm>
+            <a:off x="0" y="0"/>
+            <a:ext cx="9144000" cy="566928"/>
+          </a:xfrm>
+          <a:prstGeom prst="rect">
+            <a:avLst/>
+          </a:prstGeom>
+          <a:solidFill>
+            <a:srgbClr val="0E1C42"/>
+          </a:solidFill>
+          <a:ln/>
+        </p:spPr>
+      </p:sp>
+      <p:sp>
+        <p:nvSpPr>
+          <p:cNvPr id="3" name="Text 1"/>
+          <p:cNvSpPr/>
+          <p:nvPr/>
+        </p:nvSpPr>
+        <p:spPr>
+          <a:xfrm>
+            <a:off x="365760" y="54864"/>
+            <a:ext cx="8412480" cy="457200"/>
+          </a:xfrm>
+          <a:prstGeom prst="rect">
+            <a:avLst/>
+          </a:prstGeom>
+          <a:noFill/>
+          <a:ln/>
+        </p:spPr>
+        <p:txBody>
+          <a:bodyPr wrap="square" lIns="0" tIns="0" rIns="0" bIns="0" rtlCol="0" anchor="ctr"/>
+          <a:lstStyle/>
+          <a:p>
+            <a:pPr indent="0" marL="0">
+              <a:buNone/>
+            </a:pPr>
+            <a:r>
+              <a:rPr lang="en-US" sz="2200" b="1" dirty="0">
+                <a:solidFill>
+                  <a:srgbClr val="FFFFFF"/>
+                </a:solidFill>
+                <a:latin typeface="Calibri" pitchFamily="34" charset="0"/>
+                <a:ea typeface="Calibri" pitchFamily="34" charset="-122"/>
+                <a:cs typeface="Calibri" pitchFamily="34" charset="-120"/>
+              </a:rPr>
+              <a:t>🔠  Spelling</a:t>
+            </a:r>
+            <a:endParaRPr lang="en-US" sz="2200" dirty="0"/>
+          </a:p>
+        </p:txBody>
+      </p:sp>
+      <p:sp>
+        <p:nvSpPr>
+          <p:cNvPr id="4" name="Text 2"/>
+          <p:cNvSpPr/>
+          <p:nvPr/>
+        </p:nvSpPr>
+        <p:spPr>
+          <a:xfrm>
+            <a:off x="365760" y="777240"/>
+            <a:ext cx="8229600" cy="237744"/>
+          </a:xfrm>
+          <a:prstGeom prst="rect">
+            <a:avLst/>
+          </a:prstGeom>
+          <a:noFill/>
+          <a:ln/>
+        </p:spPr>
+        <p:txBody>
+          <a:bodyPr wrap="square" lIns="0" tIns="0" rIns="0" bIns="0" rtlCol="0" anchor="ctr"/>
+          <a:lstStyle/>
+          <a:p>
+            <a:pPr indent="0" marL="0">
+              <a:buNone/>
+            </a:pPr>
+            <a:r>
+              <a:rPr lang="en-US" sz="1100" b="1" spc="100" kern="0" dirty="0">
+                <a:solidFill>
+                  <a:srgbClr val="0E1C42"/>
+                </a:solidFill>
+                <a:latin typeface="Calibri" pitchFamily="34" charset="0"/>
+                <a:ea typeface="Calibri" pitchFamily="34" charset="-122"/>
+                <a:cs typeface="Calibri" pitchFamily="34" charset="-120"/>
+              </a:rPr>
+              <a:t>POSSESSIVES VS. PLURALS</a:t>
+            </a:r>
+            <a:endParaRPr lang="en-US" sz="1100" dirty="0"/>
+          </a:p>
+        </p:txBody>
+      </p:sp>
+      <p:sp>
+        <p:nvSpPr>
+          <p:cNvPr id="5" name="Text 3"/>
+          <p:cNvSpPr/>
+          <p:nvPr/>
+        </p:nvSpPr>
+        <p:spPr>
+          <a:xfrm>
+            <a:off x="365760" y="1051560"/>
+            <a:ext cx="8229600" cy="237744"/>
+          </a:xfrm>
+          <a:prstGeom prst="rect">
+            <a:avLst/>
+          </a:prstGeom>
+          <a:noFill/>
+          <a:ln/>
+        </p:spPr>
+        <p:txBody>
+          <a:bodyPr wrap="square" lIns="0" tIns="0" rIns="0" bIns="0" rtlCol="0" anchor="ctr"/>
+          <a:lstStyle/>
+          <a:p>
+            <a:pPr indent="0" marL="0">
+              <a:buNone/>
+            </a:pPr>
+            <a:r>
+              <a:rPr lang="en-US" sz="1100" b="1" spc="100" kern="0" dirty="0">
+                <a:solidFill>
+                  <a:srgbClr val="C7922C"/>
+                </a:solidFill>
+                <a:latin typeface="Calibri" pitchFamily="34" charset="0"/>
+                <a:ea typeface="Calibri" pitchFamily="34" charset="-122"/>
+                <a:cs typeface="Calibri" pitchFamily="34" charset="-120"/>
+              </a:rPr>
+              <a:t>📖  THE RULE</a:t>
+            </a:r>
+            <a:endParaRPr lang="en-US" sz="1100" dirty="0"/>
+          </a:p>
+        </p:txBody>
+      </p:sp>
+      <p:sp>
+        <p:nvSpPr>
+          <p:cNvPr id="6" name="Shape 4"/>
+          <p:cNvSpPr/>
+          <p:nvPr/>
+        </p:nvSpPr>
+        <p:spPr>
+          <a:xfrm>
+            <a:off x="365760" y="1298448"/>
+            <a:ext cx="8412480" cy="960120"/>
+          </a:xfrm>
+          <a:prstGeom prst="roundRect">
+            <a:avLst>
+              <a:gd name="adj" fmla="val 9524"/>
+            </a:avLst>
+          </a:prstGeom>
+          <a:solidFill>
+            <a:srgbClr val="FEF6E8"/>
+          </a:solidFill>
+          <a:ln w="19050">
+            <a:solidFill>
+              <a:srgbClr val="C7922C"/>
+            </a:solidFill>
+            <a:prstDash val="solid"/>
+          </a:ln>
+          <a:effectLst>
+            <a:outerShdw sx="100000" sy="100000" kx="0" ky="0" algn="bl" rotWithShape="0" blurRad="101600" dist="38100" dir="2700000">
+              <a:srgbClr val="000000">
+                <a:alpha val="12000"/>
+              </a:srgbClr>
+            </a:outerShdw>
+          </a:effectLst>
+        </p:spPr>
+      </p:sp>
+      <p:sp>
+        <p:nvSpPr>
+          <p:cNvPr id="7" name="Text 5"/>
+          <p:cNvSpPr/>
+          <p:nvPr/>
+        </p:nvSpPr>
+        <p:spPr>
+          <a:xfrm>
+            <a:off x="594360" y="1426464"/>
+            <a:ext cx="7955280" cy="704088"/>
+          </a:xfrm>
+          <a:prstGeom prst="rect">
+            <a:avLst/>
+          </a:prstGeom>
+          <a:noFill/>
+          <a:ln/>
+        </p:spPr>
+        <p:txBody>
+          <a:bodyPr wrap="square" lIns="0" tIns="0" rIns="0" bIns="0" rtlCol="0" anchor="ctr"/>
+          <a:lstStyle/>
+          <a:p>
+            <a:pPr indent="0" marL="0">
+              <a:buNone/>
+            </a:pPr>
+            <a:r>
+              <a:rPr lang="en-US" sz="1700" dirty="0">
+                <a:solidFill>
+                  <a:srgbClr val="1E293B"/>
+                </a:solidFill>
+                <a:latin typeface="Calibri" pitchFamily="34" charset="0"/>
+                <a:ea typeface="Calibri" pitchFamily="34" charset="-122"/>
+                <a:cs typeface="Calibri" pitchFamily="34" charset="-120"/>
+              </a:rPr>
+              <a:t>Plain -s means more than one: three kings. An apostrophe + s means something belongs to: the king’s crown. If a plural already ends in s, add the apostrophe only: the girls’ room.</a:t>
+            </a:r>
+            <a:endParaRPr lang="en-US" sz="1700" dirty="0"/>
+          </a:p>
+        </p:txBody>
+      </p:sp>
+      <p:sp>
+        <p:nvSpPr>
+          <p:cNvPr id="8" name="Text 6"/>
+          <p:cNvSpPr/>
+          <p:nvPr/>
+        </p:nvSpPr>
+        <p:spPr>
+          <a:xfrm>
+            <a:off x="365760" y="2395728"/>
+            <a:ext cx="8412480" cy="411480"/>
+          </a:xfrm>
+          <a:prstGeom prst="rect">
+            <a:avLst/>
+          </a:prstGeom>
+          <a:noFill/>
+          <a:ln/>
+        </p:spPr>
+        <p:txBody>
+          <a:bodyPr wrap="square" lIns="0" tIns="0" rIns="0" bIns="0" rtlCol="0" anchor="ctr"/>
+          <a:lstStyle/>
+          <a:p>
+            <a:pPr indent="0" marL="0">
+              <a:buNone/>
+            </a:pPr>
+            <a:r>
+              <a:rPr lang="en-US" sz="1400" i="1" dirty="0">
+                <a:solidFill>
+                  <a:srgbClr val="64748B"/>
+                </a:solidFill>
+                <a:latin typeface="Calibri" pitchFamily="34" charset="0"/>
+                <a:ea typeface="Calibri" pitchFamily="34" charset="-122"/>
+                <a:cs typeface="Calibri" pitchFamily="34" charset="-120"/>
+              </a:rPr>
+              <a:t>Sound Detective! Look for the apostrophe. Only one word in each row shows belonging.</a:t>
+            </a:r>
+            <a:endParaRPr lang="en-US" sz="1400" dirty="0"/>
+          </a:p>
+        </p:txBody>
+      </p:sp>
+      <p:sp>
+        <p:nvSpPr>
+          <p:cNvPr id="9" name="Shape 7"/>
+          <p:cNvSpPr/>
+          <p:nvPr/>
+        </p:nvSpPr>
+        <p:spPr>
+          <a:xfrm>
+            <a:off x="365760" y="2852928"/>
+            <a:ext cx="8412480" cy="438912"/>
+          </a:xfrm>
+          <a:prstGeom prst="roundRect">
+            <a:avLst>
+              <a:gd name="adj" fmla="val 20833"/>
+            </a:avLst>
+          </a:prstGeom>
+          <a:solidFill>
+            <a:srgbClr val="F8FAFC"/>
+          </a:solidFill>
+          <a:ln/>
+          <a:effectLst>
+            <a:outerShdw sx="100000" sy="100000" kx="0" ky="0" algn="bl" rotWithShape="0" blurRad="101600" dist="38100" dir="2700000">
+              <a:srgbClr val="000000">
+                <a:alpha val="12000"/>
+              </a:srgbClr>
+            </a:outerShdw>
+          </a:effectLst>
+        </p:spPr>
+      </p:sp>
+      <p:sp>
+        <p:nvSpPr>
+          <p:cNvPr id="10" name="Text 8"/>
+          <p:cNvSpPr/>
+          <p:nvPr/>
+        </p:nvSpPr>
+        <p:spPr>
+          <a:xfrm>
+            <a:off x="594360" y="2916936"/>
+            <a:ext cx="7863840" cy="310896"/>
+          </a:xfrm>
+          <a:prstGeom prst="rect">
+            <a:avLst/>
+          </a:prstGeom>
+          <a:noFill/>
+          <a:ln/>
+        </p:spPr>
+        <p:txBody>
+          <a:bodyPr wrap="square" lIns="0" tIns="0" rIns="0" bIns="0" rtlCol="0" anchor="ctr"/>
+          <a:lstStyle/>
+          <a:p>
+            <a:pPr indent="0" marL="0">
+              <a:buNone/>
+            </a:pPr>
+            <a:r>
+              <a:rPr lang="en-US" sz="1500" b="1" dirty="0">
+                <a:solidFill>
+                  <a:srgbClr val="34B76F"/>
+                </a:solidFill>
+                <a:latin typeface="Calibri" pitchFamily="34" charset="0"/>
+                <a:ea typeface="Calibri" pitchFamily="34" charset="-122"/>
+                <a:cs typeface="Calibri" pitchFamily="34" charset="-120"/>
+              </a:rPr>
+              <a:t>Stanley’s     ·     </a:t>
+            </a:r>
+            <a:pPr indent="0" marL="0">
+              <a:buNone/>
+            </a:pPr>
+            <a:r>
+              <a:rPr lang="en-US" sz="1500" dirty="0">
+                <a:solidFill>
+                  <a:srgbClr val="1E293B"/>
+                </a:solidFill>
+                <a:latin typeface="Calibri" pitchFamily="34" charset="0"/>
+                <a:ea typeface="Calibri" pitchFamily="34" charset="-122"/>
+                <a:cs typeface="Calibri" pitchFamily="34" charset="-120"/>
+              </a:rPr>
+              <a:t>brothers     ·     </a:t>
+            </a:r>
+            <a:pPr indent="0" marL="0">
+              <a:buNone/>
+            </a:pPr>
+            <a:r>
+              <a:rPr lang="en-US" sz="1500" dirty="0">
+                <a:solidFill>
+                  <a:srgbClr val="1E293B"/>
+                </a:solidFill>
+                <a:latin typeface="Calibri" pitchFamily="34" charset="0"/>
+                <a:ea typeface="Calibri" pitchFamily="34" charset="-122"/>
+                <a:cs typeface="Calibri" pitchFamily="34" charset="-120"/>
+              </a:rPr>
+              <a:t>letters     ·     </a:t>
+            </a:r>
+            <a:pPr indent="0" marL="0">
+              <a:buNone/>
+            </a:pPr>
+            <a:r>
+              <a:rPr lang="en-US" sz="1500" dirty="0">
+                <a:solidFill>
+                  <a:srgbClr val="1E293B"/>
+                </a:solidFill>
+                <a:latin typeface="Calibri" pitchFamily="34" charset="0"/>
+                <a:ea typeface="Calibri" pitchFamily="34" charset="-122"/>
+                <a:cs typeface="Calibri" pitchFamily="34" charset="-120"/>
+              </a:rPr>
+              <a:t>maps</a:t>
+            </a:r>
+            <a:endParaRPr lang="en-US" sz="1500" dirty="0"/>
+          </a:p>
+        </p:txBody>
+      </p:sp>
+      <p:sp>
+        <p:nvSpPr>
+          <p:cNvPr id="11" name="Shape 9"/>
+          <p:cNvSpPr/>
+          <p:nvPr/>
+        </p:nvSpPr>
+        <p:spPr>
+          <a:xfrm>
+            <a:off x="365760" y="3337560"/>
+            <a:ext cx="8412480" cy="438912"/>
+          </a:xfrm>
+          <a:prstGeom prst="roundRect">
+            <a:avLst>
+              <a:gd name="adj" fmla="val 20833"/>
+            </a:avLst>
+          </a:prstGeom>
+          <a:solidFill>
+            <a:srgbClr val="FFFFFF"/>
+          </a:solidFill>
+          <a:ln/>
+          <a:effectLst>
+            <a:outerShdw sx="100000" sy="100000" kx="0" ky="0" algn="bl" rotWithShape="0" blurRad="101600" dist="38100" dir="2700000">
+              <a:srgbClr val="000000">
+                <a:alpha val="12000"/>
+              </a:srgbClr>
+            </a:outerShdw>
+          </a:effectLst>
+        </p:spPr>
+      </p:sp>
+      <p:sp>
+        <p:nvSpPr>
+          <p:cNvPr id="12" name="Text 10"/>
+          <p:cNvSpPr/>
+          <p:nvPr/>
+        </p:nvSpPr>
+        <p:spPr>
+          <a:xfrm>
+            <a:off x="594360" y="3401568"/>
+            <a:ext cx="7863840" cy="310896"/>
+          </a:xfrm>
+          <a:prstGeom prst="rect">
+            <a:avLst/>
+          </a:prstGeom>
+          <a:noFill/>
+          <a:ln/>
+        </p:spPr>
+        <p:txBody>
+          <a:bodyPr wrap="square" lIns="0" tIns="0" rIns="0" bIns="0" rtlCol="0" anchor="ctr"/>
+          <a:lstStyle/>
+          <a:p>
+            <a:pPr indent="0" marL="0">
+              <a:buNone/>
+            </a:pPr>
+            <a:r>
+              <a:rPr lang="en-US" sz="1500" dirty="0">
+                <a:solidFill>
+                  <a:srgbClr val="1E293B"/>
+                </a:solidFill>
+                <a:latin typeface="Calibri" pitchFamily="34" charset="0"/>
+                <a:ea typeface="Calibri" pitchFamily="34" charset="-122"/>
+                <a:cs typeface="Calibri" pitchFamily="34" charset="-120"/>
+              </a:rPr>
+              <a:t>mice     ·     </a:t>
+            </a:r>
+            <a:pPr indent="0" marL="0">
+              <a:buNone/>
+            </a:pPr>
+            <a:r>
+              <a:rPr lang="en-US" sz="1500" b="1" dirty="0">
+                <a:solidFill>
+                  <a:srgbClr val="34B76F"/>
+                </a:solidFill>
+                <a:latin typeface="Calibri" pitchFamily="34" charset="0"/>
+                <a:ea typeface="Calibri" pitchFamily="34" charset="-122"/>
+                <a:cs typeface="Calibri" pitchFamily="34" charset="-120"/>
+              </a:rPr>
+              <a:t>mouse’s     ·     </a:t>
+            </a:r>
+            <a:pPr indent="0" marL="0">
+              <a:buNone/>
+            </a:pPr>
+            <a:r>
+              <a:rPr lang="en-US" sz="1500" dirty="0">
+                <a:solidFill>
+                  <a:srgbClr val="1E293B"/>
+                </a:solidFill>
+                <a:latin typeface="Calibri" pitchFamily="34" charset="0"/>
+                <a:ea typeface="Calibri" pitchFamily="34" charset="-122"/>
+                <a:cs typeface="Calibri" pitchFamily="34" charset="-120"/>
+              </a:rPr>
+              <a:t>houses     ·     </a:t>
+            </a:r>
+            <a:pPr indent="0" marL="0">
+              <a:buNone/>
+            </a:pPr>
+            <a:r>
+              <a:rPr lang="en-US" sz="1500" dirty="0">
+                <a:solidFill>
+                  <a:srgbClr val="1E293B"/>
+                </a:solidFill>
+                <a:latin typeface="Calibri" pitchFamily="34" charset="0"/>
+                <a:ea typeface="Calibri" pitchFamily="34" charset="-122"/>
+                <a:cs typeface="Calibri" pitchFamily="34" charset="-120"/>
+              </a:rPr>
+              <a:t>boxes</a:t>
+            </a:r>
+            <a:endParaRPr lang="en-US" sz="1500" dirty="0"/>
+          </a:p>
+        </p:txBody>
+      </p:sp>
+      <p:sp>
+        <p:nvSpPr>
+          <p:cNvPr id="13" name="Shape 11"/>
+          <p:cNvSpPr/>
+          <p:nvPr/>
+        </p:nvSpPr>
+        <p:spPr>
+          <a:xfrm>
+            <a:off x="365760" y="3822192"/>
+            <a:ext cx="8412480" cy="438912"/>
+          </a:xfrm>
+          <a:prstGeom prst="roundRect">
+            <a:avLst>
+              <a:gd name="adj" fmla="val 20833"/>
+            </a:avLst>
+          </a:prstGeom>
+          <a:solidFill>
+            <a:srgbClr val="F8FAFC"/>
+          </a:solidFill>
+          <a:ln/>
+          <a:effectLst>
+            <a:outerShdw sx="100000" sy="100000" kx="0" ky="0" algn="bl" rotWithShape="0" blurRad="101600" dist="38100" dir="2700000">
+              <a:srgbClr val="000000">
+                <a:alpha val="12000"/>
+              </a:srgbClr>
+            </a:outerShdw>
+          </a:effectLst>
+        </p:spPr>
+      </p:sp>
+      <p:sp>
+        <p:nvSpPr>
+          <p:cNvPr id="14" name="Text 12"/>
+          <p:cNvSpPr/>
+          <p:nvPr/>
+        </p:nvSpPr>
+        <p:spPr>
+          <a:xfrm>
+            <a:off x="594360" y="3886200"/>
+            <a:ext cx="7863840" cy="310896"/>
+          </a:xfrm>
+          <a:prstGeom prst="rect">
+            <a:avLst/>
+          </a:prstGeom>
+          <a:noFill/>
+          <a:ln/>
+        </p:spPr>
+        <p:txBody>
+          <a:bodyPr wrap="square" lIns="0" tIns="0" rIns="0" bIns="0" rtlCol="0" anchor="ctr"/>
+          <a:lstStyle/>
+          <a:p>
+            <a:pPr indent="0" marL="0">
+              <a:buNone/>
+            </a:pPr>
+            <a:r>
+              <a:rPr lang="en-US" sz="1500" dirty="0">
+                <a:solidFill>
+                  <a:srgbClr val="1E293B"/>
+                </a:solidFill>
+                <a:latin typeface="Calibri" pitchFamily="34" charset="0"/>
+                <a:ea typeface="Calibri" pitchFamily="34" charset="-122"/>
+                <a:cs typeface="Calibri" pitchFamily="34" charset="-120"/>
+              </a:rPr>
+              <a:t>kings     ·     </a:t>
+            </a:r>
+            <a:pPr indent="0" marL="0">
+              <a:buNone/>
+            </a:pPr>
+            <a:r>
+              <a:rPr lang="en-US" sz="1500" dirty="0">
+                <a:solidFill>
+                  <a:srgbClr val="1E293B"/>
+                </a:solidFill>
+                <a:latin typeface="Calibri" pitchFamily="34" charset="0"/>
+                <a:ea typeface="Calibri" pitchFamily="34" charset="-122"/>
+                <a:cs typeface="Calibri" pitchFamily="34" charset="-120"/>
+              </a:rPr>
+              <a:t>rings     ·     </a:t>
+            </a:r>
+            <a:pPr indent="0" marL="0">
+              <a:buNone/>
+            </a:pPr>
+            <a:r>
+              <a:rPr lang="en-US" sz="1500" b="1" dirty="0">
+                <a:solidFill>
+                  <a:srgbClr val="34B76F"/>
+                </a:solidFill>
+                <a:latin typeface="Calibri" pitchFamily="34" charset="0"/>
+                <a:ea typeface="Calibri" pitchFamily="34" charset="-122"/>
+                <a:cs typeface="Calibri" pitchFamily="34" charset="-120"/>
+              </a:rPr>
+              <a:t>king’s     ·     </a:t>
+            </a:r>
+            <a:pPr indent="0" marL="0">
+              <a:buNone/>
+            </a:pPr>
+            <a:r>
+              <a:rPr lang="en-US" sz="1500" dirty="0">
+                <a:solidFill>
+                  <a:srgbClr val="1E293B"/>
+                </a:solidFill>
+                <a:latin typeface="Calibri" pitchFamily="34" charset="0"/>
+                <a:ea typeface="Calibri" pitchFamily="34" charset="-122"/>
+                <a:cs typeface="Calibri" pitchFamily="34" charset="-120"/>
+              </a:rPr>
+              <a:t>wings</a:t>
+            </a:r>
+            <a:endParaRPr lang="en-US" sz="1500" dirty="0"/>
+          </a:p>
+        </p:txBody>
+      </p:sp>
+      <p:sp>
+        <p:nvSpPr>
+          <p:cNvPr id="15" name="Shape 13"/>
+          <p:cNvSpPr/>
+          <p:nvPr/>
+        </p:nvSpPr>
+        <p:spPr>
+          <a:xfrm>
+            <a:off x="365760" y="4306824"/>
+            <a:ext cx="8412480" cy="438912"/>
+          </a:xfrm>
+          <a:prstGeom prst="roundRect">
+            <a:avLst>
+              <a:gd name="adj" fmla="val 20833"/>
+            </a:avLst>
+          </a:prstGeom>
+          <a:solidFill>
+            <a:srgbClr val="FFFFFF"/>
+          </a:solidFill>
+          <a:ln/>
+          <a:effectLst>
+            <a:outerShdw sx="100000" sy="100000" kx="0" ky="0" algn="bl" rotWithShape="0" blurRad="101600" dist="38100" dir="2700000">
+              <a:srgbClr val="000000">
+                <a:alpha val="12000"/>
+              </a:srgbClr>
+            </a:outerShdw>
+          </a:effectLst>
+        </p:spPr>
+      </p:sp>
+      <p:sp>
+        <p:nvSpPr>
+          <p:cNvPr id="16" name="Text 14"/>
+          <p:cNvSpPr/>
+          <p:nvPr/>
+        </p:nvSpPr>
+        <p:spPr>
+          <a:xfrm>
+            <a:off x="594360" y="4370832"/>
+            <a:ext cx="7863840" cy="310896"/>
+          </a:xfrm>
+          <a:prstGeom prst="rect">
+            <a:avLst/>
+          </a:prstGeom>
+          <a:noFill/>
+          <a:ln/>
+        </p:spPr>
+        <p:txBody>
+          <a:bodyPr wrap="square" lIns="0" tIns="0" rIns="0" bIns="0" rtlCol="0" anchor="ctr"/>
+          <a:lstStyle/>
+          <a:p>
+            <a:pPr indent="0" marL="0">
+              <a:buNone/>
+            </a:pPr>
+            <a:r>
+              <a:rPr lang="en-US" sz="1500" dirty="0">
+                <a:solidFill>
+                  <a:srgbClr val="1E293B"/>
+                </a:solidFill>
+                <a:latin typeface="Calibri" pitchFamily="34" charset="0"/>
+                <a:ea typeface="Calibri" pitchFamily="34" charset="-122"/>
+                <a:cs typeface="Calibri" pitchFamily="34" charset="-120"/>
+              </a:rPr>
+              <a:t>princesses     ·     </a:t>
+            </a:r>
+            <a:pPr indent="0" marL="0">
+              <a:buNone/>
+            </a:pPr>
+            <a:r>
+              <a:rPr lang="en-US" sz="1500" dirty="0">
+                <a:solidFill>
+                  <a:srgbClr val="1E293B"/>
+                </a:solidFill>
+                <a:latin typeface="Calibri" pitchFamily="34" charset="0"/>
+                <a:ea typeface="Calibri" pitchFamily="34" charset="-122"/>
+                <a:cs typeface="Calibri" pitchFamily="34" charset="-120"/>
+              </a:rPr>
+              <a:t>dresses     ·     </a:t>
+            </a:r>
+            <a:pPr indent="0" marL="0">
+              <a:buNone/>
+            </a:pPr>
+            <a:r>
+              <a:rPr lang="en-US" sz="1500" dirty="0">
+                <a:solidFill>
+                  <a:srgbClr val="1E293B"/>
+                </a:solidFill>
+                <a:latin typeface="Calibri" pitchFamily="34" charset="0"/>
+                <a:ea typeface="Calibri" pitchFamily="34" charset="-122"/>
+                <a:cs typeface="Calibri" pitchFamily="34" charset="-120"/>
+              </a:rPr>
+              <a:t>glasses     ·     </a:t>
+            </a:r>
+            <a:pPr indent="0" marL="0">
+              <a:buNone/>
+            </a:pPr>
+            <a:r>
+              <a:rPr lang="en-US" sz="1500" b="1" dirty="0">
+                <a:solidFill>
+                  <a:srgbClr val="34B76F"/>
+                </a:solidFill>
+                <a:latin typeface="Calibri" pitchFamily="34" charset="0"/>
+                <a:ea typeface="Calibri" pitchFamily="34" charset="-122"/>
+                <a:cs typeface="Calibri" pitchFamily="34" charset="-120"/>
+              </a:rPr>
+              <a:t>princess’s</a:t>
+            </a:r>
+            <a:endParaRPr lang="en-US" sz="1500" dirty="0"/>
+          </a:p>
+        </p:txBody>
+      </p:sp>
+      <p:sp>
+        <p:nvSpPr>
+          <p:cNvPr id="17" name="Text 15"/>
+          <p:cNvSpPr/>
+          <p:nvPr/>
+        </p:nvSpPr>
+        <p:spPr>
+          <a:xfrm>
+            <a:off x="365760" y="4809744"/>
+            <a:ext cx="8412480" cy="274320"/>
+          </a:xfrm>
+          <a:prstGeom prst="rect">
+            <a:avLst/>
+          </a:prstGeom>
+          <a:noFill/>
+          <a:ln/>
+        </p:spPr>
+        <p:txBody>
+          <a:bodyPr wrap="square" lIns="0" tIns="0" rIns="0" bIns="0" rtlCol="0" anchor="ctr"/>
+          <a:lstStyle/>
+          <a:p>
+            <a:pPr indent="0" marL="0">
+              <a:buNone/>
+            </a:pPr>
+            <a:r>
+              <a:rPr lang="en-US" sz="1300" b="1" dirty="0">
+                <a:solidFill>
+                  <a:srgbClr val="34B76F"/>
+                </a:solidFill>
+                <a:latin typeface="Calibri" pitchFamily="34" charset="0"/>
+                <a:ea typeface="Calibri" pitchFamily="34" charset="-122"/>
+                <a:cs typeface="Calibri" pitchFamily="34" charset="-120"/>
+              </a:rPr>
+              <a:t>✅  Answers revealed</a:t>
+            </a:r>
+            <a:endParaRPr lang="en-US" sz="1300" dirty="0"/>
+          </a:p>
+        </p:txBody>
+      </p:sp>
+    </p:spTree>
+  </p:cSld>
+  <p:clrMapOvr>
+    <a:masterClrMapping/>
+  </p:clrMapOvr>
+</p:sld>
+</file>
+
+<file path=ppt/slides/slide18.xml><?xml version="1.0" encoding="utf-8"?>
+<p:sld xmlns:a="http://schemas.openxmlformats.org/drawingml/2006/main" xmlns:r="http://schemas.openxmlformats.org/officeDocument/2006/relationships" xmlns:p="http://schemas.openxmlformats.org/presentationml/2006/main">
+  <p:cSld name="Slide 18">
     <p:bg>
       <p:bgPr>
         <a:solidFill>
@@ -5045,9 +8126,9 @@
 </p:sld>
 </file>
 
-<file path=ppt/slides/slide16.xml><?xml version="1.0" encoding="utf-8"?>
+<file path=ppt/slides/slide19.xml><?xml version="1.0" encoding="utf-8"?>
 <p:sld xmlns:a="http://schemas.openxmlformats.org/drawingml/2006/main" xmlns:r="http://schemas.openxmlformats.org/officeDocument/2006/relationships" xmlns:p="http://schemas.openxmlformats.org/presentationml/2006/main">
-  <p:cSld name="Slide 16">
+  <p:cSld name="Slide 19">
     <p:bg>
       <p:bgPr>
         <a:solidFill>
@@ -6605,7 +9686,7 @@
     <p:bg>
       <p:bgPr>
         <a:solidFill>
-          <a:srgbClr val="F8FAFC"/>
+          <a:srgbClr val="FFFFFF"/>
         </a:solidFill>
       </p:bgPr>
     </p:bg>
@@ -6690,7 +9771,7 @@
         </p:nvSpPr>
         <p:spPr>
           <a:xfrm>
-            <a:off x="365760" y="749808"/>
+            <a:off x="365760" y="804672"/>
             <a:ext cx="8229600" cy="237744"/>
           </a:xfrm>
           <a:prstGeom prst="rect">
@@ -6715,7 +9796,7 @@
                 <a:ea typeface="Calibri" pitchFamily="34" charset="-122"/>
                 <a:cs typeface="Calibri" pitchFamily="34" charset="-120"/>
               </a:rPr>
-              <a:t>FIX THESE SENTENCES</a:t>
+              <a:t>CORRECT MODEL — STUDY WHAT IS RIGHT</a:t>
             </a:r>
             <a:endParaRPr lang="en-US" sz="1100" dirty="0"/>
           </a:p>
@@ -6729,16 +9810,16 @@
         </p:nvSpPr>
         <p:spPr>
           <a:xfrm>
-            <a:off x="365760" y="1024128"/>
-            <a:ext cx="8412480" cy="777240"/>
+            <a:off x="365760" y="1078992"/>
+            <a:ext cx="8412480" cy="822960"/>
           </a:xfrm>
           <a:prstGeom prst="roundRect">
             <a:avLst>
-              <a:gd name="adj" fmla="val 11765"/>
+              <a:gd name="adj" fmla="val 11111"/>
             </a:avLst>
           </a:prstGeom>
           <a:solidFill>
-            <a:srgbClr val="FFFFFF"/>
+            <a:srgbClr val="E5F7FC"/>
           </a:solidFill>
           <a:ln w="19050">
             <a:solidFill>
@@ -6763,8 +9844,8 @@
         </p:nvSpPr>
         <p:spPr>
           <a:xfrm>
-            <a:off x="594360" y="1152144"/>
-            <a:ext cx="7955280" cy="521208"/>
+            <a:off x="594360" y="1207008"/>
+            <a:ext cx="7955280" cy="566928"/>
           </a:xfrm>
           <a:prstGeom prst="rect">
             <a:avLst/>
@@ -6788,7 +9869,7 @@
                 <a:ea typeface="Calibri" pitchFamily="34" charset="-122"/>
                 <a:cs typeface="Calibri" pitchFamily="34" charset="-120"/>
               </a:rPr>
-              <a:t>1. despereaux moved through the dungeon with a needle and a thread of light to guide him forward</a:t>
+              <a:t>The dungeon smells of old water, and the stairs creak under every step.</a:t>
             </a:r>
             <a:endParaRPr lang="en-US" sz="1700" dirty="0"/>
           </a:p>
@@ -6796,37 +9877,42 @@
       </p:sp>
       <p:sp>
         <p:nvSpPr>
-          <p:cNvPr id="7" name="Shape 5"/>
-          <p:cNvSpPr/>
-          <p:nvPr/>
-        </p:nvSpPr>
-        <p:spPr>
-          <a:xfrm>
-            <a:off x="365760" y="1874520"/>
-            <a:ext cx="8412480" cy="777240"/>
-          </a:xfrm>
-          <a:prstGeom prst="roundRect">
-            <a:avLst>
-              <a:gd name="adj" fmla="val 11765"/>
-            </a:avLst>
-          </a:prstGeom>
-          <a:solidFill>
-            <a:srgbClr val="FFFFFF"/>
-          </a:solidFill>
-          <a:ln w="19050">
-            <a:solidFill>
-              <a:srgbClr val="55C8E8"/>
-            </a:solidFill>
-            <a:prstDash val="solid"/>
-          </a:ln>
-          <a:effectLst>
-            <a:outerShdw sx="100000" sy="100000" kx="0" ky="0" algn="bl" rotWithShape="0" blurRad="101600" dist="38100" dir="2700000">
-              <a:srgbClr val="000000">
-                <a:alpha val="12000"/>
-              </a:srgbClr>
-            </a:outerShdw>
-          </a:effectLst>
-        </p:spPr>
+          <p:cNvPr id="7" name="Text 5"/>
+          <p:cNvSpPr/>
+          <p:nvPr/>
+        </p:nvSpPr>
+        <p:spPr>
+          <a:xfrm>
+            <a:off x="365760" y="2103120"/>
+            <a:ext cx="8229600" cy="237744"/>
+          </a:xfrm>
+          <a:prstGeom prst="rect">
+            <a:avLst/>
+          </a:prstGeom>
+          <a:noFill/>
+          <a:ln/>
+        </p:spPr>
+        <p:txBody>
+          <a:bodyPr wrap="square" lIns="0" tIns="0" rIns="0" bIns="0" rtlCol="0" anchor="ctr"/>
+          <a:lstStyle/>
+          <a:p>
+            <a:pPr indent="0" marL="0">
+              <a:buNone/>
+            </a:pPr>
+            <a:r>
+              <a:rPr lang="en-US" sz="1100" b="1" spc="100" kern="0" dirty="0">
+                <a:solidFill>
+                  <a:srgbClr val="55C8E8"/>
+                </a:solidFill>
+                <a:latin typeface="Calibri" pitchFamily="34" charset="0"/>
+                <a:ea typeface="Calibri" pitchFamily="34" charset="-122"/>
+                <a:cs typeface="Calibri" pitchFamily="34" charset="-120"/>
+              </a:rPr>
+              <a:t>NOTICE</a:t>
+            </a:r>
+            <a:endParaRPr lang="en-US" sz="1100" dirty="0"/>
+          </a:p>
+        </p:txBody>
       </p:sp>
       <p:sp>
         <p:nvSpPr>
@@ -6836,73 +9922,34 @@
         </p:nvSpPr>
         <p:spPr>
           <a:xfrm>
-            <a:off x="594360" y="2002536"/>
-            <a:ext cx="7955280" cy="521208"/>
-          </a:xfrm>
-          <a:prstGeom prst="rect">
-            <a:avLst/>
-          </a:prstGeom>
-          <a:noFill/>
-          <a:ln/>
-        </p:spPr>
-        <p:txBody>
-          <a:bodyPr wrap="square" lIns="0" tIns="0" rIns="0" bIns="0" rtlCol="0" anchor="ctr"/>
-          <a:lstStyle/>
-          <a:p>
-            <a:pPr indent="0" marL="0">
-              <a:buNone/>
-            </a:pPr>
-            <a:r>
-              <a:rPr lang="en-US" sz="1700" dirty="0">
-                <a:solidFill>
-                  <a:srgbClr val="1E293B"/>
-                </a:solidFill>
-                <a:latin typeface="Calibri" pitchFamily="34" charset="0"/>
-                <a:ea typeface="Calibri" pitchFamily="34" charset="-122"/>
-                <a:cs typeface="Calibri" pitchFamily="34" charset="-120"/>
-              </a:rPr>
-              <a:t>2. the dungeon was cold and deep and dark but he did not turn back even once</a:t>
-            </a:r>
-            <a:endParaRPr lang="en-US" sz="1700" dirty="0"/>
-          </a:p>
-        </p:txBody>
-      </p:sp>
-      <p:sp>
-        <p:nvSpPr>
-          <p:cNvPr id="9" name="Text 7"/>
-          <p:cNvSpPr/>
-          <p:nvPr/>
-        </p:nvSpPr>
-        <p:spPr>
-          <a:xfrm>
-            <a:off x="365760" y="2788920"/>
-            <a:ext cx="8412480" cy="365760"/>
-          </a:xfrm>
-          <a:prstGeom prst="rect">
-            <a:avLst/>
-          </a:prstGeom>
-          <a:noFill/>
-          <a:ln/>
-        </p:spPr>
-        <p:txBody>
-          <a:bodyPr wrap="square" lIns="0" tIns="0" rIns="0" bIns="0" rtlCol="0" anchor="ctr"/>
-          <a:lstStyle/>
-          <a:p>
-            <a:pPr indent="0" marL="0">
-              <a:buNone/>
-            </a:pPr>
-            <a:r>
-              <a:rPr lang="en-US" sz="1600" b="1" dirty="0">
-                <a:solidFill>
-                  <a:srgbClr val="0E1C42"/>
-                </a:solidFill>
-                <a:latin typeface="Calibri" pitchFamily="34" charset="0"/>
-                <a:ea typeface="Calibri" pitchFamily="34" charset="-122"/>
-                <a:cs typeface="Calibri" pitchFamily="34" charset="-120"/>
-              </a:rPr>
-              <a:t>Rewrite both sentences correctly in your notebook.</a:t>
-            </a:r>
-            <a:endParaRPr lang="en-US" sz="1600" dirty="0"/>
+            <a:off x="365760" y="2359152"/>
+            <a:ext cx="8412480" cy="1097280"/>
+          </a:xfrm>
+          <a:prstGeom prst="rect">
+            <a:avLst/>
+          </a:prstGeom>
+          <a:noFill/>
+          <a:ln/>
+        </p:spPr>
+        <p:txBody>
+          <a:bodyPr wrap="square" lIns="0" tIns="0" rIns="0" bIns="0" rtlCol="0" anchor="t"/>
+          <a:lstStyle/>
+          <a:p>
+            <a:pPr indent="0" marL="0">
+              <a:buNone/>
+            </a:pPr>
+            <a:r>
+              <a:rPr lang="en-US" sz="1500" dirty="0">
+                <a:solidFill>
+                  <a:srgbClr val="1E293B"/>
+                </a:solidFill>
+                <a:latin typeface="Calibri" pitchFamily="34" charset="0"/>
+                <a:ea typeface="Calibri" pitchFamily="34" charset="-122"/>
+                <a:cs typeface="Calibri" pitchFamily="34" charset="-120"/>
+              </a:rPr>
+              <a:t>the singular subject dungeon takes smells with an -s, but the plural subject stairs takes creak with no -s. A comma comes before and joining two complete sentences.</a:t>
+            </a:r>
+            <a:endParaRPr lang="en-US" sz="1500" dirty="0"/>
           </a:p>
         </p:txBody>
       </p:sp>
@@ -7030,7 +10077,7 @@
                 <a:ea typeface="Calibri" pitchFamily="34" charset="-122"/>
                 <a:cs typeface="Calibri" pitchFamily="34" charset="-120"/>
               </a:rPr>
-              <a:t>FIX THESE SENTENCES</a:t>
+              <a:t>NOW FIX THIS ONE</a:t>
             </a:r>
             <a:endParaRPr lang="en-US" sz="1100" dirty="0"/>
           </a:p>
@@ -7103,7 +10150,7 @@
                 <a:ea typeface="Calibri" pitchFamily="34" charset="-122"/>
                 <a:cs typeface="Calibri" pitchFamily="34" charset="-120"/>
               </a:rPr>
-              <a:t>1. despereaux moved through the dungeon with a needle and a thread of light to guide him forward</a:t>
+              <a:t>despereaux moved through the dungeon with a needle and a thread of light to guide him forward</a:t>
             </a:r>
             <a:endParaRPr lang="en-US" sz="1700" dirty="0"/>
           </a:p>
@@ -7111,226 +10158,40 @@
       </p:sp>
       <p:sp>
         <p:nvSpPr>
-          <p:cNvPr id="7" name="Shape 5"/>
-          <p:cNvSpPr/>
-          <p:nvPr/>
-        </p:nvSpPr>
-        <p:spPr>
-          <a:xfrm>
-            <a:off x="365760" y="1874520"/>
-            <a:ext cx="8412480" cy="777240"/>
-          </a:xfrm>
-          <a:prstGeom prst="roundRect">
-            <a:avLst>
-              <a:gd name="adj" fmla="val 11765"/>
-            </a:avLst>
-          </a:prstGeom>
-          <a:solidFill>
-            <a:srgbClr val="FFFFFF"/>
-          </a:solidFill>
-          <a:ln w="19050">
-            <a:solidFill>
-              <a:srgbClr val="55C8E8"/>
-            </a:solidFill>
-            <a:prstDash val="solid"/>
-          </a:ln>
-          <a:effectLst>
-            <a:outerShdw sx="100000" sy="100000" kx="0" ky="0" algn="bl" rotWithShape="0" blurRad="101600" dist="38100" dir="2700000">
-              <a:srgbClr val="000000">
-                <a:alpha val="12000"/>
-              </a:srgbClr>
-            </a:outerShdw>
-          </a:effectLst>
-        </p:spPr>
-      </p:sp>
-      <p:sp>
-        <p:nvSpPr>
-          <p:cNvPr id="8" name="Text 6"/>
-          <p:cNvSpPr/>
-          <p:nvPr/>
-        </p:nvSpPr>
-        <p:spPr>
-          <a:xfrm>
-            <a:off x="594360" y="2002536"/>
-            <a:ext cx="7955280" cy="521208"/>
-          </a:xfrm>
-          <a:prstGeom prst="rect">
-            <a:avLst/>
-          </a:prstGeom>
-          <a:noFill/>
-          <a:ln/>
-        </p:spPr>
-        <p:txBody>
-          <a:bodyPr wrap="square" lIns="0" tIns="0" rIns="0" bIns="0" rtlCol="0" anchor="ctr"/>
-          <a:lstStyle/>
-          <a:p>
-            <a:pPr indent="0" marL="0">
-              <a:buNone/>
-            </a:pPr>
-            <a:r>
-              <a:rPr lang="en-US" sz="1700" dirty="0">
-                <a:solidFill>
-                  <a:srgbClr val="1E293B"/>
-                </a:solidFill>
-                <a:latin typeface="Calibri" pitchFamily="34" charset="0"/>
-                <a:ea typeface="Calibri" pitchFamily="34" charset="-122"/>
-                <a:cs typeface="Calibri" pitchFamily="34" charset="-120"/>
-              </a:rPr>
-              <a:t>2. the dungeon was cold and deep and dark but he did not turn back even once</a:t>
-            </a:r>
-            <a:endParaRPr lang="en-US" sz="1700" dirty="0"/>
-          </a:p>
-        </p:txBody>
-      </p:sp>
-      <p:sp>
-        <p:nvSpPr>
-          <p:cNvPr id="9" name="Shape 7"/>
-          <p:cNvSpPr/>
-          <p:nvPr/>
-        </p:nvSpPr>
-        <p:spPr>
-          <a:xfrm>
-            <a:off x="365760" y="2743200"/>
-            <a:ext cx="8412480" cy="1417320"/>
-          </a:xfrm>
-          <a:prstGeom prst="roundRect">
-            <a:avLst>
-              <a:gd name="adj" fmla="val 6452"/>
-            </a:avLst>
-          </a:prstGeom>
-          <a:solidFill>
-            <a:srgbClr val="E8F8EF"/>
-          </a:solidFill>
-          <a:ln/>
-          <a:effectLst>
-            <a:outerShdw sx="100000" sy="100000" kx="0" ky="0" algn="bl" rotWithShape="0" blurRad="101600" dist="38100" dir="2700000">
-              <a:srgbClr val="000000">
-                <a:alpha val="12000"/>
-              </a:srgbClr>
-            </a:outerShdw>
-          </a:effectLst>
-        </p:spPr>
-      </p:sp>
-      <p:sp>
-        <p:nvSpPr>
-          <p:cNvPr id="10" name="Text 8"/>
-          <p:cNvSpPr/>
-          <p:nvPr/>
-        </p:nvSpPr>
-        <p:spPr>
-          <a:xfrm>
-            <a:off x="566928" y="2816352"/>
-            <a:ext cx="8229600" cy="237744"/>
-          </a:xfrm>
-          <a:prstGeom prst="rect">
-            <a:avLst/>
-          </a:prstGeom>
-          <a:noFill/>
-          <a:ln/>
-        </p:spPr>
-        <p:txBody>
-          <a:bodyPr wrap="square" lIns="0" tIns="0" rIns="0" bIns="0" rtlCol="0" anchor="ctr"/>
-          <a:lstStyle/>
-          <a:p>
-            <a:pPr indent="0" marL="0">
-              <a:buNone/>
-            </a:pPr>
-            <a:r>
-              <a:rPr lang="en-US" sz="1100" b="1" spc="100" kern="0" dirty="0">
-                <a:solidFill>
-                  <a:srgbClr val="34B76F"/>
-                </a:solidFill>
-                <a:latin typeface="Calibri" pitchFamily="34" charset="0"/>
-                <a:ea typeface="Calibri" pitchFamily="34" charset="-122"/>
-                <a:cs typeface="Calibri" pitchFamily="34" charset="-120"/>
-              </a:rPr>
-              <a:t>✅  CORRECTED</a:t>
-            </a:r>
-            <a:endParaRPr lang="en-US" sz="1100" dirty="0"/>
-          </a:p>
-        </p:txBody>
-      </p:sp>
-      <p:sp>
-        <p:nvSpPr>
-          <p:cNvPr id="11" name="Text 9"/>
-          <p:cNvSpPr/>
-          <p:nvPr/>
-        </p:nvSpPr>
-        <p:spPr>
-          <a:xfrm>
-            <a:off x="566928" y="3072384"/>
-            <a:ext cx="8010144" cy="685800"/>
-          </a:xfrm>
-          <a:prstGeom prst="rect">
-            <a:avLst/>
-          </a:prstGeom>
-          <a:noFill/>
-          <a:ln/>
-        </p:spPr>
-        <p:txBody>
-          <a:bodyPr wrap="square" lIns="0" tIns="0" rIns="0" bIns="0" rtlCol="0" anchor="ctr"/>
-          <a:lstStyle/>
-          <a:p>
-            <a:pPr indent="0" marL="0">
-              <a:buNone/>
-            </a:pPr>
-            <a:endParaRPr lang="en-US" sz="1400" dirty="0"/>
-          </a:p>
-          <a:p>
-            <a:pPr indent="0" marL="0">
-              <a:buNone/>
-            </a:pPr>
-            <a:r>
-              <a:rPr lang="en-US" sz="1400" i="1" dirty="0">
-                <a:solidFill>
-                  <a:srgbClr val="1E293B"/>
-                </a:solidFill>
-                <a:latin typeface="Calibri" pitchFamily="34" charset="0"/>
-                <a:ea typeface="Calibri" pitchFamily="34" charset="-122"/>
-                <a:cs typeface="Calibri" pitchFamily="34" charset="-120"/>
-              </a:rPr>
-              <a:t>1. Despereaux moved through the dungeon with a needle and a thread of light to guide him forward.</a:t>
-            </a:r>
-            <a:endParaRPr lang="en-US" sz="1400" dirty="0"/>
-          </a:p>
-        </p:txBody>
-      </p:sp>
-      <p:sp>
-        <p:nvSpPr>
-          <p:cNvPr id="12" name="Text 10"/>
-          <p:cNvSpPr/>
-          <p:nvPr/>
-        </p:nvSpPr>
-        <p:spPr>
-          <a:xfrm>
-            <a:off x="566928" y="3767328"/>
-            <a:ext cx="8010144" cy="320040"/>
-          </a:xfrm>
-          <a:prstGeom prst="rect">
-            <a:avLst/>
-          </a:prstGeom>
-          <a:noFill/>
-          <a:ln/>
-        </p:spPr>
-        <p:txBody>
-          <a:bodyPr wrap="square" lIns="0" tIns="0" rIns="0" bIns="0" rtlCol="0" anchor="ctr"/>
-          <a:lstStyle/>
-          <a:p>
-            <a:pPr indent="0" marL="0">
-              <a:buNone/>
-            </a:pPr>
-            <a:r>
-              <a:rPr lang="en-US" sz="1200" dirty="0">
-                <a:solidFill>
-                  <a:srgbClr val="64748B"/>
-                </a:solidFill>
-                <a:latin typeface="Calibri" pitchFamily="34" charset="0"/>
-                <a:ea typeface="Calibri" pitchFamily="34" charset="-122"/>
-                <a:cs typeface="Calibri" pitchFamily="34" charset="-120"/>
-              </a:rPr>
-              <a:t>Did you catch the proper noun (Despereaux), the comma before "but," and capital letters?</a:t>
-            </a:r>
-            <a:endParaRPr lang="en-US" sz="1200" dirty="0"/>
+          <p:cNvPr id="7" name="Text 5"/>
+          <p:cNvSpPr/>
+          <p:nvPr/>
+        </p:nvSpPr>
+        <p:spPr>
+          <a:xfrm>
+            <a:off x="365760" y="2788920"/>
+            <a:ext cx="8412480" cy="365760"/>
+          </a:xfrm>
+          <a:prstGeom prst="rect">
+            <a:avLst/>
+          </a:prstGeom>
+          <a:noFill/>
+          <a:ln/>
+        </p:spPr>
+        <p:txBody>
+          <a:bodyPr wrap="square" lIns="0" tIns="0" rIns="0" bIns="0" rtlCol="0" anchor="ctr"/>
+          <a:lstStyle/>
+          <a:p>
+            <a:pPr indent="0" marL="0">
+              <a:buNone/>
+            </a:pPr>
+            <a:r>
+              <a:rPr lang="en-US" sz="1600" b="1" dirty="0">
+                <a:solidFill>
+                  <a:srgbClr val="0E1C42"/>
+                </a:solidFill>
+                <a:latin typeface="Calibri" pitchFamily="34" charset="0"/>
+                <a:ea typeface="Calibri" pitchFamily="34" charset="-122"/>
+                <a:cs typeface="Calibri" pitchFamily="34" charset="-120"/>
+              </a:rPr>
+              <a:t>Rewrite the sentence correctly in your notebook.</a:t>
+            </a:r>
+            <a:endParaRPr lang="en-US" sz="1600" dirty="0"/>
           </a:p>
         </p:txBody>
       </p:sp>
@@ -7348,7 +10209,7 @@
     <p:bg>
       <p:bgPr>
         <a:solidFill>
-          <a:srgbClr val="FFFFFF"/>
+          <a:srgbClr val="F8FAFC"/>
         </a:solidFill>
       </p:bgPr>
     </p:bg>
@@ -7381,7 +10242,7 @@
             <a:avLst/>
           </a:prstGeom>
           <a:solidFill>
-            <a:srgbClr val="8B6FC0"/>
+            <a:srgbClr val="55C8E8"/>
           </a:solidFill>
           <a:ln/>
         </p:spPr>
@@ -7419,7 +10280,7 @@
                 <a:ea typeface="Calibri" pitchFamily="34" charset="-122"/>
                 <a:cs typeface="Calibri" pitchFamily="34" charset="-120"/>
               </a:rPr>
-              <a:t>🌱  Morphology</a:t>
+              <a:t>✏️  Daily Oral Language</a:t>
             </a:r>
             <a:endParaRPr lang="en-US" sz="2200" dirty="0"/>
           </a:p>
@@ -7433,7 +10294,7 @@
         </p:nvSpPr>
         <p:spPr>
           <a:xfrm>
-            <a:off x="365760" y="804672"/>
+            <a:off x="365760" y="749808"/>
             <a:ext cx="8229600" cy="237744"/>
           </a:xfrm>
           <a:prstGeom prst="rect">
@@ -7452,13 +10313,13 @@
             <a:r>
               <a:rPr lang="en-US" sz="1100" b="1" spc="100" kern="0" dirty="0">
                 <a:solidFill>
-                  <a:srgbClr val="8B6FC0"/>
-                </a:solidFill>
-                <a:latin typeface="Calibri" pitchFamily="34" charset="0"/>
-                <a:ea typeface="Calibri" pitchFamily="34" charset="-122"/>
-                <a:cs typeface="Calibri" pitchFamily="34" charset="-120"/>
-              </a:rPr>
-              <a:t>-NESS</a:t>
+                  <a:srgbClr val="55C8E8"/>
+                </a:solidFill>
+                <a:latin typeface="Calibri" pitchFamily="34" charset="0"/>
+                <a:ea typeface="Calibri" pitchFamily="34" charset="-122"/>
+                <a:cs typeface="Calibri" pitchFamily="34" charset="-120"/>
+              </a:rPr>
+              <a:t>NOW FIX THIS ONE</a:t>
             </a:r>
             <a:endParaRPr lang="en-US" sz="1100" dirty="0"/>
           </a:p>
@@ -7472,18 +10333,23 @@
         </p:nvSpPr>
         <p:spPr>
           <a:xfrm>
-            <a:off x="365760" y="1097280"/>
-            <a:ext cx="8412480" cy="621792"/>
+            <a:off x="365760" y="1024128"/>
+            <a:ext cx="8412480" cy="777240"/>
           </a:xfrm>
           <a:prstGeom prst="roundRect">
             <a:avLst>
-              <a:gd name="adj" fmla="val 14706"/>
+              <a:gd name="adj" fmla="val 11765"/>
             </a:avLst>
           </a:prstGeom>
           <a:solidFill>
-            <a:srgbClr val="F0E8FF"/>
+            <a:srgbClr val="FFFFFF"/>
           </a:solidFill>
-          <a:ln/>
+          <a:ln w="19050">
+            <a:solidFill>
+              <a:srgbClr val="55C8E8"/>
+            </a:solidFill>
+            <a:prstDash val="solid"/>
+          </a:ln>
           <a:effectLst>
             <a:outerShdw sx="100000" sy="100000" kx="0" ky="0" algn="bl" rotWithShape="0" blurRad="101600" dist="38100" dir="2700000">
               <a:srgbClr val="000000">
@@ -7501,34 +10367,34 @@
         </p:nvSpPr>
         <p:spPr>
           <a:xfrm>
-            <a:off x="594360" y="1216152"/>
-            <a:ext cx="7863840" cy="384048"/>
-          </a:xfrm>
-          <a:prstGeom prst="rect">
-            <a:avLst/>
-          </a:prstGeom>
-          <a:noFill/>
-          <a:ln/>
-        </p:spPr>
-        <p:txBody>
-          <a:bodyPr wrap="square" lIns="0" tIns="0" rIns="0" bIns="0" rtlCol="0" anchor="ctr"/>
-          <a:lstStyle/>
-          <a:p>
-            <a:pPr indent="0" marL="0">
-              <a:buNone/>
-            </a:pPr>
-            <a:r>
-              <a:rPr lang="en-US" sz="1500" dirty="0">
-                <a:solidFill>
-                  <a:srgbClr val="1E293B"/>
-                </a:solidFill>
-                <a:latin typeface="Calibri" pitchFamily="34" charset="0"/>
-                <a:ea typeface="Calibri" pitchFamily="34" charset="-122"/>
-                <a:cs typeface="Calibri" pitchFamily="34" charset="-120"/>
-              </a:rPr>
-              <a:t>🌱  darkness — base word: dark</a:t>
-            </a:r>
-            <a:endParaRPr lang="en-US" sz="1500" dirty="0"/>
+            <a:off x="594360" y="1152144"/>
+            <a:ext cx="7955280" cy="521208"/>
+          </a:xfrm>
+          <a:prstGeom prst="rect">
+            <a:avLst/>
+          </a:prstGeom>
+          <a:noFill/>
+          <a:ln/>
+        </p:spPr>
+        <p:txBody>
+          <a:bodyPr wrap="square" lIns="0" tIns="0" rIns="0" bIns="0" rtlCol="0" anchor="ctr"/>
+          <a:lstStyle/>
+          <a:p>
+            <a:pPr indent="0" marL="0">
+              <a:buNone/>
+            </a:pPr>
+            <a:r>
+              <a:rPr lang="en-US" sz="1700" dirty="0">
+                <a:solidFill>
+                  <a:srgbClr val="1E293B"/>
+                </a:solidFill>
+                <a:latin typeface="Calibri" pitchFamily="34" charset="0"/>
+                <a:ea typeface="Calibri" pitchFamily="34" charset="-122"/>
+                <a:cs typeface="Calibri" pitchFamily="34" charset="-120"/>
+              </a:rPr>
+              <a:t>despereaux moved through the dungeon with a needle and a thread of light to guide him forward</a:t>
+            </a:r>
+            <a:endParaRPr lang="en-US" sz="1700" dirty="0"/>
           </a:p>
         </p:txBody>
       </p:sp>
@@ -7540,16 +10406,16 @@
         </p:nvSpPr>
         <p:spPr>
           <a:xfrm>
-            <a:off x="365760" y="1792224"/>
-            <a:ext cx="8412480" cy="621792"/>
+            <a:off x="365760" y="2743200"/>
+            <a:ext cx="8412480" cy="1417320"/>
           </a:xfrm>
           <a:prstGeom prst="roundRect">
             <a:avLst>
-              <a:gd name="adj" fmla="val 14706"/>
+              <a:gd name="adj" fmla="val 6452"/>
             </a:avLst>
           </a:prstGeom>
           <a:solidFill>
-            <a:srgbClr val="F8F4FF"/>
+            <a:srgbClr val="E8F8EF"/>
           </a:solidFill>
           <a:ln/>
           <a:effectLst>
@@ -7569,170 +10435,79 @@
         </p:nvSpPr>
         <p:spPr>
           <a:xfrm>
-            <a:off x="594360" y="1911096"/>
-            <a:ext cx="7863840" cy="384048"/>
-          </a:xfrm>
-          <a:prstGeom prst="rect">
-            <a:avLst/>
-          </a:prstGeom>
-          <a:noFill/>
-          <a:ln/>
-        </p:spPr>
-        <p:txBody>
-          <a:bodyPr wrap="square" lIns="0" tIns="0" rIns="0" bIns="0" rtlCol="0" anchor="ctr"/>
-          <a:lstStyle/>
-          <a:p>
-            <a:pPr indent="0" marL="0">
-              <a:buNone/>
-            </a:pPr>
-            <a:r>
-              <a:rPr lang="en-US" sz="1500" dirty="0">
-                <a:solidFill>
-                  <a:srgbClr val="1E293B"/>
-                </a:solidFill>
-                <a:latin typeface="Calibri" pitchFamily="34" charset="0"/>
-                <a:ea typeface="Calibri" pitchFamily="34" charset="-122"/>
-                <a:cs typeface="Calibri" pitchFamily="34" charset="-120"/>
-              </a:rPr>
-              <a:t>🌱  kindness — base word: kind</a:t>
-            </a:r>
-            <a:endParaRPr lang="en-US" sz="1500" dirty="0"/>
-          </a:p>
-        </p:txBody>
-      </p:sp>
-      <p:sp>
-        <p:nvSpPr>
-          <p:cNvPr id="9" name="Shape 7"/>
-          <p:cNvSpPr/>
-          <p:nvPr/>
-        </p:nvSpPr>
-        <p:spPr>
-          <a:xfrm>
-            <a:off x="365760" y="2487168"/>
-            <a:ext cx="8412480" cy="621792"/>
-          </a:xfrm>
-          <a:prstGeom prst="roundRect">
-            <a:avLst>
-              <a:gd name="adj" fmla="val 14706"/>
-            </a:avLst>
-          </a:prstGeom>
-          <a:solidFill>
-            <a:srgbClr val="F0E8FF"/>
-          </a:solidFill>
-          <a:ln/>
-          <a:effectLst>
-            <a:outerShdw sx="100000" sy="100000" kx="0" ky="0" algn="bl" rotWithShape="0" blurRad="101600" dist="38100" dir="2700000">
-              <a:srgbClr val="000000">
-                <a:alpha val="12000"/>
-              </a:srgbClr>
-            </a:outerShdw>
-          </a:effectLst>
-        </p:spPr>
-      </p:sp>
-      <p:sp>
-        <p:nvSpPr>
-          <p:cNvPr id="10" name="Text 8"/>
-          <p:cNvSpPr/>
-          <p:nvPr/>
-        </p:nvSpPr>
-        <p:spPr>
-          <a:xfrm>
-            <a:off x="594360" y="2606040"/>
-            <a:ext cx="7863840" cy="384048"/>
-          </a:xfrm>
-          <a:prstGeom prst="rect">
-            <a:avLst/>
-          </a:prstGeom>
-          <a:noFill/>
-          <a:ln/>
-        </p:spPr>
-        <p:txBody>
-          <a:bodyPr wrap="square" lIns="0" tIns="0" rIns="0" bIns="0" rtlCol="0" anchor="ctr"/>
-          <a:lstStyle/>
-          <a:p>
-            <a:pPr indent="0" marL="0">
-              <a:buNone/>
-            </a:pPr>
-            <a:r>
-              <a:rPr lang="en-US" sz="1500" dirty="0">
-                <a:solidFill>
-                  <a:srgbClr val="1E293B"/>
-                </a:solidFill>
-                <a:latin typeface="Calibri" pitchFamily="34" charset="0"/>
-                <a:ea typeface="Calibri" pitchFamily="34" charset="-122"/>
-                <a:cs typeface="Calibri" pitchFamily="34" charset="-120"/>
-              </a:rPr>
-              <a:t>🌱  sadness — base word: sad</a:t>
-            </a:r>
-            <a:endParaRPr lang="en-US" sz="1500" dirty="0"/>
-          </a:p>
-        </p:txBody>
-      </p:sp>
-      <p:sp>
-        <p:nvSpPr>
-          <p:cNvPr id="11" name="Shape 9"/>
-          <p:cNvSpPr/>
-          <p:nvPr/>
-        </p:nvSpPr>
-        <p:spPr>
-          <a:xfrm>
-            <a:off x="365760" y="3182112"/>
-            <a:ext cx="8412480" cy="621792"/>
-          </a:xfrm>
-          <a:prstGeom prst="roundRect">
-            <a:avLst>
-              <a:gd name="adj" fmla="val 14706"/>
-            </a:avLst>
-          </a:prstGeom>
-          <a:solidFill>
-            <a:srgbClr val="F8F4FF"/>
-          </a:solidFill>
-          <a:ln/>
-          <a:effectLst>
-            <a:outerShdw sx="100000" sy="100000" kx="0" ky="0" algn="bl" rotWithShape="0" blurRad="101600" dist="38100" dir="2700000">
-              <a:srgbClr val="000000">
-                <a:alpha val="12000"/>
-              </a:srgbClr>
-            </a:outerShdw>
-          </a:effectLst>
-        </p:spPr>
-      </p:sp>
-      <p:sp>
-        <p:nvSpPr>
-          <p:cNvPr id="12" name="Text 10"/>
-          <p:cNvSpPr/>
-          <p:nvPr/>
-        </p:nvSpPr>
-        <p:spPr>
-          <a:xfrm>
-            <a:off x="594360" y="3300984"/>
-            <a:ext cx="7863840" cy="384048"/>
-          </a:xfrm>
-          <a:prstGeom prst="rect">
-            <a:avLst/>
-          </a:prstGeom>
-          <a:noFill/>
-          <a:ln/>
-        </p:spPr>
-        <p:txBody>
-          <a:bodyPr wrap="square" lIns="0" tIns="0" rIns="0" bIns="0" rtlCol="0" anchor="ctr"/>
-          <a:lstStyle/>
-          <a:p>
-            <a:pPr indent="0" marL="0">
-              <a:buNone/>
-            </a:pPr>
-            <a:r>
-              <a:rPr lang="en-US" sz="1500" dirty="0">
-                <a:solidFill>
-                  <a:srgbClr val="1E293B"/>
-                </a:solidFill>
-                <a:latin typeface="Calibri" pitchFamily="34" charset="0"/>
-                <a:ea typeface="Calibri" pitchFamily="34" charset="-122"/>
-                <a:cs typeface="Calibri" pitchFamily="34" charset="-120"/>
-              </a:rPr>
-              <a:t>🌱  goodness — base word: good</a:t>
-            </a:r>
-            <a:endParaRPr lang="en-US" sz="1500" dirty="0"/>
+            <a:off x="566928" y="2816352"/>
+            <a:ext cx="8229600" cy="237744"/>
+          </a:xfrm>
+          <a:prstGeom prst="rect">
+            <a:avLst/>
+          </a:prstGeom>
+          <a:noFill/>
+          <a:ln/>
+        </p:spPr>
+        <p:txBody>
+          <a:bodyPr wrap="square" lIns="0" tIns="0" rIns="0" bIns="0" rtlCol="0" anchor="ctr"/>
+          <a:lstStyle/>
+          <a:p>
+            <a:pPr indent="0" marL="0">
+              <a:buNone/>
+            </a:pPr>
+            <a:r>
+              <a:rPr lang="en-US" sz="1100" b="1" spc="100" kern="0" dirty="0">
+                <a:solidFill>
+                  <a:srgbClr val="34B76F"/>
+                </a:solidFill>
+                <a:latin typeface="Calibri" pitchFamily="34" charset="0"/>
+                <a:ea typeface="Calibri" pitchFamily="34" charset="-122"/>
+                <a:cs typeface="Calibri" pitchFamily="34" charset="-120"/>
+              </a:rPr>
+              <a:t>✅  CORRECTED</a:t>
+            </a:r>
+            <a:endParaRPr lang="en-US" sz="1100" dirty="0"/>
+          </a:p>
+        </p:txBody>
+      </p:sp>
+      <p:sp>
+        <p:nvSpPr>
+          <p:cNvPr id="9" name="Text 7"/>
+          <p:cNvSpPr/>
+          <p:nvPr/>
+        </p:nvSpPr>
+        <p:spPr>
+          <a:xfrm>
+            <a:off x="566928" y="3072384"/>
+            <a:ext cx="8010144" cy="685800"/>
+          </a:xfrm>
+          <a:prstGeom prst="rect">
+            <a:avLst/>
+          </a:prstGeom>
+          <a:noFill/>
+          <a:ln/>
+        </p:spPr>
+        <p:txBody>
+          <a:bodyPr wrap="square" lIns="0" tIns="0" rIns="0" bIns="0" rtlCol="0" anchor="ctr"/>
+          <a:lstStyle/>
+          <a:p>
+            <a:pPr indent="0" marL="0">
+              <a:buNone/>
+            </a:pPr>
+            <a:r>
+              <a:rPr lang="en-US" sz="1400" i="1" dirty="0">
+                <a:solidFill>
+                  <a:srgbClr val="1E293B"/>
+                </a:solidFill>
+                <a:latin typeface="Calibri" pitchFamily="34" charset="0"/>
+                <a:ea typeface="Calibri" pitchFamily="34" charset="-122"/>
+                <a:cs typeface="Calibri" pitchFamily="34" charset="-120"/>
+              </a:rPr>
+              <a:t>Despereaux moved through the dungeon with a needle and a thread of light to guide him forward.</a:t>
+            </a:r>
+            <a:endParaRPr lang="en-US" sz="1400" dirty="0"/>
+          </a:p>
+          <a:p>
+            <a:pPr indent="0" marL="0">
+              <a:buNone/>
+            </a:pPr>
+            <a:endParaRPr lang="en-US" sz="1400" dirty="0"/>
           </a:p>
         </p:txBody>
       </p:sp>
